--- a/output/wordlabs-prevent-3day.pptx
+++ b/output/wordlabs-prevent-3day.pptx
@@ -6040,7 +6040,7 @@
                 <a:ea typeface="Calibri" pitchFamily="34" charset="-122"/>
                 <a:cs typeface="Calibri" pitchFamily="34" charset="-120"/>
               </a:rPr>
-              <a:t>Good hygiene is the best form of </a:t>
+              <a:t>Good hygiene is a key part of </a:t>
             </a:r>
             <a:pPr algn="l" indent="0" marL="0">
               <a:buNone/>
@@ -6071,7 +6071,7 @@
                 <a:ea typeface="Calibri" pitchFamily="34" charset="-122"/>
                 <a:cs typeface="Calibri" pitchFamily="34" charset="-120"/>
               </a:rPr>
-              <a:t>, so always wash your hands to </a:t>
+              <a:t>, and washing your hands regularly is </a:t>
             </a:r>
             <a:pPr algn="l" indent="0" marL="0">
               <a:buNone/>
@@ -6088,7 +6088,7 @@
                 <a:ea typeface="Calibri" pitchFamily="34" charset="-122"/>
                 <a:cs typeface="Calibri" pitchFamily="34" charset="-120"/>
               </a:rPr>
-              <a:t>prevent</a:t>
+              <a:t>preventive</a:t>
             </a:r>
             <a:pPr algn="l" indent="0" marL="0">
               <a:buNone/>
@@ -6102,7 +6102,7 @@
                 <a:ea typeface="Calibri" pitchFamily="34" charset="-122"/>
                 <a:cs typeface="Calibri" pitchFamily="34" charset="-120"/>
               </a:rPr>
-              <a:t> getting sick.</a:t>
+              <a:t> behaviour.</a:t>
             </a:r>
             <a:endParaRPr lang="en-US" sz="1800" dirty="0"/>
           </a:p>
@@ -6385,7 +6385,7 @@
                 <a:ea typeface="Trebuchet MS" pitchFamily="34" charset="-122"/>
                 <a:cs typeface="Trebuchet MS" pitchFamily="34" charset="-120"/>
               </a:rPr>
-              <a:t>prevent</a:t>
+              <a:t>preventive</a:t>
             </a:r>
             <a:endParaRPr lang="en-US" sz="1400" dirty="0"/>
           </a:p>
@@ -8084,7 +8084,7 @@
                 <a:ea typeface="Calibri" pitchFamily="34" charset="-122"/>
                 <a:cs typeface="Calibri" pitchFamily="34" charset="-120"/>
               </a:rPr>
-              <a:t>action or process</a:t>
+              <a:t>act or process of</a:t>
             </a:r>
             <a:endParaRPr lang="en-US" sz="850" dirty="0"/>
           </a:p>
@@ -9181,7 +9181,7 @@
                 <a:ea typeface="Calibri" pitchFamily="34" charset="-122"/>
                 <a:cs typeface="Calibri" pitchFamily="34" charset="-120"/>
               </a:rPr>
-              <a:t>action or process</a:t>
+              <a:t>act or process of</a:t>
             </a:r>
             <a:endParaRPr lang="en-US" sz="850" dirty="0"/>
           </a:p>
@@ -10515,7 +10515,7 @@
                 <a:ea typeface="Calibri" pitchFamily="34" charset="-122"/>
                 <a:cs typeface="Calibri" pitchFamily="34" charset="-120"/>
               </a:rPr>
-              <a:t>action or process</a:t>
+              <a:t>act or process of</a:t>
             </a:r>
             <a:endParaRPr lang="en-US" sz="850" dirty="0"/>
           </a:p>
@@ -12041,7 +12041,7 @@
                 <a:ea typeface="Trebuchet MS" pitchFamily="34" charset="-122"/>
                 <a:cs typeface="Trebuchet MS" pitchFamily="34" charset="-120"/>
               </a:rPr>
-              <a:t>prevent</a:t>
+              <a:t>preventive</a:t>
             </a:r>
             <a:endParaRPr lang="en-US" sz="2800" dirty="0"/>
           </a:p>
@@ -12868,7 +12868,7 @@
                 <a:ea typeface="Trebuchet MS" pitchFamily="34" charset="-122"/>
                 <a:cs typeface="Trebuchet MS" pitchFamily="34" charset="-120"/>
               </a:rPr>
-              <a:t>prevent</a:t>
+              <a:t>preventive</a:t>
             </a:r>
             <a:endParaRPr lang="en-US" sz="2800" dirty="0"/>
           </a:p>
@@ -12948,7 +12948,7 @@
         </p:nvSpPr>
         <p:spPr>
           <a:xfrm>
-            <a:off x="2938272" y="2258568"/>
+            <a:off x="2221992" y="2258568"/>
             <a:ext cx="1828800" cy="292608"/>
           </a:xfrm>
           <a:prstGeom prst="rect">
@@ -12982,7 +12982,7 @@
         </p:nvSpPr>
         <p:spPr>
           <a:xfrm>
-            <a:off x="2938272" y="2258568"/>
+            <a:off x="2221992" y="2258568"/>
             <a:ext cx="1828800" cy="292608"/>
           </a:xfrm>
           <a:prstGeom prst="rect">
@@ -13021,7 +13021,7 @@
         </p:nvSpPr>
         <p:spPr>
           <a:xfrm>
-            <a:off x="2938272" y="2569464"/>
+            <a:off x="2221992" y="2569464"/>
             <a:ext cx="1828800" cy="201168"/>
           </a:xfrm>
           <a:prstGeom prst="rect">
@@ -13060,7 +13060,7 @@
         </p:nvSpPr>
         <p:spPr>
           <a:xfrm>
-            <a:off x="5803392" y="2258568"/>
+            <a:off x="4370832" y="2258568"/>
             <a:ext cx="1828800" cy="292608"/>
           </a:xfrm>
           <a:prstGeom prst="rect">
@@ -13094,7 +13094,7 @@
         </p:nvSpPr>
         <p:spPr>
           <a:xfrm>
-            <a:off x="5803392" y="2258568"/>
+            <a:off x="4370832" y="2258568"/>
             <a:ext cx="1828800" cy="292608"/>
           </a:xfrm>
           <a:prstGeom prst="rect">
@@ -13133,7 +13133,7 @@
         </p:nvSpPr>
         <p:spPr>
           <a:xfrm>
-            <a:off x="5803392" y="2569464"/>
+            <a:off x="4370832" y="2569464"/>
             <a:ext cx="1828800" cy="201168"/>
           </a:xfrm>
           <a:prstGeom prst="rect">
@@ -13172,6 +13172,118 @@
         </p:nvSpPr>
         <p:spPr>
           <a:xfrm>
+            <a:off x="6519672" y="2258568"/>
+            <a:ext cx="1828800" cy="292608"/>
+          </a:xfrm>
+          <a:prstGeom prst="rect">
+            <a:avLst>
+              <a:gd name="adj" fmla="val 25000"/>
+            </a:avLst>
+          </a:prstGeom>
+          <a:solidFill>
+            <a:srgbClr val="FCE7F3"/>
+          </a:solidFill>
+          <a:ln w="19050">
+            <a:solidFill>
+              <a:srgbClr val="DB2777"/>
+            </a:solidFill>
+            <a:prstDash val="solid"/>
+          </a:ln>
+          <a:effectLst>
+            <a:outerShdw sx="100000" sy="100000" kx="0" ky="0" algn="bl" rotWithShape="0" blurRad="101600" dist="38100" dir="8100000">
+              <a:srgbClr val="000000">
+                <a:alpha val="12000"/>
+              </a:srgbClr>
+            </a:outerShdw>
+          </a:effectLst>
+        </p:spPr>
+      </p:sp>
+      <p:sp>
+        <p:nvSpPr>
+          <p:cNvPr id="23" name="Text 21"/>
+          <p:cNvSpPr/>
+          <p:nvPr/>
+        </p:nvSpPr>
+        <p:spPr>
+          <a:xfrm>
+            <a:off x="6519672" y="2258568"/>
+            <a:ext cx="1828800" cy="292608"/>
+          </a:xfrm>
+          <a:prstGeom prst="rect">
+            <a:avLst/>
+          </a:prstGeom>
+          <a:noFill/>
+          <a:ln/>
+        </p:spPr>
+        <p:txBody>
+          <a:bodyPr wrap="square" lIns="0" tIns="0" rIns="0" bIns="0" rtlCol="0" anchor="ctr"/>
+          <a:lstStyle/>
+          <a:p>
+            <a:pPr algn="ctr" indent="0" marL="0">
+              <a:buNone/>
+            </a:pPr>
+            <a:r>
+              <a:rPr lang="en-US" sz="1300" b="1" dirty="0">
+                <a:solidFill>
+                  <a:srgbClr val="9D174D"/>
+                </a:solidFill>
+                <a:latin typeface="Trebuchet MS" pitchFamily="34" charset="0"/>
+                <a:ea typeface="Trebuchet MS" pitchFamily="34" charset="-122"/>
+                <a:cs typeface="Trebuchet MS" pitchFamily="34" charset="-120"/>
+              </a:rPr>
+              <a:t>ive</a:t>
+            </a:r>
+            <a:endParaRPr lang="en-US" sz="1300" dirty="0"/>
+          </a:p>
+        </p:txBody>
+      </p:sp>
+      <p:sp>
+        <p:nvSpPr>
+          <p:cNvPr id="24" name="Text 22"/>
+          <p:cNvSpPr/>
+          <p:nvPr/>
+        </p:nvSpPr>
+        <p:spPr>
+          <a:xfrm>
+            <a:off x="6519672" y="2569464"/>
+            <a:ext cx="1828800" cy="201168"/>
+          </a:xfrm>
+          <a:prstGeom prst="rect">
+            <a:avLst/>
+          </a:prstGeom>
+          <a:noFill/>
+          <a:ln/>
+        </p:spPr>
+        <p:txBody>
+          <a:bodyPr wrap="square" lIns="0" tIns="0" rIns="0" bIns="0" rtlCol="0" anchor="t"/>
+          <a:lstStyle/>
+          <a:p>
+            <a:pPr algn="ctr" indent="0" marL="0">
+              <a:buNone/>
+            </a:pPr>
+            <a:r>
+              <a:rPr lang="en-US" sz="850" dirty="0">
+                <a:solidFill>
+                  <a:srgbClr val="475569"/>
+                </a:solidFill>
+                <a:latin typeface="Calibri" pitchFamily="34" charset="0"/>
+                <a:ea typeface="Calibri" pitchFamily="34" charset="-122"/>
+                <a:cs typeface="Calibri" pitchFamily="34" charset="-120"/>
+              </a:rPr>
+              <a:t>having the quality of</a:t>
+            </a:r>
+            <a:endParaRPr lang="en-US" sz="850" dirty="0"/>
+          </a:p>
+        </p:txBody>
+      </p:sp>
+      <p:sp>
+        <p:nvSpPr>
+          <p:cNvPr id="25" name="Shape 23"/>
+          <p:cNvSpPr/>
+          <p:nvPr/>
+        </p:nvSpPr>
+        <p:spPr>
+          <a:xfrm>
             <a:off x="365760" y="3273552"/>
             <a:ext cx="1371600" cy="658368"/>
           </a:xfrm>
@@ -13193,7 +13305,7 @@
       </p:sp>
       <p:sp>
         <p:nvSpPr>
-          <p:cNvPr id="23" name="Text 21"/>
+          <p:cNvPr id="26" name="Text 24"/>
           <p:cNvSpPr/>
           <p:nvPr/>
         </p:nvSpPr>
@@ -13232,7 +13344,7 @@
       </p:sp>
       <p:sp>
         <p:nvSpPr>
-          <p:cNvPr id="24" name="Shape 22"/>
+          <p:cNvPr id="27" name="Shape 25"/>
           <p:cNvSpPr/>
           <p:nvPr/>
         </p:nvSpPr>
@@ -13259,7 +13371,7 @@
       </p:sp>
       <p:sp>
         <p:nvSpPr>
-          <p:cNvPr id="25" name="Text 23"/>
+          <p:cNvPr id="28" name="Text 26"/>
           <p:cNvSpPr/>
           <p:nvPr/>
         </p:nvSpPr>
@@ -13298,7 +13410,7 @@
       </p:sp>
       <p:sp>
         <p:nvSpPr>
-          <p:cNvPr id="26" name="Shape 24"/>
+          <p:cNvPr id="29" name="Shape 27"/>
           <p:cNvSpPr/>
           <p:nvPr/>
         </p:nvSpPr>
@@ -13325,7 +13437,7 @@
       </p:sp>
       <p:sp>
         <p:nvSpPr>
-          <p:cNvPr id="27" name="Text 25"/>
+          <p:cNvPr id="30" name="Text 28"/>
           <p:cNvSpPr/>
           <p:nvPr/>
         </p:nvSpPr>
@@ -13364,7 +13476,7 @@
       </p:sp>
       <p:sp>
         <p:nvSpPr>
-          <p:cNvPr id="28" name="Shape 26"/>
+          <p:cNvPr id="31" name="Shape 29"/>
           <p:cNvSpPr/>
           <p:nvPr/>
         </p:nvSpPr>
@@ -13391,7 +13503,7 @@
       </p:sp>
       <p:sp>
         <p:nvSpPr>
-          <p:cNvPr id="29" name="Text 27"/>
+          <p:cNvPr id="32" name="Text 30"/>
           <p:cNvSpPr/>
           <p:nvPr/>
         </p:nvSpPr>
@@ -13853,7 +13965,7 @@
                 <a:ea typeface="Trebuchet MS" pitchFamily="34" charset="-122"/>
                 <a:cs typeface="Trebuchet MS" pitchFamily="34" charset="-120"/>
               </a:rPr>
-              <a:t>prevent</a:t>
+              <a:t>preventive</a:t>
             </a:r>
             <a:endParaRPr lang="en-US" sz="2800" dirty="0"/>
           </a:p>
@@ -13933,7 +14045,7 @@
         </p:nvSpPr>
         <p:spPr>
           <a:xfrm>
-            <a:off x="2938272" y="2258568"/>
+            <a:off x="2221992" y="2258568"/>
             <a:ext cx="1828800" cy="292608"/>
           </a:xfrm>
           <a:prstGeom prst="rect">
@@ -13967,7 +14079,7 @@
         </p:nvSpPr>
         <p:spPr>
           <a:xfrm>
-            <a:off x="2938272" y="2258568"/>
+            <a:off x="2221992" y="2258568"/>
             <a:ext cx="1828800" cy="292608"/>
           </a:xfrm>
           <a:prstGeom prst="rect">
@@ -14006,7 +14118,7 @@
         </p:nvSpPr>
         <p:spPr>
           <a:xfrm>
-            <a:off x="2938272" y="2569464"/>
+            <a:off x="2221992" y="2569464"/>
             <a:ext cx="1828800" cy="201168"/>
           </a:xfrm>
           <a:prstGeom prst="rect">
@@ -14045,7 +14157,7 @@
         </p:nvSpPr>
         <p:spPr>
           <a:xfrm>
-            <a:off x="5803392" y="2258568"/>
+            <a:off x="4370832" y="2258568"/>
             <a:ext cx="1828800" cy="292608"/>
           </a:xfrm>
           <a:prstGeom prst="rect">
@@ -14079,7 +14191,7 @@
         </p:nvSpPr>
         <p:spPr>
           <a:xfrm>
-            <a:off x="5803392" y="2258568"/>
+            <a:off x="4370832" y="2258568"/>
             <a:ext cx="1828800" cy="292608"/>
           </a:xfrm>
           <a:prstGeom prst="rect">
@@ -14118,7 +14230,7 @@
         </p:nvSpPr>
         <p:spPr>
           <a:xfrm>
-            <a:off x="5803392" y="2569464"/>
+            <a:off x="4370832" y="2569464"/>
             <a:ext cx="1828800" cy="201168"/>
           </a:xfrm>
           <a:prstGeom prst="rect">
@@ -14157,6 +14269,118 @@
         </p:nvSpPr>
         <p:spPr>
           <a:xfrm>
+            <a:off x="6519672" y="2258568"/>
+            <a:ext cx="1828800" cy="292608"/>
+          </a:xfrm>
+          <a:prstGeom prst="rect">
+            <a:avLst>
+              <a:gd name="adj" fmla="val 25000"/>
+            </a:avLst>
+          </a:prstGeom>
+          <a:solidFill>
+            <a:srgbClr val="FCE7F3"/>
+          </a:solidFill>
+          <a:ln w="19050">
+            <a:solidFill>
+              <a:srgbClr val="DB2777"/>
+            </a:solidFill>
+            <a:prstDash val="solid"/>
+          </a:ln>
+          <a:effectLst>
+            <a:outerShdw sx="100000" sy="100000" kx="0" ky="0" algn="bl" rotWithShape="0" blurRad="101600" dist="38100" dir="8100000">
+              <a:srgbClr val="000000">
+                <a:alpha val="12000"/>
+              </a:srgbClr>
+            </a:outerShdw>
+          </a:effectLst>
+        </p:spPr>
+      </p:sp>
+      <p:sp>
+        <p:nvSpPr>
+          <p:cNvPr id="23" name="Text 21"/>
+          <p:cNvSpPr/>
+          <p:nvPr/>
+        </p:nvSpPr>
+        <p:spPr>
+          <a:xfrm>
+            <a:off x="6519672" y="2258568"/>
+            <a:ext cx="1828800" cy="292608"/>
+          </a:xfrm>
+          <a:prstGeom prst="rect">
+            <a:avLst/>
+          </a:prstGeom>
+          <a:noFill/>
+          <a:ln/>
+        </p:spPr>
+        <p:txBody>
+          <a:bodyPr wrap="square" lIns="0" tIns="0" rIns="0" bIns="0" rtlCol="0" anchor="ctr"/>
+          <a:lstStyle/>
+          <a:p>
+            <a:pPr algn="ctr" indent="0" marL="0">
+              <a:buNone/>
+            </a:pPr>
+            <a:r>
+              <a:rPr lang="en-US" sz="1300" b="1" dirty="0">
+                <a:solidFill>
+                  <a:srgbClr val="9D174D"/>
+                </a:solidFill>
+                <a:latin typeface="Trebuchet MS" pitchFamily="34" charset="0"/>
+                <a:ea typeface="Trebuchet MS" pitchFamily="34" charset="-122"/>
+                <a:cs typeface="Trebuchet MS" pitchFamily="34" charset="-120"/>
+              </a:rPr>
+              <a:t>ive</a:t>
+            </a:r>
+            <a:endParaRPr lang="en-US" sz="1300" dirty="0"/>
+          </a:p>
+        </p:txBody>
+      </p:sp>
+      <p:sp>
+        <p:nvSpPr>
+          <p:cNvPr id="24" name="Text 22"/>
+          <p:cNvSpPr/>
+          <p:nvPr/>
+        </p:nvSpPr>
+        <p:spPr>
+          <a:xfrm>
+            <a:off x="6519672" y="2569464"/>
+            <a:ext cx="1828800" cy="201168"/>
+          </a:xfrm>
+          <a:prstGeom prst="rect">
+            <a:avLst/>
+          </a:prstGeom>
+          <a:noFill/>
+          <a:ln/>
+        </p:spPr>
+        <p:txBody>
+          <a:bodyPr wrap="square" lIns="0" tIns="0" rIns="0" bIns="0" rtlCol="0" anchor="t"/>
+          <a:lstStyle/>
+          <a:p>
+            <a:pPr algn="ctr" indent="0" marL="0">
+              <a:buNone/>
+            </a:pPr>
+            <a:r>
+              <a:rPr lang="en-US" sz="850" dirty="0">
+                <a:solidFill>
+                  <a:srgbClr val="475569"/>
+                </a:solidFill>
+                <a:latin typeface="Calibri" pitchFamily="34" charset="0"/>
+                <a:ea typeface="Calibri" pitchFamily="34" charset="-122"/>
+                <a:cs typeface="Calibri" pitchFamily="34" charset="-120"/>
+              </a:rPr>
+              <a:t>having the quality of</a:t>
+            </a:r>
+            <a:endParaRPr lang="en-US" sz="850" dirty="0"/>
+          </a:p>
+        </p:txBody>
+      </p:sp>
+      <p:sp>
+        <p:nvSpPr>
+          <p:cNvPr id="25" name="Shape 23"/>
+          <p:cNvSpPr/>
+          <p:nvPr/>
+        </p:nvSpPr>
+        <p:spPr>
+          <a:xfrm>
             <a:off x="365760" y="3273552"/>
             <a:ext cx="1371600" cy="658368"/>
           </a:xfrm>
@@ -14178,7 +14402,7 @@
       </p:sp>
       <p:sp>
         <p:nvSpPr>
-          <p:cNvPr id="23" name="Text 21"/>
+          <p:cNvPr id="26" name="Text 24"/>
           <p:cNvSpPr/>
           <p:nvPr/>
         </p:nvSpPr>
@@ -14217,7 +14441,7 @@
       </p:sp>
       <p:sp>
         <p:nvSpPr>
-          <p:cNvPr id="24" name="Shape 22"/>
+          <p:cNvPr id="27" name="Shape 25"/>
           <p:cNvSpPr/>
           <p:nvPr/>
         </p:nvSpPr>
@@ -14244,13 +14468,13 @@
       </p:sp>
       <p:sp>
         <p:nvSpPr>
-          <p:cNvPr id="25" name="Shape 23"/>
-          <p:cNvSpPr/>
-          <p:nvPr/>
-        </p:nvSpPr>
-        <p:spPr>
-          <a:xfrm>
-            <a:off x="2999232" y="3364992"/>
+          <p:cNvPr id="28" name="Shape 26"/>
+          <p:cNvSpPr/>
+          <p:nvPr/>
+        </p:nvSpPr>
+        <p:spPr>
+          <a:xfrm>
+            <a:off x="2313432" y="3364992"/>
             <a:ext cx="1645920" cy="475488"/>
           </a:xfrm>
           <a:prstGeom prst="rect">
@@ -14271,13 +14495,13 @@
       </p:sp>
       <p:sp>
         <p:nvSpPr>
-          <p:cNvPr id="26" name="Text 24"/>
-          <p:cNvSpPr/>
-          <p:nvPr/>
-        </p:nvSpPr>
-        <p:spPr>
-          <a:xfrm>
-            <a:off x="2999232" y="3364992"/>
+          <p:cNvPr id="29" name="Text 27"/>
+          <p:cNvSpPr/>
+          <p:nvPr/>
+        </p:nvSpPr>
+        <p:spPr>
+          <a:xfrm>
+            <a:off x="2313432" y="3364992"/>
             <a:ext cx="1645920" cy="475488"/>
           </a:xfrm>
           <a:prstGeom prst="rect">
@@ -14310,14 +14534,14 @@
       </p:sp>
       <p:sp>
         <p:nvSpPr>
-          <p:cNvPr id="27" name="Text 25"/>
-          <p:cNvSpPr/>
-          <p:nvPr/>
-        </p:nvSpPr>
-        <p:spPr>
-          <a:xfrm>
-            <a:off x="4645152" y="3364992"/>
-            <a:ext cx="1097280" cy="475488"/>
+          <p:cNvPr id="30" name="Text 28"/>
+          <p:cNvSpPr/>
+          <p:nvPr/>
+        </p:nvSpPr>
+        <p:spPr>
+          <a:xfrm>
+            <a:off x="3959352" y="3364992"/>
+            <a:ext cx="411480" cy="475488"/>
           </a:xfrm>
           <a:prstGeom prst="rect">
             <a:avLst/>
@@ -14349,13 +14573,13 @@
       </p:sp>
       <p:sp>
         <p:nvSpPr>
-          <p:cNvPr id="28" name="Shape 26"/>
-          <p:cNvSpPr/>
-          <p:nvPr/>
-        </p:nvSpPr>
-        <p:spPr>
-          <a:xfrm>
-            <a:off x="5742432" y="3364992"/>
+          <p:cNvPr id="31" name="Shape 29"/>
+          <p:cNvSpPr/>
+          <p:nvPr/>
+        </p:nvSpPr>
+        <p:spPr>
+          <a:xfrm>
+            <a:off x="4370832" y="3364992"/>
             <a:ext cx="1645920" cy="475488"/>
           </a:xfrm>
           <a:prstGeom prst="rect">
@@ -14376,13 +14600,13 @@
       </p:sp>
       <p:sp>
         <p:nvSpPr>
-          <p:cNvPr id="29" name="Text 27"/>
-          <p:cNvSpPr/>
-          <p:nvPr/>
-        </p:nvSpPr>
-        <p:spPr>
-          <a:xfrm>
-            <a:off x="5742432" y="3364992"/>
+          <p:cNvPr id="32" name="Text 30"/>
+          <p:cNvSpPr/>
+          <p:nvPr/>
+        </p:nvSpPr>
+        <p:spPr>
+          <a:xfrm>
+            <a:off x="4370832" y="3364992"/>
             <a:ext cx="1645920" cy="475488"/>
           </a:xfrm>
           <a:prstGeom prst="rect">
@@ -14407,7 +14631,7 @@
                 <a:ea typeface="Trebuchet MS" pitchFamily="34" charset="-122"/>
                 <a:cs typeface="Trebuchet MS" pitchFamily="34" charset="-120"/>
               </a:rPr>
-              <a:t>vent</a:t>
+              <a:t>ven</a:t>
             </a:r>
             <a:endParaRPr lang="en-US" sz="1400" dirty="0"/>
           </a:p>
@@ -14415,7 +14639,112 @@
       </p:sp>
       <p:sp>
         <p:nvSpPr>
-          <p:cNvPr id="30" name="Shape 28"/>
+          <p:cNvPr id="33" name="Text 31"/>
+          <p:cNvSpPr/>
+          <p:nvPr/>
+        </p:nvSpPr>
+        <p:spPr>
+          <a:xfrm>
+            <a:off x="6016752" y="3364992"/>
+            <a:ext cx="411480" cy="475488"/>
+          </a:xfrm>
+          <a:prstGeom prst="rect">
+            <a:avLst/>
+          </a:prstGeom>
+          <a:noFill/>
+          <a:ln/>
+        </p:spPr>
+        <p:txBody>
+          <a:bodyPr wrap="square" lIns="0" tIns="0" rIns="0" bIns="0" rtlCol="0" anchor="ctr"/>
+          <a:lstStyle/>
+          <a:p>
+            <a:pPr algn="ctr" indent="0" marL="0">
+              <a:buNone/>
+            </a:pPr>
+            <a:r>
+              <a:rPr lang="en-US" sz="1600" b="1" dirty="0">
+                <a:solidFill>
+                  <a:srgbClr val="0D9488"/>
+                </a:solidFill>
+                <a:latin typeface="Trebuchet MS" pitchFamily="34" charset="0"/>
+                <a:ea typeface="Trebuchet MS" pitchFamily="34" charset="-122"/>
+                <a:cs typeface="Trebuchet MS" pitchFamily="34" charset="-120"/>
+              </a:rPr>
+              <a:t>·</a:t>
+            </a:r>
+            <a:endParaRPr lang="en-US" sz="1600" dirty="0"/>
+          </a:p>
+        </p:txBody>
+      </p:sp>
+      <p:sp>
+        <p:nvSpPr>
+          <p:cNvPr id="34" name="Shape 32"/>
+          <p:cNvSpPr/>
+          <p:nvPr/>
+        </p:nvSpPr>
+        <p:spPr>
+          <a:xfrm>
+            <a:off x="6428232" y="3364992"/>
+            <a:ext cx="1645920" cy="475488"/>
+          </a:xfrm>
+          <a:prstGeom prst="rect">
+            <a:avLst>
+              <a:gd name="adj" fmla="val 9615"/>
+            </a:avLst>
+          </a:prstGeom>
+          <a:solidFill>
+            <a:srgbClr val="FFFFFF"/>
+          </a:solidFill>
+          <a:ln w="12700">
+            <a:solidFill>
+              <a:srgbClr val="0D9488"/>
+            </a:solidFill>
+            <a:prstDash val="solid"/>
+          </a:ln>
+        </p:spPr>
+      </p:sp>
+      <p:sp>
+        <p:nvSpPr>
+          <p:cNvPr id="35" name="Text 33"/>
+          <p:cNvSpPr/>
+          <p:nvPr/>
+        </p:nvSpPr>
+        <p:spPr>
+          <a:xfrm>
+            <a:off x="6428232" y="3364992"/>
+            <a:ext cx="1645920" cy="475488"/>
+          </a:xfrm>
+          <a:prstGeom prst="rect">
+            <a:avLst/>
+          </a:prstGeom>
+          <a:noFill/>
+          <a:ln/>
+        </p:spPr>
+        <p:txBody>
+          <a:bodyPr wrap="square" lIns="0" tIns="0" rIns="0" bIns="0" rtlCol="0" anchor="ctr"/>
+          <a:lstStyle/>
+          <a:p>
+            <a:pPr algn="ctr" indent="0" marL="0">
+              <a:buNone/>
+            </a:pPr>
+            <a:r>
+              <a:rPr lang="en-US" sz="1400" b="1" dirty="0">
+                <a:solidFill>
+                  <a:srgbClr val="0D9488"/>
+                </a:solidFill>
+                <a:latin typeface="Trebuchet MS" pitchFamily="34" charset="0"/>
+                <a:ea typeface="Trebuchet MS" pitchFamily="34" charset="-122"/>
+                <a:cs typeface="Trebuchet MS" pitchFamily="34" charset="-120"/>
+              </a:rPr>
+              <a:t>tive</a:t>
+            </a:r>
+            <a:endParaRPr lang="en-US" sz="1400" dirty="0"/>
+          </a:p>
+        </p:txBody>
+      </p:sp>
+      <p:sp>
+        <p:nvSpPr>
+          <p:cNvPr id="36" name="Shape 34"/>
           <p:cNvSpPr/>
           <p:nvPr/>
         </p:nvSpPr>
@@ -14442,7 +14771,7 @@
       </p:sp>
       <p:sp>
         <p:nvSpPr>
-          <p:cNvPr id="31" name="Text 29"/>
+          <p:cNvPr id="37" name="Text 35"/>
           <p:cNvSpPr/>
           <p:nvPr/>
         </p:nvSpPr>
@@ -14481,7 +14810,7 @@
       </p:sp>
       <p:sp>
         <p:nvSpPr>
-          <p:cNvPr id="32" name="Shape 30"/>
+          <p:cNvPr id="38" name="Shape 36"/>
           <p:cNvSpPr/>
           <p:nvPr/>
         </p:nvSpPr>
@@ -14508,7 +14837,7 @@
       </p:sp>
       <p:sp>
         <p:nvSpPr>
-          <p:cNvPr id="33" name="Text 31"/>
+          <p:cNvPr id="39" name="Text 37"/>
           <p:cNvSpPr/>
           <p:nvPr/>
         </p:nvSpPr>
@@ -15235,7 +15564,7 @@
                 <a:ea typeface="Trebuchet MS" pitchFamily="34" charset="-122"/>
                 <a:cs typeface="Trebuchet MS" pitchFamily="34" charset="-120"/>
               </a:rPr>
-              <a:t>prevent</a:t>
+              <a:t>preventive</a:t>
             </a:r>
             <a:endParaRPr lang="en-US" sz="2800" dirty="0"/>
           </a:p>
@@ -15315,7 +15644,7 @@
         </p:nvSpPr>
         <p:spPr>
           <a:xfrm>
-            <a:off x="2938272" y="2258568"/>
+            <a:off x="2221992" y="2258568"/>
             <a:ext cx="1828800" cy="292608"/>
           </a:xfrm>
           <a:prstGeom prst="rect">
@@ -15349,7 +15678,7 @@
         </p:nvSpPr>
         <p:spPr>
           <a:xfrm>
-            <a:off x="2938272" y="2258568"/>
+            <a:off x="2221992" y="2258568"/>
             <a:ext cx="1828800" cy="292608"/>
           </a:xfrm>
           <a:prstGeom prst="rect">
@@ -15388,7 +15717,7 @@
         </p:nvSpPr>
         <p:spPr>
           <a:xfrm>
-            <a:off x="2938272" y="2569464"/>
+            <a:off x="2221992" y="2569464"/>
             <a:ext cx="1828800" cy="201168"/>
           </a:xfrm>
           <a:prstGeom prst="rect">
@@ -15427,7 +15756,7 @@
         </p:nvSpPr>
         <p:spPr>
           <a:xfrm>
-            <a:off x="5803392" y="2258568"/>
+            <a:off x="4370832" y="2258568"/>
             <a:ext cx="1828800" cy="292608"/>
           </a:xfrm>
           <a:prstGeom prst="rect">
@@ -15461,7 +15790,7 @@
         </p:nvSpPr>
         <p:spPr>
           <a:xfrm>
-            <a:off x="5803392" y="2258568"/>
+            <a:off x="4370832" y="2258568"/>
             <a:ext cx="1828800" cy="292608"/>
           </a:xfrm>
           <a:prstGeom prst="rect">
@@ -15500,7 +15829,7 @@
         </p:nvSpPr>
         <p:spPr>
           <a:xfrm>
-            <a:off x="5803392" y="2569464"/>
+            <a:off x="4370832" y="2569464"/>
             <a:ext cx="1828800" cy="201168"/>
           </a:xfrm>
           <a:prstGeom prst="rect">
@@ -15539,6 +15868,118 @@
         </p:nvSpPr>
         <p:spPr>
           <a:xfrm>
+            <a:off x="6519672" y="2258568"/>
+            <a:ext cx="1828800" cy="292608"/>
+          </a:xfrm>
+          <a:prstGeom prst="rect">
+            <a:avLst>
+              <a:gd name="adj" fmla="val 25000"/>
+            </a:avLst>
+          </a:prstGeom>
+          <a:solidFill>
+            <a:srgbClr val="FCE7F3"/>
+          </a:solidFill>
+          <a:ln w="19050">
+            <a:solidFill>
+              <a:srgbClr val="DB2777"/>
+            </a:solidFill>
+            <a:prstDash val="solid"/>
+          </a:ln>
+          <a:effectLst>
+            <a:outerShdw sx="100000" sy="100000" kx="0" ky="0" algn="bl" rotWithShape="0" blurRad="101600" dist="38100" dir="8100000">
+              <a:srgbClr val="000000">
+                <a:alpha val="12000"/>
+              </a:srgbClr>
+            </a:outerShdw>
+          </a:effectLst>
+        </p:spPr>
+      </p:sp>
+      <p:sp>
+        <p:nvSpPr>
+          <p:cNvPr id="23" name="Text 21"/>
+          <p:cNvSpPr/>
+          <p:nvPr/>
+        </p:nvSpPr>
+        <p:spPr>
+          <a:xfrm>
+            <a:off x="6519672" y="2258568"/>
+            <a:ext cx="1828800" cy="292608"/>
+          </a:xfrm>
+          <a:prstGeom prst="rect">
+            <a:avLst/>
+          </a:prstGeom>
+          <a:noFill/>
+          <a:ln/>
+        </p:spPr>
+        <p:txBody>
+          <a:bodyPr wrap="square" lIns="0" tIns="0" rIns="0" bIns="0" rtlCol="0" anchor="ctr"/>
+          <a:lstStyle/>
+          <a:p>
+            <a:pPr algn="ctr" indent="0" marL="0">
+              <a:buNone/>
+            </a:pPr>
+            <a:r>
+              <a:rPr lang="en-US" sz="1300" b="1" dirty="0">
+                <a:solidFill>
+                  <a:srgbClr val="9D174D"/>
+                </a:solidFill>
+                <a:latin typeface="Trebuchet MS" pitchFamily="34" charset="0"/>
+                <a:ea typeface="Trebuchet MS" pitchFamily="34" charset="-122"/>
+                <a:cs typeface="Trebuchet MS" pitchFamily="34" charset="-120"/>
+              </a:rPr>
+              <a:t>ive</a:t>
+            </a:r>
+            <a:endParaRPr lang="en-US" sz="1300" dirty="0"/>
+          </a:p>
+        </p:txBody>
+      </p:sp>
+      <p:sp>
+        <p:nvSpPr>
+          <p:cNvPr id="24" name="Text 22"/>
+          <p:cNvSpPr/>
+          <p:nvPr/>
+        </p:nvSpPr>
+        <p:spPr>
+          <a:xfrm>
+            <a:off x="6519672" y="2569464"/>
+            <a:ext cx="1828800" cy="201168"/>
+          </a:xfrm>
+          <a:prstGeom prst="rect">
+            <a:avLst/>
+          </a:prstGeom>
+          <a:noFill/>
+          <a:ln/>
+        </p:spPr>
+        <p:txBody>
+          <a:bodyPr wrap="square" lIns="0" tIns="0" rIns="0" bIns="0" rtlCol="0" anchor="t"/>
+          <a:lstStyle/>
+          <a:p>
+            <a:pPr algn="ctr" indent="0" marL="0">
+              <a:buNone/>
+            </a:pPr>
+            <a:r>
+              <a:rPr lang="en-US" sz="850" dirty="0">
+                <a:solidFill>
+                  <a:srgbClr val="475569"/>
+                </a:solidFill>
+                <a:latin typeface="Calibri" pitchFamily="34" charset="0"/>
+                <a:ea typeface="Calibri" pitchFamily="34" charset="-122"/>
+                <a:cs typeface="Calibri" pitchFamily="34" charset="-120"/>
+              </a:rPr>
+              <a:t>having the quality of</a:t>
+            </a:r>
+            <a:endParaRPr lang="en-US" sz="850" dirty="0"/>
+          </a:p>
+        </p:txBody>
+      </p:sp>
+      <p:sp>
+        <p:nvSpPr>
+          <p:cNvPr id="25" name="Shape 23"/>
+          <p:cNvSpPr/>
+          <p:nvPr/>
+        </p:nvSpPr>
+        <p:spPr>
+          <a:xfrm>
             <a:off x="365760" y="3273552"/>
             <a:ext cx="1371600" cy="658368"/>
           </a:xfrm>
@@ -15560,7 +16001,7 @@
       </p:sp>
       <p:sp>
         <p:nvSpPr>
-          <p:cNvPr id="23" name="Text 21"/>
+          <p:cNvPr id="26" name="Text 24"/>
           <p:cNvSpPr/>
           <p:nvPr/>
         </p:nvSpPr>
@@ -15599,7 +16040,7 @@
       </p:sp>
       <p:sp>
         <p:nvSpPr>
-          <p:cNvPr id="24" name="Shape 22"/>
+          <p:cNvPr id="27" name="Shape 25"/>
           <p:cNvSpPr/>
           <p:nvPr/>
         </p:nvSpPr>
@@ -15626,13 +16067,13 @@
       </p:sp>
       <p:sp>
         <p:nvSpPr>
-          <p:cNvPr id="25" name="Shape 23"/>
-          <p:cNvSpPr/>
-          <p:nvPr/>
-        </p:nvSpPr>
-        <p:spPr>
-          <a:xfrm>
-            <a:off x="2999232" y="3364992"/>
+          <p:cNvPr id="28" name="Shape 26"/>
+          <p:cNvSpPr/>
+          <p:nvPr/>
+        </p:nvSpPr>
+        <p:spPr>
+          <a:xfrm>
+            <a:off x="2313432" y="3364992"/>
             <a:ext cx="1645920" cy="475488"/>
           </a:xfrm>
           <a:prstGeom prst="rect">
@@ -15653,13 +16094,13 @@
       </p:sp>
       <p:sp>
         <p:nvSpPr>
-          <p:cNvPr id="26" name="Text 24"/>
-          <p:cNvSpPr/>
-          <p:nvPr/>
-        </p:nvSpPr>
-        <p:spPr>
-          <a:xfrm>
-            <a:off x="2999232" y="3364992"/>
+          <p:cNvPr id="29" name="Text 27"/>
+          <p:cNvSpPr/>
+          <p:nvPr/>
+        </p:nvSpPr>
+        <p:spPr>
+          <a:xfrm>
+            <a:off x="2313432" y="3364992"/>
             <a:ext cx="1645920" cy="475488"/>
           </a:xfrm>
           <a:prstGeom prst="rect">
@@ -15692,14 +16133,14 @@
       </p:sp>
       <p:sp>
         <p:nvSpPr>
-          <p:cNvPr id="27" name="Text 25"/>
-          <p:cNvSpPr/>
-          <p:nvPr/>
-        </p:nvSpPr>
-        <p:spPr>
-          <a:xfrm>
-            <a:off x="4645152" y="3364992"/>
-            <a:ext cx="1097280" cy="475488"/>
+          <p:cNvPr id="30" name="Text 28"/>
+          <p:cNvSpPr/>
+          <p:nvPr/>
+        </p:nvSpPr>
+        <p:spPr>
+          <a:xfrm>
+            <a:off x="3959352" y="3364992"/>
+            <a:ext cx="411480" cy="475488"/>
           </a:xfrm>
           <a:prstGeom prst="rect">
             <a:avLst/>
@@ -15731,13 +16172,13 @@
       </p:sp>
       <p:sp>
         <p:nvSpPr>
-          <p:cNvPr id="28" name="Shape 26"/>
-          <p:cNvSpPr/>
-          <p:nvPr/>
-        </p:nvSpPr>
-        <p:spPr>
-          <a:xfrm>
-            <a:off x="5742432" y="3364992"/>
+          <p:cNvPr id="31" name="Shape 29"/>
+          <p:cNvSpPr/>
+          <p:nvPr/>
+        </p:nvSpPr>
+        <p:spPr>
+          <a:xfrm>
+            <a:off x="4370832" y="3364992"/>
             <a:ext cx="1645920" cy="475488"/>
           </a:xfrm>
           <a:prstGeom prst="rect">
@@ -15758,13 +16199,13 @@
       </p:sp>
       <p:sp>
         <p:nvSpPr>
-          <p:cNvPr id="29" name="Text 27"/>
-          <p:cNvSpPr/>
-          <p:nvPr/>
-        </p:nvSpPr>
-        <p:spPr>
-          <a:xfrm>
-            <a:off x="5742432" y="3364992"/>
+          <p:cNvPr id="32" name="Text 30"/>
+          <p:cNvSpPr/>
+          <p:nvPr/>
+        </p:nvSpPr>
+        <p:spPr>
+          <a:xfrm>
+            <a:off x="4370832" y="3364992"/>
             <a:ext cx="1645920" cy="475488"/>
           </a:xfrm>
           <a:prstGeom prst="rect">
@@ -15789,7 +16230,7 @@
                 <a:ea typeface="Trebuchet MS" pitchFamily="34" charset="-122"/>
                 <a:cs typeface="Trebuchet MS" pitchFamily="34" charset="-120"/>
               </a:rPr>
-              <a:t>vent</a:t>
+              <a:t>ven</a:t>
             </a:r>
             <a:endParaRPr lang="en-US" sz="1400" dirty="0"/>
           </a:p>
@@ -15797,7 +16238,112 @@
       </p:sp>
       <p:sp>
         <p:nvSpPr>
-          <p:cNvPr id="30" name="Shape 28"/>
+          <p:cNvPr id="33" name="Text 31"/>
+          <p:cNvSpPr/>
+          <p:nvPr/>
+        </p:nvSpPr>
+        <p:spPr>
+          <a:xfrm>
+            <a:off x="6016752" y="3364992"/>
+            <a:ext cx="411480" cy="475488"/>
+          </a:xfrm>
+          <a:prstGeom prst="rect">
+            <a:avLst/>
+          </a:prstGeom>
+          <a:noFill/>
+          <a:ln/>
+        </p:spPr>
+        <p:txBody>
+          <a:bodyPr wrap="square" lIns="0" tIns="0" rIns="0" bIns="0" rtlCol="0" anchor="ctr"/>
+          <a:lstStyle/>
+          <a:p>
+            <a:pPr algn="ctr" indent="0" marL="0">
+              <a:buNone/>
+            </a:pPr>
+            <a:r>
+              <a:rPr lang="en-US" sz="1600" b="1" dirty="0">
+                <a:solidFill>
+                  <a:srgbClr val="0D9488"/>
+                </a:solidFill>
+                <a:latin typeface="Trebuchet MS" pitchFamily="34" charset="0"/>
+                <a:ea typeface="Trebuchet MS" pitchFamily="34" charset="-122"/>
+                <a:cs typeface="Trebuchet MS" pitchFamily="34" charset="-120"/>
+              </a:rPr>
+              <a:t>·</a:t>
+            </a:r>
+            <a:endParaRPr lang="en-US" sz="1600" dirty="0"/>
+          </a:p>
+        </p:txBody>
+      </p:sp>
+      <p:sp>
+        <p:nvSpPr>
+          <p:cNvPr id="34" name="Shape 32"/>
+          <p:cNvSpPr/>
+          <p:nvPr/>
+        </p:nvSpPr>
+        <p:spPr>
+          <a:xfrm>
+            <a:off x="6428232" y="3364992"/>
+            <a:ext cx="1645920" cy="475488"/>
+          </a:xfrm>
+          <a:prstGeom prst="rect">
+            <a:avLst>
+              <a:gd name="adj" fmla="val 9615"/>
+            </a:avLst>
+          </a:prstGeom>
+          <a:solidFill>
+            <a:srgbClr val="FFFFFF"/>
+          </a:solidFill>
+          <a:ln w="12700">
+            <a:solidFill>
+              <a:srgbClr val="0D9488"/>
+            </a:solidFill>
+            <a:prstDash val="solid"/>
+          </a:ln>
+        </p:spPr>
+      </p:sp>
+      <p:sp>
+        <p:nvSpPr>
+          <p:cNvPr id="35" name="Text 33"/>
+          <p:cNvSpPr/>
+          <p:nvPr/>
+        </p:nvSpPr>
+        <p:spPr>
+          <a:xfrm>
+            <a:off x="6428232" y="3364992"/>
+            <a:ext cx="1645920" cy="475488"/>
+          </a:xfrm>
+          <a:prstGeom prst="rect">
+            <a:avLst/>
+          </a:prstGeom>
+          <a:noFill/>
+          <a:ln/>
+        </p:spPr>
+        <p:txBody>
+          <a:bodyPr wrap="square" lIns="0" tIns="0" rIns="0" bIns="0" rtlCol="0" anchor="ctr"/>
+          <a:lstStyle/>
+          <a:p>
+            <a:pPr algn="ctr" indent="0" marL="0">
+              <a:buNone/>
+            </a:pPr>
+            <a:r>
+              <a:rPr lang="en-US" sz="1400" b="1" dirty="0">
+                <a:solidFill>
+                  <a:srgbClr val="0D9488"/>
+                </a:solidFill>
+                <a:latin typeface="Trebuchet MS" pitchFamily="34" charset="0"/>
+                <a:ea typeface="Trebuchet MS" pitchFamily="34" charset="-122"/>
+                <a:cs typeface="Trebuchet MS" pitchFamily="34" charset="-120"/>
+              </a:rPr>
+              <a:t>tive</a:t>
+            </a:r>
+            <a:endParaRPr lang="en-US" sz="1400" dirty="0"/>
+          </a:p>
+        </p:txBody>
+      </p:sp>
+      <p:sp>
+        <p:nvSpPr>
+          <p:cNvPr id="36" name="Shape 34"/>
           <p:cNvSpPr/>
           <p:nvPr/>
         </p:nvSpPr>
@@ -15824,7 +16370,7 @@
       </p:sp>
       <p:sp>
         <p:nvSpPr>
-          <p:cNvPr id="31" name="Text 29"/>
+          <p:cNvPr id="37" name="Text 35"/>
           <p:cNvSpPr/>
           <p:nvPr/>
         </p:nvSpPr>
@@ -15863,18 +16409,18 @@
       </p:sp>
       <p:sp>
         <p:nvSpPr>
-          <p:cNvPr id="32" name="Shape 30"/>
+          <p:cNvPr id="38" name="Shape 36"/>
           <p:cNvSpPr/>
           <p:nvPr/>
         </p:nvSpPr>
         <p:spPr>
           <a:xfrm>
             <a:off x="1874520" y="4096512"/>
-            <a:ext cx="6903720" cy="658368"/>
+            <a:ext cx="6903720" cy="804672"/>
           </a:xfrm>
           <a:prstGeom prst="rect">
             <a:avLst>
-              <a:gd name="adj" fmla="val 8333"/>
+              <a:gd name="adj" fmla="val 6818"/>
             </a:avLst>
           </a:prstGeom>
           <a:solidFill>
@@ -15890,18 +16436,18 @@
       </p:sp>
       <p:sp>
         <p:nvSpPr>
-          <p:cNvPr id="33" name="Shape 31"/>
-          <p:cNvSpPr/>
-          <p:nvPr/>
-        </p:nvSpPr>
-        <p:spPr>
-          <a:xfrm>
-            <a:off x="2124837" y="4169664"/>
-            <a:ext cx="685800" cy="475488"/>
+          <p:cNvPr id="39" name="Shape 37"/>
+          <p:cNvSpPr/>
+          <p:nvPr/>
+        </p:nvSpPr>
+        <p:spPr>
+          <a:xfrm>
+            <a:off x="1951330" y="4169664"/>
+            <a:ext cx="676656" cy="384048"/>
           </a:xfrm>
           <a:prstGeom prst="rect">
             <a:avLst>
-              <a:gd name="adj" fmla="val 7692"/>
+              <a:gd name="adj" fmla="val 9524"/>
             </a:avLst>
           </a:prstGeom>
           <a:solidFill>
@@ -15917,14 +16463,14 @@
       </p:sp>
       <p:sp>
         <p:nvSpPr>
-          <p:cNvPr id="34" name="Text 32"/>
-          <p:cNvSpPr/>
-          <p:nvPr/>
-        </p:nvSpPr>
-        <p:spPr>
-          <a:xfrm>
-            <a:off x="2124837" y="4169664"/>
-            <a:ext cx="685800" cy="475488"/>
+          <p:cNvPr id="40" name="Text 38"/>
+          <p:cNvSpPr/>
+          <p:nvPr/>
+        </p:nvSpPr>
+        <p:spPr>
+          <a:xfrm>
+            <a:off x="1951330" y="4169664"/>
+            <a:ext cx="676656" cy="384048"/>
           </a:xfrm>
           <a:prstGeom prst="rect">
             <a:avLst/>
@@ -15956,18 +16502,18 @@
       </p:sp>
       <p:sp>
         <p:nvSpPr>
-          <p:cNvPr id="35" name="Shape 33"/>
-          <p:cNvSpPr/>
-          <p:nvPr/>
-        </p:nvSpPr>
-        <p:spPr>
-          <a:xfrm>
-            <a:off x="3033522" y="4169664"/>
-            <a:ext cx="685800" cy="475488"/>
+          <p:cNvPr id="41" name="Shape 39"/>
+          <p:cNvSpPr/>
+          <p:nvPr/>
+        </p:nvSpPr>
+        <p:spPr>
+          <a:xfrm>
+            <a:off x="2677363" y="4169664"/>
+            <a:ext cx="676656" cy="384048"/>
           </a:xfrm>
           <a:prstGeom prst="rect">
             <a:avLst>
-              <a:gd name="adj" fmla="val 7692"/>
+              <a:gd name="adj" fmla="val 9524"/>
             </a:avLst>
           </a:prstGeom>
           <a:solidFill>
@@ -15983,14 +16529,14 @@
       </p:sp>
       <p:sp>
         <p:nvSpPr>
-          <p:cNvPr id="36" name="Text 34"/>
-          <p:cNvSpPr/>
-          <p:nvPr/>
-        </p:nvSpPr>
-        <p:spPr>
-          <a:xfrm>
-            <a:off x="3033522" y="4169664"/>
-            <a:ext cx="685800" cy="475488"/>
+          <p:cNvPr id="42" name="Text 40"/>
+          <p:cNvSpPr/>
+          <p:nvPr/>
+        </p:nvSpPr>
+        <p:spPr>
+          <a:xfrm>
+            <a:off x="2677363" y="4169664"/>
+            <a:ext cx="676656" cy="384048"/>
           </a:xfrm>
           <a:prstGeom prst="rect">
             <a:avLst/>
@@ -16022,18 +16568,18 @@
       </p:sp>
       <p:sp>
         <p:nvSpPr>
-          <p:cNvPr id="37" name="Shape 35"/>
-          <p:cNvSpPr/>
-          <p:nvPr/>
-        </p:nvSpPr>
-        <p:spPr>
-          <a:xfrm>
-            <a:off x="3942207" y="4169664"/>
-            <a:ext cx="685800" cy="475488"/>
+          <p:cNvPr id="43" name="Shape 41"/>
+          <p:cNvSpPr/>
+          <p:nvPr/>
+        </p:nvSpPr>
+        <p:spPr>
+          <a:xfrm>
+            <a:off x="3403397" y="4169664"/>
+            <a:ext cx="676656" cy="384048"/>
           </a:xfrm>
           <a:prstGeom prst="rect">
             <a:avLst>
-              <a:gd name="adj" fmla="val 7692"/>
+              <a:gd name="adj" fmla="val 9524"/>
             </a:avLst>
           </a:prstGeom>
           <a:solidFill>
@@ -16049,14 +16595,14 @@
       </p:sp>
       <p:sp>
         <p:nvSpPr>
-          <p:cNvPr id="38" name="Text 36"/>
-          <p:cNvSpPr/>
-          <p:nvPr/>
-        </p:nvSpPr>
-        <p:spPr>
-          <a:xfrm>
-            <a:off x="3942207" y="4169664"/>
-            <a:ext cx="685800" cy="475488"/>
+          <p:cNvPr id="44" name="Text 42"/>
+          <p:cNvSpPr/>
+          <p:nvPr/>
+        </p:nvSpPr>
+        <p:spPr>
+          <a:xfrm>
+            <a:off x="3403397" y="4169664"/>
+            <a:ext cx="676656" cy="384048"/>
           </a:xfrm>
           <a:prstGeom prst="rect">
             <a:avLst/>
@@ -16088,18 +16634,18 @@
       </p:sp>
       <p:sp>
         <p:nvSpPr>
-          <p:cNvPr id="39" name="Shape 37"/>
-          <p:cNvSpPr/>
-          <p:nvPr/>
-        </p:nvSpPr>
-        <p:spPr>
-          <a:xfrm>
-            <a:off x="4850892" y="4169664"/>
-            <a:ext cx="685800" cy="475488"/>
+          <p:cNvPr id="45" name="Shape 43"/>
+          <p:cNvSpPr/>
+          <p:nvPr/>
+        </p:nvSpPr>
+        <p:spPr>
+          <a:xfrm>
+            <a:off x="4129430" y="4169664"/>
+            <a:ext cx="676656" cy="384048"/>
           </a:xfrm>
           <a:prstGeom prst="rect">
             <a:avLst>
-              <a:gd name="adj" fmla="val 7692"/>
+              <a:gd name="adj" fmla="val 9524"/>
             </a:avLst>
           </a:prstGeom>
           <a:solidFill>
@@ -16115,14 +16661,14 @@
       </p:sp>
       <p:sp>
         <p:nvSpPr>
-          <p:cNvPr id="40" name="Text 38"/>
-          <p:cNvSpPr/>
-          <p:nvPr/>
-        </p:nvSpPr>
-        <p:spPr>
-          <a:xfrm>
-            <a:off x="4850892" y="4169664"/>
-            <a:ext cx="685800" cy="475488"/>
+          <p:cNvPr id="46" name="Text 44"/>
+          <p:cNvSpPr/>
+          <p:nvPr/>
+        </p:nvSpPr>
+        <p:spPr>
+          <a:xfrm>
+            <a:off x="4129430" y="4169664"/>
+            <a:ext cx="676656" cy="384048"/>
           </a:xfrm>
           <a:prstGeom prst="rect">
             <a:avLst/>
@@ -16154,18 +16700,18 @@
       </p:sp>
       <p:sp>
         <p:nvSpPr>
-          <p:cNvPr id="41" name="Shape 39"/>
-          <p:cNvSpPr/>
-          <p:nvPr/>
-        </p:nvSpPr>
-        <p:spPr>
-          <a:xfrm>
-            <a:off x="5759577" y="4169664"/>
-            <a:ext cx="685800" cy="475488"/>
+          <p:cNvPr id="47" name="Shape 45"/>
+          <p:cNvSpPr/>
+          <p:nvPr/>
+        </p:nvSpPr>
+        <p:spPr>
+          <a:xfrm>
+            <a:off x="4855464" y="4169664"/>
+            <a:ext cx="676656" cy="384048"/>
           </a:xfrm>
           <a:prstGeom prst="rect">
             <a:avLst>
-              <a:gd name="adj" fmla="val 7692"/>
+              <a:gd name="adj" fmla="val 9524"/>
             </a:avLst>
           </a:prstGeom>
           <a:solidFill>
@@ -16181,14 +16727,14 @@
       </p:sp>
       <p:sp>
         <p:nvSpPr>
-          <p:cNvPr id="42" name="Text 40"/>
-          <p:cNvSpPr/>
-          <p:nvPr/>
-        </p:nvSpPr>
-        <p:spPr>
-          <a:xfrm>
-            <a:off x="5759577" y="4169664"/>
-            <a:ext cx="685800" cy="475488"/>
+          <p:cNvPr id="48" name="Text 46"/>
+          <p:cNvSpPr/>
+          <p:nvPr/>
+        </p:nvSpPr>
+        <p:spPr>
+          <a:xfrm>
+            <a:off x="4855464" y="4169664"/>
+            <a:ext cx="676656" cy="384048"/>
           </a:xfrm>
           <a:prstGeom prst="rect">
             <a:avLst/>
@@ -16220,18 +16766,18 @@
       </p:sp>
       <p:sp>
         <p:nvSpPr>
-          <p:cNvPr id="43" name="Shape 41"/>
-          <p:cNvSpPr/>
-          <p:nvPr/>
-        </p:nvSpPr>
-        <p:spPr>
-          <a:xfrm>
-            <a:off x="6668262" y="4169664"/>
-            <a:ext cx="685800" cy="475488"/>
+          <p:cNvPr id="49" name="Shape 47"/>
+          <p:cNvSpPr/>
+          <p:nvPr/>
+        </p:nvSpPr>
+        <p:spPr>
+          <a:xfrm>
+            <a:off x="5581498" y="4169664"/>
+            <a:ext cx="676656" cy="384048"/>
           </a:xfrm>
           <a:prstGeom prst="rect">
             <a:avLst>
-              <a:gd name="adj" fmla="val 7692"/>
+              <a:gd name="adj" fmla="val 9524"/>
             </a:avLst>
           </a:prstGeom>
           <a:solidFill>
@@ -16247,14 +16793,14 @@
       </p:sp>
       <p:sp>
         <p:nvSpPr>
-          <p:cNvPr id="44" name="Text 42"/>
-          <p:cNvSpPr/>
-          <p:nvPr/>
-        </p:nvSpPr>
-        <p:spPr>
-          <a:xfrm>
-            <a:off x="6668262" y="4169664"/>
-            <a:ext cx="685800" cy="475488"/>
+          <p:cNvPr id="50" name="Text 48"/>
+          <p:cNvSpPr/>
+          <p:nvPr/>
+        </p:nvSpPr>
+        <p:spPr>
+          <a:xfrm>
+            <a:off x="5581498" y="4169664"/>
+            <a:ext cx="676656" cy="384048"/>
           </a:xfrm>
           <a:prstGeom prst="rect">
             <a:avLst/>
@@ -16286,18 +16832,18 @@
       </p:sp>
       <p:sp>
         <p:nvSpPr>
-          <p:cNvPr id="45" name="Shape 43"/>
-          <p:cNvSpPr/>
-          <p:nvPr/>
-        </p:nvSpPr>
-        <p:spPr>
-          <a:xfrm>
-            <a:off x="7576947" y="4169664"/>
-            <a:ext cx="685800" cy="475488"/>
+          <p:cNvPr id="51" name="Shape 49"/>
+          <p:cNvSpPr/>
+          <p:nvPr/>
+        </p:nvSpPr>
+        <p:spPr>
+          <a:xfrm>
+            <a:off x="6307531" y="4169664"/>
+            <a:ext cx="676656" cy="384048"/>
           </a:xfrm>
           <a:prstGeom prst="rect">
             <a:avLst>
-              <a:gd name="adj" fmla="val 7692"/>
+              <a:gd name="adj" fmla="val 9524"/>
             </a:avLst>
           </a:prstGeom>
           <a:solidFill>
@@ -16313,14 +16859,14 @@
       </p:sp>
       <p:sp>
         <p:nvSpPr>
-          <p:cNvPr id="46" name="Text 44"/>
-          <p:cNvSpPr/>
-          <p:nvPr/>
-        </p:nvSpPr>
-        <p:spPr>
-          <a:xfrm>
-            <a:off x="7576947" y="4169664"/>
-            <a:ext cx="685800" cy="475488"/>
+          <p:cNvPr id="52" name="Text 50"/>
+          <p:cNvSpPr/>
+          <p:nvPr/>
+        </p:nvSpPr>
+        <p:spPr>
+          <a:xfrm>
+            <a:off x="6307531" y="4169664"/>
+            <a:ext cx="676656" cy="384048"/>
           </a:xfrm>
           <a:prstGeom prst="rect">
             <a:avLst/>
@@ -16347,6 +16893,177 @@
               <a:t>t</a:t>
             </a:r>
             <a:endParaRPr lang="en-US" sz="900" dirty="0"/>
+          </a:p>
+        </p:txBody>
+      </p:sp>
+      <p:sp>
+        <p:nvSpPr>
+          <p:cNvPr id="53" name="Shape 51"/>
+          <p:cNvSpPr/>
+          <p:nvPr/>
+        </p:nvSpPr>
+        <p:spPr>
+          <a:xfrm>
+            <a:off x="7033565" y="4169664"/>
+            <a:ext cx="676656" cy="384048"/>
+          </a:xfrm>
+          <a:prstGeom prst="rect">
+            <a:avLst>
+              <a:gd name="adj" fmla="val 9524"/>
+            </a:avLst>
+          </a:prstGeom>
+          <a:solidFill>
+            <a:srgbClr val="FFFFFF"/>
+          </a:solidFill>
+          <a:ln w="12700">
+            <a:solidFill>
+              <a:srgbClr val="DB2777"/>
+            </a:solidFill>
+            <a:prstDash val="solid"/>
+          </a:ln>
+        </p:spPr>
+      </p:sp>
+      <p:sp>
+        <p:nvSpPr>
+          <p:cNvPr id="54" name="Text 52"/>
+          <p:cNvSpPr/>
+          <p:nvPr/>
+        </p:nvSpPr>
+        <p:spPr>
+          <a:xfrm>
+            <a:off x="7033565" y="4169664"/>
+            <a:ext cx="676656" cy="384048"/>
+          </a:xfrm>
+          <a:prstGeom prst="rect">
+            <a:avLst/>
+          </a:prstGeom>
+          <a:noFill/>
+          <a:ln/>
+        </p:spPr>
+        <p:txBody>
+          <a:bodyPr wrap="square" lIns="0" tIns="0" rIns="0" bIns="0" rtlCol="0" anchor="ctr"/>
+          <a:lstStyle/>
+          <a:p>
+            <a:pPr algn="ctr" indent="0" marL="0">
+              <a:buNone/>
+            </a:pPr>
+            <a:r>
+              <a:rPr lang="en-US" sz="900" b="1" dirty="0">
+                <a:solidFill>
+                  <a:srgbClr val="9D174D"/>
+                </a:solidFill>
+                <a:latin typeface="Trebuchet MS" pitchFamily="34" charset="0"/>
+                <a:ea typeface="Trebuchet MS" pitchFamily="34" charset="-122"/>
+                <a:cs typeface="Trebuchet MS" pitchFamily="34" charset="-120"/>
+              </a:rPr>
+              <a:t>i</a:t>
+            </a:r>
+            <a:endParaRPr lang="en-US" sz="900" dirty="0"/>
+          </a:p>
+        </p:txBody>
+      </p:sp>
+      <p:sp>
+        <p:nvSpPr>
+          <p:cNvPr id="55" name="Shape 53"/>
+          <p:cNvSpPr/>
+          <p:nvPr/>
+        </p:nvSpPr>
+        <p:spPr>
+          <a:xfrm>
+            <a:off x="7759598" y="4169664"/>
+            <a:ext cx="676656" cy="384048"/>
+          </a:xfrm>
+          <a:prstGeom prst="rect">
+            <a:avLst>
+              <a:gd name="adj" fmla="val 9524"/>
+            </a:avLst>
+          </a:prstGeom>
+          <a:solidFill>
+            <a:srgbClr val="FFFFFF"/>
+          </a:solidFill>
+          <a:ln w="12700">
+            <a:solidFill>
+              <a:srgbClr val="DB2777"/>
+            </a:solidFill>
+            <a:prstDash val="solid"/>
+          </a:ln>
+        </p:spPr>
+      </p:sp>
+      <p:sp>
+        <p:nvSpPr>
+          <p:cNvPr id="56" name="Text 54"/>
+          <p:cNvSpPr/>
+          <p:nvPr/>
+        </p:nvSpPr>
+        <p:spPr>
+          <a:xfrm>
+            <a:off x="7759598" y="4169664"/>
+            <a:ext cx="676656" cy="384048"/>
+          </a:xfrm>
+          <a:prstGeom prst="rect">
+            <a:avLst/>
+          </a:prstGeom>
+          <a:noFill/>
+          <a:ln/>
+        </p:spPr>
+        <p:txBody>
+          <a:bodyPr wrap="square" lIns="0" tIns="0" rIns="0" bIns="0" rtlCol="0" anchor="ctr"/>
+          <a:lstStyle/>
+          <a:p>
+            <a:pPr algn="ctr" indent="0" marL="0">
+              <a:buNone/>
+            </a:pPr>
+            <a:r>
+              <a:rPr lang="en-US" sz="900" b="1" dirty="0">
+                <a:solidFill>
+                  <a:srgbClr val="9D174D"/>
+                </a:solidFill>
+                <a:latin typeface="Trebuchet MS" pitchFamily="34" charset="0"/>
+                <a:ea typeface="Trebuchet MS" pitchFamily="34" charset="-122"/>
+                <a:cs typeface="Trebuchet MS" pitchFamily="34" charset="-120"/>
+              </a:rPr>
+              <a:t>ve</a:t>
+            </a:r>
+            <a:endParaRPr lang="en-US" sz="900" dirty="0"/>
+          </a:p>
+        </p:txBody>
+      </p:sp>
+      <p:sp>
+        <p:nvSpPr>
+          <p:cNvPr id="57" name="Text 55"/>
+          <p:cNvSpPr/>
+          <p:nvPr/>
+        </p:nvSpPr>
+        <p:spPr>
+          <a:xfrm>
+            <a:off x="7759598" y="4572000"/>
+            <a:ext cx="676656" cy="219456"/>
+          </a:xfrm>
+          <a:prstGeom prst="rect">
+            <a:avLst/>
+          </a:prstGeom>
+          <a:noFill/>
+          <a:ln/>
+        </p:spPr>
+        <p:txBody>
+          <a:bodyPr wrap="square" lIns="0" tIns="0" rIns="0" bIns="0" rtlCol="0" anchor="t"/>
+          <a:lstStyle/>
+          <a:p>
+            <a:pPr algn="ctr" indent="0" marL="0">
+              <a:buNone/>
+            </a:pPr>
+            <a:r>
+              <a:rPr lang="en-US" sz="750" i="1" dirty="0">
+                <a:solidFill>
+                  <a:srgbClr val="94A3B8"/>
+                </a:solidFill>
+                <a:latin typeface="Calibri" pitchFamily="34" charset="0"/>
+                <a:ea typeface="Calibri" pitchFamily="34" charset="-122"/>
+                <a:cs typeface="Calibri" pitchFamily="34" charset="-120"/>
+              </a:rPr>
+              <a:t>/v/</a:t>
+            </a:r>
+            <a:endParaRPr lang="en-US" sz="750" dirty="0"/>
           </a:p>
         </p:txBody>
       </p:sp>
@@ -17670,7 +18387,7 @@
                 <a:ea typeface="Calibri" pitchFamily="34" charset="-122"/>
                 <a:cs typeface="Calibri" pitchFamily="34" charset="-120"/>
               </a:rPr>
-              <a:t>The council put up </a:t>
+              <a:t>Although some accidents are </a:t>
             </a:r>
             <a:pPr algn="l" indent="0" marL="0">
               <a:buNone/>
@@ -17687,7 +18404,7 @@
                 <a:ea typeface="Calibri" pitchFamily="34" charset="-122"/>
                 <a:cs typeface="Calibri" pitchFamily="34" charset="-120"/>
               </a:rPr>
-              <a:t>preventive</a:t>
+              <a:t>unpreventable</a:t>
             </a:r>
             <a:pPr algn="l" indent="0" marL="0">
               <a:buNone/>
@@ -17701,7 +18418,7 @@
                 <a:ea typeface="Calibri" pitchFamily="34" charset="-122"/>
                 <a:cs typeface="Calibri" pitchFamily="34" charset="-120"/>
               </a:rPr>
-              <a:t> fences to stop flooding; this type of </a:t>
+              <a:t>, </a:t>
             </a:r>
             <a:pPr algn="l" indent="0" marL="0">
               <a:buNone/>
@@ -17718,7 +18435,7 @@
                 <a:ea typeface="Calibri" pitchFamily="34" charset="-122"/>
                 <a:cs typeface="Calibri" pitchFamily="34" charset="-120"/>
               </a:rPr>
-              <a:t>prevention</a:t>
+              <a:t>preventable</a:t>
             </a:r>
             <a:pPr algn="l" indent="0" marL="0">
               <a:buNone/>
@@ -17732,7 +18449,7 @@
                 <a:ea typeface="Calibri" pitchFamily="34" charset="-122"/>
                 <a:cs typeface="Calibri" pitchFamily="34" charset="-120"/>
               </a:rPr>
-              <a:t> shows that many disasters are </a:t>
+              <a:t> ones can be avoided; wearing safety gear is a smart, </a:t>
             </a:r>
             <a:pPr algn="l" indent="0" marL="0">
               <a:buNone/>
@@ -17749,7 +18466,7 @@
                 <a:ea typeface="Calibri" pitchFamily="34" charset="-122"/>
                 <a:cs typeface="Calibri" pitchFamily="34" charset="-120"/>
               </a:rPr>
-              <a:t>preventable</a:t>
+              <a:t>preventive</a:t>
             </a:r>
             <a:pPr algn="l" indent="0" marL="0">
               <a:buNone/>
@@ -17763,7 +18480,7 @@
                 <a:ea typeface="Calibri" pitchFamily="34" charset="-122"/>
                 <a:cs typeface="Calibri" pitchFamily="34" charset="-120"/>
               </a:rPr>
-              <a:t>.</a:t>
+              <a:t> measure.</a:t>
             </a:r>
             <a:endParaRPr lang="en-US" sz="1800" dirty="0"/>
           </a:p>
@@ -17918,7 +18635,7 @@
                 <a:ea typeface="Trebuchet MS" pitchFamily="34" charset="-122"/>
                 <a:cs typeface="Trebuchet MS" pitchFamily="34" charset="-120"/>
               </a:rPr>
-              <a:t>preventive</a:t>
+              <a:t>unpreventable</a:t>
             </a:r>
             <a:endParaRPr lang="en-US" sz="1400" dirty="0"/>
           </a:p>
@@ -18046,7 +18763,7 @@
                 <a:ea typeface="Trebuchet MS" pitchFamily="34" charset="-122"/>
                 <a:cs typeface="Trebuchet MS" pitchFamily="34" charset="-120"/>
               </a:rPr>
-              <a:t>prevention</a:t>
+              <a:t>preventable</a:t>
             </a:r>
             <a:endParaRPr lang="en-US" sz="1400" dirty="0"/>
           </a:p>
@@ -18174,7 +18891,7 @@
                 <a:ea typeface="Trebuchet MS" pitchFamily="34" charset="-122"/>
                 <a:cs typeface="Trebuchet MS" pitchFamily="34" charset="-120"/>
               </a:rPr>
-              <a:t>preventable</a:t>
+              <a:t>preventive</a:t>
             </a:r>
             <a:endParaRPr lang="en-US" sz="1400" dirty="0"/>
           </a:p>
@@ -18644,7 +19361,7 @@
                 <a:ea typeface="Trebuchet MS" pitchFamily="34" charset="-122"/>
                 <a:cs typeface="Trebuchet MS" pitchFamily="34" charset="-120"/>
               </a:rPr>
-              <a:t>preventive</a:t>
+              <a:t>unpreventable</a:t>
             </a:r>
             <a:endParaRPr lang="en-US" sz="2800" dirty="0"/>
           </a:p>
@@ -19471,7 +20188,7 @@
                 <a:ea typeface="Trebuchet MS" pitchFamily="34" charset="-122"/>
                 <a:cs typeface="Trebuchet MS" pitchFamily="34" charset="-120"/>
               </a:rPr>
-              <a:t>preventive</a:t>
+              <a:t>unpreventable</a:t>
             </a:r>
             <a:endParaRPr lang="en-US" sz="2800" dirty="0"/>
           </a:p>
@@ -19551,8 +20268,8 @@
         </p:nvSpPr>
         <p:spPr>
           <a:xfrm>
-            <a:off x="2221992" y="2258568"/>
-            <a:ext cx="1828800" cy="292608"/>
+            <a:off x="1989734" y="2258568"/>
+            <a:ext cx="1581912" cy="292608"/>
           </a:xfrm>
           <a:prstGeom prst="rect">
             <a:avLst>
@@ -19585,8 +20302,8 @@
         </p:nvSpPr>
         <p:spPr>
           <a:xfrm>
-            <a:off x="2221992" y="2258568"/>
-            <a:ext cx="1828800" cy="292608"/>
+            <a:off x="1989734" y="2258568"/>
+            <a:ext cx="1581912" cy="292608"/>
           </a:xfrm>
           <a:prstGeom prst="rect">
             <a:avLst/>
@@ -19610,7 +20327,7 @@
                 <a:ea typeface="Trebuchet MS" pitchFamily="34" charset="-122"/>
                 <a:cs typeface="Trebuchet MS" pitchFamily="34" charset="-120"/>
               </a:rPr>
-              <a:t>pre</a:t>
+              <a:t>un</a:t>
             </a:r>
             <a:endParaRPr lang="en-US" sz="1300" dirty="0"/>
           </a:p>
@@ -19624,8 +20341,8 @@
         </p:nvSpPr>
         <p:spPr>
           <a:xfrm>
-            <a:off x="2221992" y="2569464"/>
-            <a:ext cx="1828800" cy="201168"/>
+            <a:off x="1989734" y="2569464"/>
+            <a:ext cx="1581912" cy="201168"/>
           </a:xfrm>
           <a:prstGeom prst="rect">
             <a:avLst/>
@@ -19649,7 +20366,7 @@
                 <a:ea typeface="Calibri" pitchFamily="34" charset="-122"/>
                 <a:cs typeface="Calibri" pitchFamily="34" charset="-120"/>
               </a:rPr>
-              <a:t>before</a:t>
+              <a:t>not</a:t>
             </a:r>
             <a:endParaRPr lang="en-US" sz="850" dirty="0"/>
           </a:p>
@@ -19663,8 +20380,8 @@
         </p:nvSpPr>
         <p:spPr>
           <a:xfrm>
-            <a:off x="4370832" y="2258568"/>
-            <a:ext cx="1828800" cy="292608"/>
+            <a:off x="3659429" y="2258568"/>
+            <a:ext cx="1581912" cy="292608"/>
           </a:xfrm>
           <a:prstGeom prst="rect">
             <a:avLst>
@@ -19697,8 +20414,8 @@
         </p:nvSpPr>
         <p:spPr>
           <a:xfrm>
-            <a:off x="4370832" y="2258568"/>
-            <a:ext cx="1828800" cy="292608"/>
+            <a:off x="3659429" y="2258568"/>
+            <a:ext cx="1581912" cy="292608"/>
           </a:xfrm>
           <a:prstGeom prst="rect">
             <a:avLst/>
@@ -19722,7 +20439,7 @@
                 <a:ea typeface="Trebuchet MS" pitchFamily="34" charset="-122"/>
                 <a:cs typeface="Trebuchet MS" pitchFamily="34" charset="-120"/>
               </a:rPr>
-              <a:t>vent</a:t>
+              <a:t>pre</a:t>
             </a:r>
             <a:endParaRPr lang="en-US" sz="1300" dirty="0"/>
           </a:p>
@@ -19736,8 +20453,8 @@
         </p:nvSpPr>
         <p:spPr>
           <a:xfrm>
-            <a:off x="4370832" y="2569464"/>
-            <a:ext cx="1828800" cy="201168"/>
+            <a:off x="3659429" y="2569464"/>
+            <a:ext cx="1581912" cy="201168"/>
           </a:xfrm>
           <a:prstGeom prst="rect">
             <a:avLst/>
@@ -19761,7 +20478,7 @@
                 <a:ea typeface="Calibri" pitchFamily="34" charset="-122"/>
                 <a:cs typeface="Calibri" pitchFamily="34" charset="-120"/>
               </a:rPr>
-              <a:t>come</a:t>
+              <a:t>before</a:t>
             </a:r>
             <a:endParaRPr lang="en-US" sz="850" dirty="0"/>
           </a:p>
@@ -19775,8 +20492,8 @@
         </p:nvSpPr>
         <p:spPr>
           <a:xfrm>
-            <a:off x="6519672" y="2258568"/>
-            <a:ext cx="1828800" cy="292608"/>
+            <a:off x="5329123" y="2258568"/>
+            <a:ext cx="1581912" cy="292608"/>
           </a:xfrm>
           <a:prstGeom prst="rect">
             <a:avLst>
@@ -19809,8 +20526,8 @@
         </p:nvSpPr>
         <p:spPr>
           <a:xfrm>
-            <a:off x="6519672" y="2258568"/>
-            <a:ext cx="1828800" cy="292608"/>
+            <a:off x="5329123" y="2258568"/>
+            <a:ext cx="1581912" cy="292608"/>
           </a:xfrm>
           <a:prstGeom prst="rect">
             <a:avLst/>
@@ -19834,7 +20551,7 @@
                 <a:ea typeface="Trebuchet MS" pitchFamily="34" charset="-122"/>
                 <a:cs typeface="Trebuchet MS" pitchFamily="34" charset="-120"/>
               </a:rPr>
-              <a:t>ive</a:t>
+              <a:t>vent</a:t>
             </a:r>
             <a:endParaRPr lang="en-US" sz="1300" dirty="0"/>
           </a:p>
@@ -19848,8 +20565,8 @@
         </p:nvSpPr>
         <p:spPr>
           <a:xfrm>
-            <a:off x="6519672" y="2569464"/>
-            <a:ext cx="1828800" cy="201168"/>
+            <a:off x="5329123" y="2569464"/>
+            <a:ext cx="1581912" cy="201168"/>
           </a:xfrm>
           <a:prstGeom prst="rect">
             <a:avLst/>
@@ -19873,7 +20590,7 @@
                 <a:ea typeface="Calibri" pitchFamily="34" charset="-122"/>
                 <a:cs typeface="Calibri" pitchFamily="34" charset="-120"/>
               </a:rPr>
-              <a:t>having the quality of</a:t>
+              <a:t>come</a:t>
             </a:r>
             <a:endParaRPr lang="en-US" sz="850" dirty="0"/>
           </a:p>
@@ -19882,6 +20599,118 @@
       <p:sp>
         <p:nvSpPr>
           <p:cNvPr id="25" name="Shape 23"/>
+          <p:cNvSpPr/>
+          <p:nvPr/>
+        </p:nvSpPr>
+        <p:spPr>
+          <a:xfrm>
+            <a:off x="6998818" y="2258568"/>
+            <a:ext cx="1581912" cy="292608"/>
+          </a:xfrm>
+          <a:prstGeom prst="rect">
+            <a:avLst>
+              <a:gd name="adj" fmla="val 25000"/>
+            </a:avLst>
+          </a:prstGeom>
+          <a:solidFill>
+            <a:srgbClr val="FCE7F3"/>
+          </a:solidFill>
+          <a:ln w="19050">
+            <a:solidFill>
+              <a:srgbClr val="DB2777"/>
+            </a:solidFill>
+            <a:prstDash val="solid"/>
+          </a:ln>
+          <a:effectLst>
+            <a:outerShdw sx="100000" sy="100000" kx="0" ky="0" algn="bl" rotWithShape="0" blurRad="101600" dist="38100" dir="8100000">
+              <a:srgbClr val="000000">
+                <a:alpha val="12000"/>
+              </a:srgbClr>
+            </a:outerShdw>
+          </a:effectLst>
+        </p:spPr>
+      </p:sp>
+      <p:sp>
+        <p:nvSpPr>
+          <p:cNvPr id="26" name="Text 24"/>
+          <p:cNvSpPr/>
+          <p:nvPr/>
+        </p:nvSpPr>
+        <p:spPr>
+          <a:xfrm>
+            <a:off x="6998818" y="2258568"/>
+            <a:ext cx="1581912" cy="292608"/>
+          </a:xfrm>
+          <a:prstGeom prst="rect">
+            <a:avLst/>
+          </a:prstGeom>
+          <a:noFill/>
+          <a:ln/>
+        </p:spPr>
+        <p:txBody>
+          <a:bodyPr wrap="square" lIns="0" tIns="0" rIns="0" bIns="0" rtlCol="0" anchor="ctr"/>
+          <a:lstStyle/>
+          <a:p>
+            <a:pPr algn="ctr" indent="0" marL="0">
+              <a:buNone/>
+            </a:pPr>
+            <a:r>
+              <a:rPr lang="en-US" sz="1300" b="1" dirty="0">
+                <a:solidFill>
+                  <a:srgbClr val="9D174D"/>
+                </a:solidFill>
+                <a:latin typeface="Trebuchet MS" pitchFamily="34" charset="0"/>
+                <a:ea typeface="Trebuchet MS" pitchFamily="34" charset="-122"/>
+                <a:cs typeface="Trebuchet MS" pitchFamily="34" charset="-120"/>
+              </a:rPr>
+              <a:t>able</a:t>
+            </a:r>
+            <a:endParaRPr lang="en-US" sz="1300" dirty="0"/>
+          </a:p>
+        </p:txBody>
+      </p:sp>
+      <p:sp>
+        <p:nvSpPr>
+          <p:cNvPr id="27" name="Text 25"/>
+          <p:cNvSpPr/>
+          <p:nvPr/>
+        </p:nvSpPr>
+        <p:spPr>
+          <a:xfrm>
+            <a:off x="6998818" y="2569464"/>
+            <a:ext cx="1581912" cy="201168"/>
+          </a:xfrm>
+          <a:prstGeom prst="rect">
+            <a:avLst/>
+          </a:prstGeom>
+          <a:noFill/>
+          <a:ln/>
+        </p:spPr>
+        <p:txBody>
+          <a:bodyPr wrap="square" lIns="0" tIns="0" rIns="0" bIns="0" rtlCol="0" anchor="t"/>
+          <a:lstStyle/>
+          <a:p>
+            <a:pPr algn="ctr" indent="0" marL="0">
+              <a:buNone/>
+            </a:pPr>
+            <a:r>
+              <a:rPr lang="en-US" sz="850" dirty="0">
+                <a:solidFill>
+                  <a:srgbClr val="475569"/>
+                </a:solidFill>
+                <a:latin typeface="Calibri" pitchFamily="34" charset="0"/>
+                <a:ea typeface="Calibri" pitchFamily="34" charset="-122"/>
+                <a:cs typeface="Calibri" pitchFamily="34" charset="-120"/>
+              </a:rPr>
+              <a:t>able to be</a:t>
+            </a:r>
+            <a:endParaRPr lang="en-US" sz="850" dirty="0"/>
+          </a:p>
+        </p:txBody>
+      </p:sp>
+      <p:sp>
+        <p:nvSpPr>
+          <p:cNvPr id="28" name="Shape 26"/>
           <p:cNvSpPr/>
           <p:nvPr/>
         </p:nvSpPr>
@@ -19908,7 +20737,7 @@
       </p:sp>
       <p:sp>
         <p:nvSpPr>
-          <p:cNvPr id="26" name="Text 24"/>
+          <p:cNvPr id="29" name="Text 27"/>
           <p:cNvSpPr/>
           <p:nvPr/>
         </p:nvSpPr>
@@ -19947,7 +20776,7 @@
       </p:sp>
       <p:sp>
         <p:nvSpPr>
-          <p:cNvPr id="27" name="Shape 25"/>
+          <p:cNvPr id="30" name="Shape 28"/>
           <p:cNvSpPr/>
           <p:nvPr/>
         </p:nvSpPr>
@@ -19974,7 +20803,7 @@
       </p:sp>
       <p:sp>
         <p:nvSpPr>
-          <p:cNvPr id="28" name="Text 26"/>
+          <p:cNvPr id="31" name="Text 29"/>
           <p:cNvSpPr/>
           <p:nvPr/>
         </p:nvSpPr>
@@ -20013,7 +20842,7 @@
       </p:sp>
       <p:sp>
         <p:nvSpPr>
-          <p:cNvPr id="29" name="Shape 27"/>
+          <p:cNvPr id="32" name="Shape 30"/>
           <p:cNvSpPr/>
           <p:nvPr/>
         </p:nvSpPr>
@@ -20040,7 +20869,7 @@
       </p:sp>
       <p:sp>
         <p:nvSpPr>
-          <p:cNvPr id="30" name="Text 28"/>
+          <p:cNvPr id="33" name="Text 31"/>
           <p:cNvSpPr/>
           <p:nvPr/>
         </p:nvSpPr>
@@ -20079,7 +20908,7 @@
       </p:sp>
       <p:sp>
         <p:nvSpPr>
-          <p:cNvPr id="31" name="Shape 29"/>
+          <p:cNvPr id="34" name="Shape 32"/>
           <p:cNvSpPr/>
           <p:nvPr/>
         </p:nvSpPr>
@@ -20106,7 +20935,7 @@
       </p:sp>
       <p:sp>
         <p:nvSpPr>
-          <p:cNvPr id="32" name="Text 30"/>
+          <p:cNvPr id="35" name="Text 33"/>
           <p:cNvSpPr/>
           <p:nvPr/>
         </p:nvSpPr>
@@ -20568,7 +21397,7 @@
                 <a:ea typeface="Trebuchet MS" pitchFamily="34" charset="-122"/>
                 <a:cs typeface="Trebuchet MS" pitchFamily="34" charset="-120"/>
               </a:rPr>
-              <a:t>preventive</a:t>
+              <a:t>unpreventable</a:t>
             </a:r>
             <a:endParaRPr lang="en-US" sz="2800" dirty="0"/>
           </a:p>
@@ -20648,8 +21477,8 @@
         </p:nvSpPr>
         <p:spPr>
           <a:xfrm>
-            <a:off x="2221992" y="2258568"/>
-            <a:ext cx="1828800" cy="292608"/>
+            <a:off x="1989734" y="2258568"/>
+            <a:ext cx="1581912" cy="292608"/>
           </a:xfrm>
           <a:prstGeom prst="rect">
             <a:avLst>
@@ -20682,8 +21511,8 @@
         </p:nvSpPr>
         <p:spPr>
           <a:xfrm>
-            <a:off x="2221992" y="2258568"/>
-            <a:ext cx="1828800" cy="292608"/>
+            <a:off x="1989734" y="2258568"/>
+            <a:ext cx="1581912" cy="292608"/>
           </a:xfrm>
           <a:prstGeom prst="rect">
             <a:avLst/>
@@ -20707,7 +21536,7 @@
                 <a:ea typeface="Trebuchet MS" pitchFamily="34" charset="-122"/>
                 <a:cs typeface="Trebuchet MS" pitchFamily="34" charset="-120"/>
               </a:rPr>
-              <a:t>pre</a:t>
+              <a:t>un</a:t>
             </a:r>
             <a:endParaRPr lang="en-US" sz="1300" dirty="0"/>
           </a:p>
@@ -20721,8 +21550,8 @@
         </p:nvSpPr>
         <p:spPr>
           <a:xfrm>
-            <a:off x="2221992" y="2569464"/>
-            <a:ext cx="1828800" cy="201168"/>
+            <a:off x="1989734" y="2569464"/>
+            <a:ext cx="1581912" cy="201168"/>
           </a:xfrm>
           <a:prstGeom prst="rect">
             <a:avLst/>
@@ -20746,7 +21575,7 @@
                 <a:ea typeface="Calibri" pitchFamily="34" charset="-122"/>
                 <a:cs typeface="Calibri" pitchFamily="34" charset="-120"/>
               </a:rPr>
-              <a:t>before</a:t>
+              <a:t>not</a:t>
             </a:r>
             <a:endParaRPr lang="en-US" sz="850" dirty="0"/>
           </a:p>
@@ -20760,8 +21589,8 @@
         </p:nvSpPr>
         <p:spPr>
           <a:xfrm>
-            <a:off x="4370832" y="2258568"/>
-            <a:ext cx="1828800" cy="292608"/>
+            <a:off x="3659429" y="2258568"/>
+            <a:ext cx="1581912" cy="292608"/>
           </a:xfrm>
           <a:prstGeom prst="rect">
             <a:avLst>
@@ -20794,8 +21623,8 @@
         </p:nvSpPr>
         <p:spPr>
           <a:xfrm>
-            <a:off x="4370832" y="2258568"/>
-            <a:ext cx="1828800" cy="292608"/>
+            <a:off x="3659429" y="2258568"/>
+            <a:ext cx="1581912" cy="292608"/>
           </a:xfrm>
           <a:prstGeom prst="rect">
             <a:avLst/>
@@ -20819,7 +21648,7 @@
                 <a:ea typeface="Trebuchet MS" pitchFamily="34" charset="-122"/>
                 <a:cs typeface="Trebuchet MS" pitchFamily="34" charset="-120"/>
               </a:rPr>
-              <a:t>vent</a:t>
+              <a:t>pre</a:t>
             </a:r>
             <a:endParaRPr lang="en-US" sz="1300" dirty="0"/>
           </a:p>
@@ -20833,8 +21662,8 @@
         </p:nvSpPr>
         <p:spPr>
           <a:xfrm>
-            <a:off x="4370832" y="2569464"/>
-            <a:ext cx="1828800" cy="201168"/>
+            <a:off x="3659429" y="2569464"/>
+            <a:ext cx="1581912" cy="201168"/>
           </a:xfrm>
           <a:prstGeom prst="rect">
             <a:avLst/>
@@ -20858,7 +21687,7 @@
                 <a:ea typeface="Calibri" pitchFamily="34" charset="-122"/>
                 <a:cs typeface="Calibri" pitchFamily="34" charset="-120"/>
               </a:rPr>
-              <a:t>come</a:t>
+              <a:t>before</a:t>
             </a:r>
             <a:endParaRPr lang="en-US" sz="850" dirty="0"/>
           </a:p>
@@ -20872,8 +21701,8 @@
         </p:nvSpPr>
         <p:spPr>
           <a:xfrm>
-            <a:off x="6519672" y="2258568"/>
-            <a:ext cx="1828800" cy="292608"/>
+            <a:off x="5329123" y="2258568"/>
+            <a:ext cx="1581912" cy="292608"/>
           </a:xfrm>
           <a:prstGeom prst="rect">
             <a:avLst>
@@ -20906,8 +21735,8 @@
         </p:nvSpPr>
         <p:spPr>
           <a:xfrm>
-            <a:off x="6519672" y="2258568"/>
-            <a:ext cx="1828800" cy="292608"/>
+            <a:off x="5329123" y="2258568"/>
+            <a:ext cx="1581912" cy="292608"/>
           </a:xfrm>
           <a:prstGeom prst="rect">
             <a:avLst/>
@@ -20931,7 +21760,7 @@
                 <a:ea typeface="Trebuchet MS" pitchFamily="34" charset="-122"/>
                 <a:cs typeface="Trebuchet MS" pitchFamily="34" charset="-120"/>
               </a:rPr>
-              <a:t>ive</a:t>
+              <a:t>vent</a:t>
             </a:r>
             <a:endParaRPr lang="en-US" sz="1300" dirty="0"/>
           </a:p>
@@ -20945,8 +21774,8 @@
         </p:nvSpPr>
         <p:spPr>
           <a:xfrm>
-            <a:off x="6519672" y="2569464"/>
-            <a:ext cx="1828800" cy="201168"/>
+            <a:off x="5329123" y="2569464"/>
+            <a:ext cx="1581912" cy="201168"/>
           </a:xfrm>
           <a:prstGeom prst="rect">
             <a:avLst/>
@@ -20970,7 +21799,7 @@
                 <a:ea typeface="Calibri" pitchFamily="34" charset="-122"/>
                 <a:cs typeface="Calibri" pitchFamily="34" charset="-120"/>
               </a:rPr>
-              <a:t>having the quality of</a:t>
+              <a:t>come</a:t>
             </a:r>
             <a:endParaRPr lang="en-US" sz="850" dirty="0"/>
           </a:p>
@@ -20979,6 +21808,118 @@
       <p:sp>
         <p:nvSpPr>
           <p:cNvPr id="25" name="Shape 23"/>
+          <p:cNvSpPr/>
+          <p:nvPr/>
+        </p:nvSpPr>
+        <p:spPr>
+          <a:xfrm>
+            <a:off x="6998818" y="2258568"/>
+            <a:ext cx="1581912" cy="292608"/>
+          </a:xfrm>
+          <a:prstGeom prst="rect">
+            <a:avLst>
+              <a:gd name="adj" fmla="val 25000"/>
+            </a:avLst>
+          </a:prstGeom>
+          <a:solidFill>
+            <a:srgbClr val="FCE7F3"/>
+          </a:solidFill>
+          <a:ln w="19050">
+            <a:solidFill>
+              <a:srgbClr val="DB2777"/>
+            </a:solidFill>
+            <a:prstDash val="solid"/>
+          </a:ln>
+          <a:effectLst>
+            <a:outerShdw sx="100000" sy="100000" kx="0" ky="0" algn="bl" rotWithShape="0" blurRad="101600" dist="38100" dir="8100000">
+              <a:srgbClr val="000000">
+                <a:alpha val="12000"/>
+              </a:srgbClr>
+            </a:outerShdw>
+          </a:effectLst>
+        </p:spPr>
+      </p:sp>
+      <p:sp>
+        <p:nvSpPr>
+          <p:cNvPr id="26" name="Text 24"/>
+          <p:cNvSpPr/>
+          <p:nvPr/>
+        </p:nvSpPr>
+        <p:spPr>
+          <a:xfrm>
+            <a:off x="6998818" y="2258568"/>
+            <a:ext cx="1581912" cy="292608"/>
+          </a:xfrm>
+          <a:prstGeom prst="rect">
+            <a:avLst/>
+          </a:prstGeom>
+          <a:noFill/>
+          <a:ln/>
+        </p:spPr>
+        <p:txBody>
+          <a:bodyPr wrap="square" lIns="0" tIns="0" rIns="0" bIns="0" rtlCol="0" anchor="ctr"/>
+          <a:lstStyle/>
+          <a:p>
+            <a:pPr algn="ctr" indent="0" marL="0">
+              <a:buNone/>
+            </a:pPr>
+            <a:r>
+              <a:rPr lang="en-US" sz="1300" b="1" dirty="0">
+                <a:solidFill>
+                  <a:srgbClr val="9D174D"/>
+                </a:solidFill>
+                <a:latin typeface="Trebuchet MS" pitchFamily="34" charset="0"/>
+                <a:ea typeface="Trebuchet MS" pitchFamily="34" charset="-122"/>
+                <a:cs typeface="Trebuchet MS" pitchFamily="34" charset="-120"/>
+              </a:rPr>
+              <a:t>able</a:t>
+            </a:r>
+            <a:endParaRPr lang="en-US" sz="1300" dirty="0"/>
+          </a:p>
+        </p:txBody>
+      </p:sp>
+      <p:sp>
+        <p:nvSpPr>
+          <p:cNvPr id="27" name="Text 25"/>
+          <p:cNvSpPr/>
+          <p:nvPr/>
+        </p:nvSpPr>
+        <p:spPr>
+          <a:xfrm>
+            <a:off x="6998818" y="2569464"/>
+            <a:ext cx="1581912" cy="201168"/>
+          </a:xfrm>
+          <a:prstGeom prst="rect">
+            <a:avLst/>
+          </a:prstGeom>
+          <a:noFill/>
+          <a:ln/>
+        </p:spPr>
+        <p:txBody>
+          <a:bodyPr wrap="square" lIns="0" tIns="0" rIns="0" bIns="0" rtlCol="0" anchor="t"/>
+          <a:lstStyle/>
+          <a:p>
+            <a:pPr algn="ctr" indent="0" marL="0">
+              <a:buNone/>
+            </a:pPr>
+            <a:r>
+              <a:rPr lang="en-US" sz="850" dirty="0">
+                <a:solidFill>
+                  <a:srgbClr val="475569"/>
+                </a:solidFill>
+                <a:latin typeface="Calibri" pitchFamily="34" charset="0"/>
+                <a:ea typeface="Calibri" pitchFamily="34" charset="-122"/>
+                <a:cs typeface="Calibri" pitchFamily="34" charset="-120"/>
+              </a:rPr>
+              <a:t>able to be</a:t>
+            </a:r>
+            <a:endParaRPr lang="en-US" sz="850" dirty="0"/>
+          </a:p>
+        </p:txBody>
+      </p:sp>
+      <p:sp>
+        <p:nvSpPr>
+          <p:cNvPr id="28" name="Shape 26"/>
           <p:cNvSpPr/>
           <p:nvPr/>
         </p:nvSpPr>
@@ -21005,7 +21946,7 @@
       </p:sp>
       <p:sp>
         <p:nvSpPr>
-          <p:cNvPr id="26" name="Text 24"/>
+          <p:cNvPr id="29" name="Text 27"/>
           <p:cNvSpPr/>
           <p:nvPr/>
         </p:nvSpPr>
@@ -21044,7 +21985,7 @@
       </p:sp>
       <p:sp>
         <p:nvSpPr>
-          <p:cNvPr id="27" name="Shape 25"/>
+          <p:cNvPr id="30" name="Shape 28"/>
           <p:cNvSpPr/>
           <p:nvPr/>
         </p:nvSpPr>
@@ -21071,14 +22012,14 @@
       </p:sp>
       <p:sp>
         <p:nvSpPr>
-          <p:cNvPr id="28" name="Shape 26"/>
-          <p:cNvSpPr/>
-          <p:nvPr/>
-        </p:nvSpPr>
-        <p:spPr>
-          <a:xfrm>
-            <a:off x="2313432" y="3364992"/>
-            <a:ext cx="1645920" cy="475488"/>
+          <p:cNvPr id="31" name="Shape 29"/>
+          <p:cNvSpPr/>
+          <p:nvPr/>
+        </p:nvSpPr>
+        <p:spPr>
+          <a:xfrm>
+            <a:off x="1978152" y="3364992"/>
+            <a:ext cx="1225296" cy="475488"/>
           </a:xfrm>
           <a:prstGeom prst="rect">
             <a:avLst>
@@ -21098,14 +22039,14 @@
       </p:sp>
       <p:sp>
         <p:nvSpPr>
-          <p:cNvPr id="29" name="Text 27"/>
-          <p:cNvSpPr/>
-          <p:nvPr/>
-        </p:nvSpPr>
-        <p:spPr>
-          <a:xfrm>
-            <a:off x="2313432" y="3364992"/>
-            <a:ext cx="1645920" cy="475488"/>
+          <p:cNvPr id="32" name="Text 30"/>
+          <p:cNvSpPr/>
+          <p:nvPr/>
+        </p:nvSpPr>
+        <p:spPr>
+          <a:xfrm>
+            <a:off x="1978152" y="3364992"/>
+            <a:ext cx="1225296" cy="475488"/>
           </a:xfrm>
           <a:prstGeom prst="rect">
             <a:avLst/>
@@ -21129,7 +22070,7 @@
                 <a:ea typeface="Trebuchet MS" pitchFamily="34" charset="-122"/>
                 <a:cs typeface="Trebuchet MS" pitchFamily="34" charset="-120"/>
               </a:rPr>
-              <a:t>pre</a:t>
+              <a:t>un</a:t>
             </a:r>
             <a:endParaRPr lang="en-US" sz="1400" dirty="0"/>
           </a:p>
@@ -21137,14 +22078,14 @@
       </p:sp>
       <p:sp>
         <p:nvSpPr>
-          <p:cNvPr id="30" name="Text 28"/>
-          <p:cNvSpPr/>
-          <p:nvPr/>
-        </p:nvSpPr>
-        <p:spPr>
-          <a:xfrm>
-            <a:off x="3959352" y="3364992"/>
-            <a:ext cx="411480" cy="475488"/>
+          <p:cNvPr id="33" name="Text 31"/>
+          <p:cNvSpPr/>
+          <p:nvPr/>
+        </p:nvSpPr>
+        <p:spPr>
+          <a:xfrm>
+            <a:off x="3203448" y="3364992"/>
+            <a:ext cx="76200" cy="475488"/>
           </a:xfrm>
           <a:prstGeom prst="rect">
             <a:avLst/>
@@ -21176,14 +22117,14 @@
       </p:sp>
       <p:sp>
         <p:nvSpPr>
-          <p:cNvPr id="31" name="Shape 29"/>
-          <p:cNvSpPr/>
-          <p:nvPr/>
-        </p:nvSpPr>
-        <p:spPr>
-          <a:xfrm>
-            <a:off x="4370832" y="3364992"/>
-            <a:ext cx="1645920" cy="475488"/>
+          <p:cNvPr id="34" name="Shape 32"/>
+          <p:cNvSpPr/>
+          <p:nvPr/>
+        </p:nvSpPr>
+        <p:spPr>
+          <a:xfrm>
+            <a:off x="3279648" y="3364992"/>
+            <a:ext cx="1225296" cy="475488"/>
           </a:xfrm>
           <a:prstGeom prst="rect">
             <a:avLst>
@@ -21203,14 +22144,14 @@
       </p:sp>
       <p:sp>
         <p:nvSpPr>
-          <p:cNvPr id="32" name="Text 30"/>
-          <p:cNvSpPr/>
-          <p:nvPr/>
-        </p:nvSpPr>
-        <p:spPr>
-          <a:xfrm>
-            <a:off x="4370832" y="3364992"/>
-            <a:ext cx="1645920" cy="475488"/>
+          <p:cNvPr id="35" name="Text 33"/>
+          <p:cNvSpPr/>
+          <p:nvPr/>
+        </p:nvSpPr>
+        <p:spPr>
+          <a:xfrm>
+            <a:off x="3279648" y="3364992"/>
+            <a:ext cx="1225296" cy="475488"/>
           </a:xfrm>
           <a:prstGeom prst="rect">
             <a:avLst/>
@@ -21234,7 +22175,7 @@
                 <a:ea typeface="Trebuchet MS" pitchFamily="34" charset="-122"/>
                 <a:cs typeface="Trebuchet MS" pitchFamily="34" charset="-120"/>
               </a:rPr>
-              <a:t>ven</a:t>
+              <a:t>pre</a:t>
             </a:r>
             <a:endParaRPr lang="en-US" sz="1400" dirty="0"/>
           </a:p>
@@ -21242,14 +22183,14 @@
       </p:sp>
       <p:sp>
         <p:nvSpPr>
-          <p:cNvPr id="33" name="Text 31"/>
-          <p:cNvSpPr/>
-          <p:nvPr/>
-        </p:nvSpPr>
-        <p:spPr>
-          <a:xfrm>
-            <a:off x="6016752" y="3364992"/>
-            <a:ext cx="411480" cy="475488"/>
+          <p:cNvPr id="36" name="Text 34"/>
+          <p:cNvSpPr/>
+          <p:nvPr/>
+        </p:nvSpPr>
+        <p:spPr>
+          <a:xfrm>
+            <a:off x="4504944" y="3364992"/>
+            <a:ext cx="76200" cy="475488"/>
           </a:xfrm>
           <a:prstGeom prst="rect">
             <a:avLst/>
@@ -21281,14 +22222,14 @@
       </p:sp>
       <p:sp>
         <p:nvSpPr>
-          <p:cNvPr id="34" name="Shape 32"/>
-          <p:cNvSpPr/>
-          <p:nvPr/>
-        </p:nvSpPr>
-        <p:spPr>
-          <a:xfrm>
-            <a:off x="6428232" y="3364992"/>
-            <a:ext cx="1645920" cy="475488"/>
+          <p:cNvPr id="37" name="Shape 35"/>
+          <p:cNvSpPr/>
+          <p:nvPr/>
+        </p:nvSpPr>
+        <p:spPr>
+          <a:xfrm>
+            <a:off x="4581144" y="3364992"/>
+            <a:ext cx="1225296" cy="475488"/>
           </a:xfrm>
           <a:prstGeom prst="rect">
             <a:avLst>
@@ -21308,14 +22249,14 @@
       </p:sp>
       <p:sp>
         <p:nvSpPr>
-          <p:cNvPr id="35" name="Text 33"/>
-          <p:cNvSpPr/>
-          <p:nvPr/>
-        </p:nvSpPr>
-        <p:spPr>
-          <a:xfrm>
-            <a:off x="6428232" y="3364992"/>
-            <a:ext cx="1645920" cy="475488"/>
+          <p:cNvPr id="38" name="Text 36"/>
+          <p:cNvSpPr/>
+          <p:nvPr/>
+        </p:nvSpPr>
+        <p:spPr>
+          <a:xfrm>
+            <a:off x="4581144" y="3364992"/>
+            <a:ext cx="1225296" cy="475488"/>
           </a:xfrm>
           <a:prstGeom prst="rect">
             <a:avLst/>
@@ -21339,7 +22280,7 @@
                 <a:ea typeface="Trebuchet MS" pitchFamily="34" charset="-122"/>
                 <a:cs typeface="Trebuchet MS" pitchFamily="34" charset="-120"/>
               </a:rPr>
-              <a:t>tive</a:t>
+              <a:t>ven</a:t>
             </a:r>
             <a:endParaRPr lang="en-US" sz="1400" dirty="0"/>
           </a:p>
@@ -21347,7 +22288,217 @@
       </p:sp>
       <p:sp>
         <p:nvSpPr>
-          <p:cNvPr id="36" name="Shape 34"/>
+          <p:cNvPr id="39" name="Text 37"/>
+          <p:cNvSpPr/>
+          <p:nvPr/>
+        </p:nvSpPr>
+        <p:spPr>
+          <a:xfrm>
+            <a:off x="5806440" y="3364992"/>
+            <a:ext cx="76200" cy="475488"/>
+          </a:xfrm>
+          <a:prstGeom prst="rect">
+            <a:avLst/>
+          </a:prstGeom>
+          <a:noFill/>
+          <a:ln/>
+        </p:spPr>
+        <p:txBody>
+          <a:bodyPr wrap="square" lIns="0" tIns="0" rIns="0" bIns="0" rtlCol="0" anchor="ctr"/>
+          <a:lstStyle/>
+          <a:p>
+            <a:pPr algn="ctr" indent="0" marL="0">
+              <a:buNone/>
+            </a:pPr>
+            <a:r>
+              <a:rPr lang="en-US" sz="1600" b="1" dirty="0">
+                <a:solidFill>
+                  <a:srgbClr val="0D9488"/>
+                </a:solidFill>
+                <a:latin typeface="Trebuchet MS" pitchFamily="34" charset="0"/>
+                <a:ea typeface="Trebuchet MS" pitchFamily="34" charset="-122"/>
+                <a:cs typeface="Trebuchet MS" pitchFamily="34" charset="-120"/>
+              </a:rPr>
+              <a:t>·</a:t>
+            </a:r>
+            <a:endParaRPr lang="en-US" sz="1600" dirty="0"/>
+          </a:p>
+        </p:txBody>
+      </p:sp>
+      <p:sp>
+        <p:nvSpPr>
+          <p:cNvPr id="40" name="Shape 38"/>
+          <p:cNvSpPr/>
+          <p:nvPr/>
+        </p:nvSpPr>
+        <p:spPr>
+          <a:xfrm>
+            <a:off x="5882640" y="3364992"/>
+            <a:ext cx="1225296" cy="475488"/>
+          </a:xfrm>
+          <a:prstGeom prst="rect">
+            <a:avLst>
+              <a:gd name="adj" fmla="val 9615"/>
+            </a:avLst>
+          </a:prstGeom>
+          <a:solidFill>
+            <a:srgbClr val="FFFFFF"/>
+          </a:solidFill>
+          <a:ln w="12700">
+            <a:solidFill>
+              <a:srgbClr val="0D9488"/>
+            </a:solidFill>
+            <a:prstDash val="solid"/>
+          </a:ln>
+        </p:spPr>
+      </p:sp>
+      <p:sp>
+        <p:nvSpPr>
+          <p:cNvPr id="41" name="Text 39"/>
+          <p:cNvSpPr/>
+          <p:nvPr/>
+        </p:nvSpPr>
+        <p:spPr>
+          <a:xfrm>
+            <a:off x="5882640" y="3364992"/>
+            <a:ext cx="1225296" cy="475488"/>
+          </a:xfrm>
+          <a:prstGeom prst="rect">
+            <a:avLst/>
+          </a:prstGeom>
+          <a:noFill/>
+          <a:ln/>
+        </p:spPr>
+        <p:txBody>
+          <a:bodyPr wrap="square" lIns="0" tIns="0" rIns="0" bIns="0" rtlCol="0" anchor="ctr"/>
+          <a:lstStyle/>
+          <a:p>
+            <a:pPr algn="ctr" indent="0" marL="0">
+              <a:buNone/>
+            </a:pPr>
+            <a:r>
+              <a:rPr lang="en-US" sz="1400" b="1" dirty="0">
+                <a:solidFill>
+                  <a:srgbClr val="0D9488"/>
+                </a:solidFill>
+                <a:latin typeface="Trebuchet MS" pitchFamily="34" charset="0"/>
+                <a:ea typeface="Trebuchet MS" pitchFamily="34" charset="-122"/>
+                <a:cs typeface="Trebuchet MS" pitchFamily="34" charset="-120"/>
+              </a:rPr>
+              <a:t>ta</a:t>
+            </a:r>
+            <a:endParaRPr lang="en-US" sz="1400" dirty="0"/>
+          </a:p>
+        </p:txBody>
+      </p:sp>
+      <p:sp>
+        <p:nvSpPr>
+          <p:cNvPr id="42" name="Text 40"/>
+          <p:cNvSpPr/>
+          <p:nvPr/>
+        </p:nvSpPr>
+        <p:spPr>
+          <a:xfrm>
+            <a:off x="7107936" y="3364992"/>
+            <a:ext cx="76200" cy="475488"/>
+          </a:xfrm>
+          <a:prstGeom prst="rect">
+            <a:avLst/>
+          </a:prstGeom>
+          <a:noFill/>
+          <a:ln/>
+        </p:spPr>
+        <p:txBody>
+          <a:bodyPr wrap="square" lIns="0" tIns="0" rIns="0" bIns="0" rtlCol="0" anchor="ctr"/>
+          <a:lstStyle/>
+          <a:p>
+            <a:pPr algn="ctr" indent="0" marL="0">
+              <a:buNone/>
+            </a:pPr>
+            <a:r>
+              <a:rPr lang="en-US" sz="1600" b="1" dirty="0">
+                <a:solidFill>
+                  <a:srgbClr val="0D9488"/>
+                </a:solidFill>
+                <a:latin typeface="Trebuchet MS" pitchFamily="34" charset="0"/>
+                <a:ea typeface="Trebuchet MS" pitchFamily="34" charset="-122"/>
+                <a:cs typeface="Trebuchet MS" pitchFamily="34" charset="-120"/>
+              </a:rPr>
+              <a:t>·</a:t>
+            </a:r>
+            <a:endParaRPr lang="en-US" sz="1600" dirty="0"/>
+          </a:p>
+        </p:txBody>
+      </p:sp>
+      <p:sp>
+        <p:nvSpPr>
+          <p:cNvPr id="43" name="Shape 41"/>
+          <p:cNvSpPr/>
+          <p:nvPr/>
+        </p:nvSpPr>
+        <p:spPr>
+          <a:xfrm>
+            <a:off x="7184136" y="3364992"/>
+            <a:ext cx="1225296" cy="475488"/>
+          </a:xfrm>
+          <a:prstGeom prst="rect">
+            <a:avLst>
+              <a:gd name="adj" fmla="val 9615"/>
+            </a:avLst>
+          </a:prstGeom>
+          <a:solidFill>
+            <a:srgbClr val="FFFFFF"/>
+          </a:solidFill>
+          <a:ln w="12700">
+            <a:solidFill>
+              <a:srgbClr val="0D9488"/>
+            </a:solidFill>
+            <a:prstDash val="solid"/>
+          </a:ln>
+        </p:spPr>
+      </p:sp>
+      <p:sp>
+        <p:nvSpPr>
+          <p:cNvPr id="44" name="Text 42"/>
+          <p:cNvSpPr/>
+          <p:nvPr/>
+        </p:nvSpPr>
+        <p:spPr>
+          <a:xfrm>
+            <a:off x="7184136" y="3364992"/>
+            <a:ext cx="1225296" cy="475488"/>
+          </a:xfrm>
+          <a:prstGeom prst="rect">
+            <a:avLst/>
+          </a:prstGeom>
+          <a:noFill/>
+          <a:ln/>
+        </p:spPr>
+        <p:txBody>
+          <a:bodyPr wrap="square" lIns="0" tIns="0" rIns="0" bIns="0" rtlCol="0" anchor="ctr"/>
+          <a:lstStyle/>
+          <a:p>
+            <a:pPr algn="ctr" indent="0" marL="0">
+              <a:buNone/>
+            </a:pPr>
+            <a:r>
+              <a:rPr lang="en-US" sz="1400" b="1" dirty="0">
+                <a:solidFill>
+                  <a:srgbClr val="0D9488"/>
+                </a:solidFill>
+                <a:latin typeface="Trebuchet MS" pitchFamily="34" charset="0"/>
+                <a:ea typeface="Trebuchet MS" pitchFamily="34" charset="-122"/>
+                <a:cs typeface="Trebuchet MS" pitchFamily="34" charset="-120"/>
+              </a:rPr>
+              <a:t>ble</a:t>
+            </a:r>
+            <a:endParaRPr lang="en-US" sz="1400" dirty="0"/>
+          </a:p>
+        </p:txBody>
+      </p:sp>
+      <p:sp>
+        <p:nvSpPr>
+          <p:cNvPr id="45" name="Shape 43"/>
           <p:cNvSpPr/>
           <p:nvPr/>
         </p:nvSpPr>
@@ -21374,7 +22525,7 @@
       </p:sp>
       <p:sp>
         <p:nvSpPr>
-          <p:cNvPr id="37" name="Text 35"/>
+          <p:cNvPr id="46" name="Text 44"/>
           <p:cNvSpPr/>
           <p:nvPr/>
         </p:nvSpPr>
@@ -21413,7 +22564,7 @@
       </p:sp>
       <p:sp>
         <p:nvSpPr>
-          <p:cNvPr id="38" name="Shape 36"/>
+          <p:cNvPr id="47" name="Shape 45"/>
           <p:cNvSpPr/>
           <p:nvPr/>
         </p:nvSpPr>
@@ -21440,7 +22591,7 @@
       </p:sp>
       <p:sp>
         <p:nvSpPr>
-          <p:cNvPr id="39" name="Text 37"/>
+          <p:cNvPr id="48" name="Text 46"/>
           <p:cNvSpPr/>
           <p:nvPr/>
         </p:nvSpPr>
@@ -21902,7 +23053,7 @@
                 <a:ea typeface="Trebuchet MS" pitchFamily="34" charset="-122"/>
                 <a:cs typeface="Trebuchet MS" pitchFamily="34" charset="-120"/>
               </a:rPr>
-              <a:t>preventive</a:t>
+              <a:t>unpreventable</a:t>
             </a:r>
             <a:endParaRPr lang="en-US" sz="2800" dirty="0"/>
           </a:p>
@@ -21982,8 +23133,8 @@
         </p:nvSpPr>
         <p:spPr>
           <a:xfrm>
-            <a:off x="2221992" y="2258568"/>
-            <a:ext cx="1828800" cy="292608"/>
+            <a:off x="1989734" y="2258568"/>
+            <a:ext cx="1581912" cy="292608"/>
           </a:xfrm>
           <a:prstGeom prst="rect">
             <a:avLst>
@@ -22016,8 +23167,8 @@
         </p:nvSpPr>
         <p:spPr>
           <a:xfrm>
-            <a:off x="2221992" y="2258568"/>
-            <a:ext cx="1828800" cy="292608"/>
+            <a:off x="1989734" y="2258568"/>
+            <a:ext cx="1581912" cy="292608"/>
           </a:xfrm>
           <a:prstGeom prst="rect">
             <a:avLst/>
@@ -22041,7 +23192,7 @@
                 <a:ea typeface="Trebuchet MS" pitchFamily="34" charset="-122"/>
                 <a:cs typeface="Trebuchet MS" pitchFamily="34" charset="-120"/>
               </a:rPr>
-              <a:t>pre</a:t>
+              <a:t>un</a:t>
             </a:r>
             <a:endParaRPr lang="en-US" sz="1300" dirty="0"/>
           </a:p>
@@ -22055,8 +23206,8 @@
         </p:nvSpPr>
         <p:spPr>
           <a:xfrm>
-            <a:off x="2221992" y="2569464"/>
-            <a:ext cx="1828800" cy="201168"/>
+            <a:off x="1989734" y="2569464"/>
+            <a:ext cx="1581912" cy="201168"/>
           </a:xfrm>
           <a:prstGeom prst="rect">
             <a:avLst/>
@@ -22080,7 +23231,7 @@
                 <a:ea typeface="Calibri" pitchFamily="34" charset="-122"/>
                 <a:cs typeface="Calibri" pitchFamily="34" charset="-120"/>
               </a:rPr>
-              <a:t>before</a:t>
+              <a:t>not</a:t>
             </a:r>
             <a:endParaRPr lang="en-US" sz="850" dirty="0"/>
           </a:p>
@@ -22094,8 +23245,8 @@
         </p:nvSpPr>
         <p:spPr>
           <a:xfrm>
-            <a:off x="4370832" y="2258568"/>
-            <a:ext cx="1828800" cy="292608"/>
+            <a:off x="3659429" y="2258568"/>
+            <a:ext cx="1581912" cy="292608"/>
           </a:xfrm>
           <a:prstGeom prst="rect">
             <a:avLst>
@@ -22128,8 +23279,8 @@
         </p:nvSpPr>
         <p:spPr>
           <a:xfrm>
-            <a:off x="4370832" y="2258568"/>
-            <a:ext cx="1828800" cy="292608"/>
+            <a:off x="3659429" y="2258568"/>
+            <a:ext cx="1581912" cy="292608"/>
           </a:xfrm>
           <a:prstGeom prst="rect">
             <a:avLst/>
@@ -22153,7 +23304,7 @@
                 <a:ea typeface="Trebuchet MS" pitchFamily="34" charset="-122"/>
                 <a:cs typeface="Trebuchet MS" pitchFamily="34" charset="-120"/>
               </a:rPr>
-              <a:t>vent</a:t>
+              <a:t>pre</a:t>
             </a:r>
             <a:endParaRPr lang="en-US" sz="1300" dirty="0"/>
           </a:p>
@@ -22167,8 +23318,8 @@
         </p:nvSpPr>
         <p:spPr>
           <a:xfrm>
-            <a:off x="4370832" y="2569464"/>
-            <a:ext cx="1828800" cy="201168"/>
+            <a:off x="3659429" y="2569464"/>
+            <a:ext cx="1581912" cy="201168"/>
           </a:xfrm>
           <a:prstGeom prst="rect">
             <a:avLst/>
@@ -22192,7 +23343,7 @@
                 <a:ea typeface="Calibri" pitchFamily="34" charset="-122"/>
                 <a:cs typeface="Calibri" pitchFamily="34" charset="-120"/>
               </a:rPr>
-              <a:t>come</a:t>
+              <a:t>before</a:t>
             </a:r>
             <a:endParaRPr lang="en-US" sz="850" dirty="0"/>
           </a:p>
@@ -22206,8 +23357,8 @@
         </p:nvSpPr>
         <p:spPr>
           <a:xfrm>
-            <a:off x="6519672" y="2258568"/>
-            <a:ext cx="1828800" cy="292608"/>
+            <a:off x="5329123" y="2258568"/>
+            <a:ext cx="1581912" cy="292608"/>
           </a:xfrm>
           <a:prstGeom prst="rect">
             <a:avLst>
@@ -22240,8 +23391,8 @@
         </p:nvSpPr>
         <p:spPr>
           <a:xfrm>
-            <a:off x="6519672" y="2258568"/>
-            <a:ext cx="1828800" cy="292608"/>
+            <a:off x="5329123" y="2258568"/>
+            <a:ext cx="1581912" cy="292608"/>
           </a:xfrm>
           <a:prstGeom prst="rect">
             <a:avLst/>
@@ -22265,7 +23416,7 @@
                 <a:ea typeface="Trebuchet MS" pitchFamily="34" charset="-122"/>
                 <a:cs typeface="Trebuchet MS" pitchFamily="34" charset="-120"/>
               </a:rPr>
-              <a:t>ive</a:t>
+              <a:t>vent</a:t>
             </a:r>
             <a:endParaRPr lang="en-US" sz="1300" dirty="0"/>
           </a:p>
@@ -22279,8 +23430,8 @@
         </p:nvSpPr>
         <p:spPr>
           <a:xfrm>
-            <a:off x="6519672" y="2569464"/>
-            <a:ext cx="1828800" cy="201168"/>
+            <a:off x="5329123" y="2569464"/>
+            <a:ext cx="1581912" cy="201168"/>
           </a:xfrm>
           <a:prstGeom prst="rect">
             <a:avLst/>
@@ -22304,7 +23455,7 @@
                 <a:ea typeface="Calibri" pitchFamily="34" charset="-122"/>
                 <a:cs typeface="Calibri" pitchFamily="34" charset="-120"/>
               </a:rPr>
-              <a:t>having the quality of</a:t>
+              <a:t>come</a:t>
             </a:r>
             <a:endParaRPr lang="en-US" sz="850" dirty="0"/>
           </a:p>
@@ -22313,6 +23464,118 @@
       <p:sp>
         <p:nvSpPr>
           <p:cNvPr id="25" name="Shape 23"/>
+          <p:cNvSpPr/>
+          <p:nvPr/>
+        </p:nvSpPr>
+        <p:spPr>
+          <a:xfrm>
+            <a:off x="6998818" y="2258568"/>
+            <a:ext cx="1581912" cy="292608"/>
+          </a:xfrm>
+          <a:prstGeom prst="rect">
+            <a:avLst>
+              <a:gd name="adj" fmla="val 25000"/>
+            </a:avLst>
+          </a:prstGeom>
+          <a:solidFill>
+            <a:srgbClr val="FCE7F3"/>
+          </a:solidFill>
+          <a:ln w="19050">
+            <a:solidFill>
+              <a:srgbClr val="DB2777"/>
+            </a:solidFill>
+            <a:prstDash val="solid"/>
+          </a:ln>
+          <a:effectLst>
+            <a:outerShdw sx="100000" sy="100000" kx="0" ky="0" algn="bl" rotWithShape="0" blurRad="101600" dist="38100" dir="8100000">
+              <a:srgbClr val="000000">
+                <a:alpha val="12000"/>
+              </a:srgbClr>
+            </a:outerShdw>
+          </a:effectLst>
+        </p:spPr>
+      </p:sp>
+      <p:sp>
+        <p:nvSpPr>
+          <p:cNvPr id="26" name="Text 24"/>
+          <p:cNvSpPr/>
+          <p:nvPr/>
+        </p:nvSpPr>
+        <p:spPr>
+          <a:xfrm>
+            <a:off x="6998818" y="2258568"/>
+            <a:ext cx="1581912" cy="292608"/>
+          </a:xfrm>
+          <a:prstGeom prst="rect">
+            <a:avLst/>
+          </a:prstGeom>
+          <a:noFill/>
+          <a:ln/>
+        </p:spPr>
+        <p:txBody>
+          <a:bodyPr wrap="square" lIns="0" tIns="0" rIns="0" bIns="0" rtlCol="0" anchor="ctr"/>
+          <a:lstStyle/>
+          <a:p>
+            <a:pPr algn="ctr" indent="0" marL="0">
+              <a:buNone/>
+            </a:pPr>
+            <a:r>
+              <a:rPr lang="en-US" sz="1300" b="1" dirty="0">
+                <a:solidFill>
+                  <a:srgbClr val="9D174D"/>
+                </a:solidFill>
+                <a:latin typeface="Trebuchet MS" pitchFamily="34" charset="0"/>
+                <a:ea typeface="Trebuchet MS" pitchFamily="34" charset="-122"/>
+                <a:cs typeface="Trebuchet MS" pitchFamily="34" charset="-120"/>
+              </a:rPr>
+              <a:t>able</a:t>
+            </a:r>
+            <a:endParaRPr lang="en-US" sz="1300" dirty="0"/>
+          </a:p>
+        </p:txBody>
+      </p:sp>
+      <p:sp>
+        <p:nvSpPr>
+          <p:cNvPr id="27" name="Text 25"/>
+          <p:cNvSpPr/>
+          <p:nvPr/>
+        </p:nvSpPr>
+        <p:spPr>
+          <a:xfrm>
+            <a:off x="6998818" y="2569464"/>
+            <a:ext cx="1581912" cy="201168"/>
+          </a:xfrm>
+          <a:prstGeom prst="rect">
+            <a:avLst/>
+          </a:prstGeom>
+          <a:noFill/>
+          <a:ln/>
+        </p:spPr>
+        <p:txBody>
+          <a:bodyPr wrap="square" lIns="0" tIns="0" rIns="0" bIns="0" rtlCol="0" anchor="t"/>
+          <a:lstStyle/>
+          <a:p>
+            <a:pPr algn="ctr" indent="0" marL="0">
+              <a:buNone/>
+            </a:pPr>
+            <a:r>
+              <a:rPr lang="en-US" sz="850" dirty="0">
+                <a:solidFill>
+                  <a:srgbClr val="475569"/>
+                </a:solidFill>
+                <a:latin typeface="Calibri" pitchFamily="34" charset="0"/>
+                <a:ea typeface="Calibri" pitchFamily="34" charset="-122"/>
+                <a:cs typeface="Calibri" pitchFamily="34" charset="-120"/>
+              </a:rPr>
+              <a:t>able to be</a:t>
+            </a:r>
+            <a:endParaRPr lang="en-US" sz="850" dirty="0"/>
+          </a:p>
+        </p:txBody>
+      </p:sp>
+      <p:sp>
+        <p:nvSpPr>
+          <p:cNvPr id="28" name="Shape 26"/>
           <p:cNvSpPr/>
           <p:nvPr/>
         </p:nvSpPr>
@@ -22339,7 +23602,7 @@
       </p:sp>
       <p:sp>
         <p:nvSpPr>
-          <p:cNvPr id="26" name="Text 24"/>
+          <p:cNvPr id="29" name="Text 27"/>
           <p:cNvSpPr/>
           <p:nvPr/>
         </p:nvSpPr>
@@ -22378,7 +23641,7 @@
       </p:sp>
       <p:sp>
         <p:nvSpPr>
-          <p:cNvPr id="27" name="Shape 25"/>
+          <p:cNvPr id="30" name="Shape 28"/>
           <p:cNvSpPr/>
           <p:nvPr/>
         </p:nvSpPr>
@@ -22405,14 +23668,14 @@
       </p:sp>
       <p:sp>
         <p:nvSpPr>
-          <p:cNvPr id="28" name="Shape 26"/>
-          <p:cNvSpPr/>
-          <p:nvPr/>
-        </p:nvSpPr>
-        <p:spPr>
-          <a:xfrm>
-            <a:off x="2313432" y="3364992"/>
-            <a:ext cx="1645920" cy="475488"/>
+          <p:cNvPr id="31" name="Shape 29"/>
+          <p:cNvSpPr/>
+          <p:nvPr/>
+        </p:nvSpPr>
+        <p:spPr>
+          <a:xfrm>
+            <a:off x="1978152" y="3364992"/>
+            <a:ext cx="1225296" cy="475488"/>
           </a:xfrm>
           <a:prstGeom prst="rect">
             <a:avLst>
@@ -22432,14 +23695,14 @@
       </p:sp>
       <p:sp>
         <p:nvSpPr>
-          <p:cNvPr id="29" name="Text 27"/>
-          <p:cNvSpPr/>
-          <p:nvPr/>
-        </p:nvSpPr>
-        <p:spPr>
-          <a:xfrm>
-            <a:off x="2313432" y="3364992"/>
-            <a:ext cx="1645920" cy="475488"/>
+          <p:cNvPr id="32" name="Text 30"/>
+          <p:cNvSpPr/>
+          <p:nvPr/>
+        </p:nvSpPr>
+        <p:spPr>
+          <a:xfrm>
+            <a:off x="1978152" y="3364992"/>
+            <a:ext cx="1225296" cy="475488"/>
           </a:xfrm>
           <a:prstGeom prst="rect">
             <a:avLst/>
@@ -22463,7 +23726,7 @@
                 <a:ea typeface="Trebuchet MS" pitchFamily="34" charset="-122"/>
                 <a:cs typeface="Trebuchet MS" pitchFamily="34" charset="-120"/>
               </a:rPr>
-              <a:t>pre</a:t>
+              <a:t>un</a:t>
             </a:r>
             <a:endParaRPr lang="en-US" sz="1400" dirty="0"/>
           </a:p>
@@ -22471,14 +23734,14 @@
       </p:sp>
       <p:sp>
         <p:nvSpPr>
-          <p:cNvPr id="30" name="Text 28"/>
-          <p:cNvSpPr/>
-          <p:nvPr/>
-        </p:nvSpPr>
-        <p:spPr>
-          <a:xfrm>
-            <a:off x="3959352" y="3364992"/>
-            <a:ext cx="411480" cy="475488"/>
+          <p:cNvPr id="33" name="Text 31"/>
+          <p:cNvSpPr/>
+          <p:nvPr/>
+        </p:nvSpPr>
+        <p:spPr>
+          <a:xfrm>
+            <a:off x="3203448" y="3364992"/>
+            <a:ext cx="76200" cy="475488"/>
           </a:xfrm>
           <a:prstGeom prst="rect">
             <a:avLst/>
@@ -22510,14 +23773,14 @@
       </p:sp>
       <p:sp>
         <p:nvSpPr>
-          <p:cNvPr id="31" name="Shape 29"/>
-          <p:cNvSpPr/>
-          <p:nvPr/>
-        </p:nvSpPr>
-        <p:spPr>
-          <a:xfrm>
-            <a:off x="4370832" y="3364992"/>
-            <a:ext cx="1645920" cy="475488"/>
+          <p:cNvPr id="34" name="Shape 32"/>
+          <p:cNvSpPr/>
+          <p:nvPr/>
+        </p:nvSpPr>
+        <p:spPr>
+          <a:xfrm>
+            <a:off x="3279648" y="3364992"/>
+            <a:ext cx="1225296" cy="475488"/>
           </a:xfrm>
           <a:prstGeom prst="rect">
             <a:avLst>
@@ -22537,14 +23800,14 @@
       </p:sp>
       <p:sp>
         <p:nvSpPr>
-          <p:cNvPr id="32" name="Text 30"/>
-          <p:cNvSpPr/>
-          <p:nvPr/>
-        </p:nvSpPr>
-        <p:spPr>
-          <a:xfrm>
-            <a:off x="4370832" y="3364992"/>
-            <a:ext cx="1645920" cy="475488"/>
+          <p:cNvPr id="35" name="Text 33"/>
+          <p:cNvSpPr/>
+          <p:nvPr/>
+        </p:nvSpPr>
+        <p:spPr>
+          <a:xfrm>
+            <a:off x="3279648" y="3364992"/>
+            <a:ext cx="1225296" cy="475488"/>
           </a:xfrm>
           <a:prstGeom prst="rect">
             <a:avLst/>
@@ -22568,7 +23831,7 @@
                 <a:ea typeface="Trebuchet MS" pitchFamily="34" charset="-122"/>
                 <a:cs typeface="Trebuchet MS" pitchFamily="34" charset="-120"/>
               </a:rPr>
-              <a:t>ven</a:t>
+              <a:t>pre</a:t>
             </a:r>
             <a:endParaRPr lang="en-US" sz="1400" dirty="0"/>
           </a:p>
@@ -22576,14 +23839,14 @@
       </p:sp>
       <p:sp>
         <p:nvSpPr>
-          <p:cNvPr id="33" name="Text 31"/>
-          <p:cNvSpPr/>
-          <p:nvPr/>
-        </p:nvSpPr>
-        <p:spPr>
-          <a:xfrm>
-            <a:off x="6016752" y="3364992"/>
-            <a:ext cx="411480" cy="475488"/>
+          <p:cNvPr id="36" name="Text 34"/>
+          <p:cNvSpPr/>
+          <p:nvPr/>
+        </p:nvSpPr>
+        <p:spPr>
+          <a:xfrm>
+            <a:off x="4504944" y="3364992"/>
+            <a:ext cx="76200" cy="475488"/>
           </a:xfrm>
           <a:prstGeom prst="rect">
             <a:avLst/>
@@ -22615,14 +23878,14 @@
       </p:sp>
       <p:sp>
         <p:nvSpPr>
-          <p:cNvPr id="34" name="Shape 32"/>
-          <p:cNvSpPr/>
-          <p:nvPr/>
-        </p:nvSpPr>
-        <p:spPr>
-          <a:xfrm>
-            <a:off x="6428232" y="3364992"/>
-            <a:ext cx="1645920" cy="475488"/>
+          <p:cNvPr id="37" name="Shape 35"/>
+          <p:cNvSpPr/>
+          <p:nvPr/>
+        </p:nvSpPr>
+        <p:spPr>
+          <a:xfrm>
+            <a:off x="4581144" y="3364992"/>
+            <a:ext cx="1225296" cy="475488"/>
           </a:xfrm>
           <a:prstGeom prst="rect">
             <a:avLst>
@@ -22642,14 +23905,14 @@
       </p:sp>
       <p:sp>
         <p:nvSpPr>
-          <p:cNvPr id="35" name="Text 33"/>
-          <p:cNvSpPr/>
-          <p:nvPr/>
-        </p:nvSpPr>
-        <p:spPr>
-          <a:xfrm>
-            <a:off x="6428232" y="3364992"/>
-            <a:ext cx="1645920" cy="475488"/>
+          <p:cNvPr id="38" name="Text 36"/>
+          <p:cNvSpPr/>
+          <p:nvPr/>
+        </p:nvSpPr>
+        <p:spPr>
+          <a:xfrm>
+            <a:off x="4581144" y="3364992"/>
+            <a:ext cx="1225296" cy="475488"/>
           </a:xfrm>
           <a:prstGeom prst="rect">
             <a:avLst/>
@@ -22673,7 +23936,7 @@
                 <a:ea typeface="Trebuchet MS" pitchFamily="34" charset="-122"/>
                 <a:cs typeface="Trebuchet MS" pitchFamily="34" charset="-120"/>
               </a:rPr>
-              <a:t>tive</a:t>
+              <a:t>ven</a:t>
             </a:r>
             <a:endParaRPr lang="en-US" sz="1400" dirty="0"/>
           </a:p>
@@ -22681,7 +23944,217 @@
       </p:sp>
       <p:sp>
         <p:nvSpPr>
-          <p:cNvPr id="36" name="Shape 34"/>
+          <p:cNvPr id="39" name="Text 37"/>
+          <p:cNvSpPr/>
+          <p:nvPr/>
+        </p:nvSpPr>
+        <p:spPr>
+          <a:xfrm>
+            <a:off x="5806440" y="3364992"/>
+            <a:ext cx="76200" cy="475488"/>
+          </a:xfrm>
+          <a:prstGeom prst="rect">
+            <a:avLst/>
+          </a:prstGeom>
+          <a:noFill/>
+          <a:ln/>
+        </p:spPr>
+        <p:txBody>
+          <a:bodyPr wrap="square" lIns="0" tIns="0" rIns="0" bIns="0" rtlCol="0" anchor="ctr"/>
+          <a:lstStyle/>
+          <a:p>
+            <a:pPr algn="ctr" indent="0" marL="0">
+              <a:buNone/>
+            </a:pPr>
+            <a:r>
+              <a:rPr lang="en-US" sz="1600" b="1" dirty="0">
+                <a:solidFill>
+                  <a:srgbClr val="0D9488"/>
+                </a:solidFill>
+                <a:latin typeface="Trebuchet MS" pitchFamily="34" charset="0"/>
+                <a:ea typeface="Trebuchet MS" pitchFamily="34" charset="-122"/>
+                <a:cs typeface="Trebuchet MS" pitchFamily="34" charset="-120"/>
+              </a:rPr>
+              <a:t>·</a:t>
+            </a:r>
+            <a:endParaRPr lang="en-US" sz="1600" dirty="0"/>
+          </a:p>
+        </p:txBody>
+      </p:sp>
+      <p:sp>
+        <p:nvSpPr>
+          <p:cNvPr id="40" name="Shape 38"/>
+          <p:cNvSpPr/>
+          <p:nvPr/>
+        </p:nvSpPr>
+        <p:spPr>
+          <a:xfrm>
+            <a:off x="5882640" y="3364992"/>
+            <a:ext cx="1225296" cy="475488"/>
+          </a:xfrm>
+          <a:prstGeom prst="rect">
+            <a:avLst>
+              <a:gd name="adj" fmla="val 9615"/>
+            </a:avLst>
+          </a:prstGeom>
+          <a:solidFill>
+            <a:srgbClr val="FFFFFF"/>
+          </a:solidFill>
+          <a:ln w="12700">
+            <a:solidFill>
+              <a:srgbClr val="0D9488"/>
+            </a:solidFill>
+            <a:prstDash val="solid"/>
+          </a:ln>
+        </p:spPr>
+      </p:sp>
+      <p:sp>
+        <p:nvSpPr>
+          <p:cNvPr id="41" name="Text 39"/>
+          <p:cNvSpPr/>
+          <p:nvPr/>
+        </p:nvSpPr>
+        <p:spPr>
+          <a:xfrm>
+            <a:off x="5882640" y="3364992"/>
+            <a:ext cx="1225296" cy="475488"/>
+          </a:xfrm>
+          <a:prstGeom prst="rect">
+            <a:avLst/>
+          </a:prstGeom>
+          <a:noFill/>
+          <a:ln/>
+        </p:spPr>
+        <p:txBody>
+          <a:bodyPr wrap="square" lIns="0" tIns="0" rIns="0" bIns="0" rtlCol="0" anchor="ctr"/>
+          <a:lstStyle/>
+          <a:p>
+            <a:pPr algn="ctr" indent="0" marL="0">
+              <a:buNone/>
+            </a:pPr>
+            <a:r>
+              <a:rPr lang="en-US" sz="1400" b="1" dirty="0">
+                <a:solidFill>
+                  <a:srgbClr val="0D9488"/>
+                </a:solidFill>
+                <a:latin typeface="Trebuchet MS" pitchFamily="34" charset="0"/>
+                <a:ea typeface="Trebuchet MS" pitchFamily="34" charset="-122"/>
+                <a:cs typeface="Trebuchet MS" pitchFamily="34" charset="-120"/>
+              </a:rPr>
+              <a:t>ta</a:t>
+            </a:r>
+            <a:endParaRPr lang="en-US" sz="1400" dirty="0"/>
+          </a:p>
+        </p:txBody>
+      </p:sp>
+      <p:sp>
+        <p:nvSpPr>
+          <p:cNvPr id="42" name="Text 40"/>
+          <p:cNvSpPr/>
+          <p:nvPr/>
+        </p:nvSpPr>
+        <p:spPr>
+          <a:xfrm>
+            <a:off x="7107936" y="3364992"/>
+            <a:ext cx="76200" cy="475488"/>
+          </a:xfrm>
+          <a:prstGeom prst="rect">
+            <a:avLst/>
+          </a:prstGeom>
+          <a:noFill/>
+          <a:ln/>
+        </p:spPr>
+        <p:txBody>
+          <a:bodyPr wrap="square" lIns="0" tIns="0" rIns="0" bIns="0" rtlCol="0" anchor="ctr"/>
+          <a:lstStyle/>
+          <a:p>
+            <a:pPr algn="ctr" indent="0" marL="0">
+              <a:buNone/>
+            </a:pPr>
+            <a:r>
+              <a:rPr lang="en-US" sz="1600" b="1" dirty="0">
+                <a:solidFill>
+                  <a:srgbClr val="0D9488"/>
+                </a:solidFill>
+                <a:latin typeface="Trebuchet MS" pitchFamily="34" charset="0"/>
+                <a:ea typeface="Trebuchet MS" pitchFamily="34" charset="-122"/>
+                <a:cs typeface="Trebuchet MS" pitchFamily="34" charset="-120"/>
+              </a:rPr>
+              <a:t>·</a:t>
+            </a:r>
+            <a:endParaRPr lang="en-US" sz="1600" dirty="0"/>
+          </a:p>
+        </p:txBody>
+      </p:sp>
+      <p:sp>
+        <p:nvSpPr>
+          <p:cNvPr id="43" name="Shape 41"/>
+          <p:cNvSpPr/>
+          <p:nvPr/>
+        </p:nvSpPr>
+        <p:spPr>
+          <a:xfrm>
+            <a:off x="7184136" y="3364992"/>
+            <a:ext cx="1225296" cy="475488"/>
+          </a:xfrm>
+          <a:prstGeom prst="rect">
+            <a:avLst>
+              <a:gd name="adj" fmla="val 9615"/>
+            </a:avLst>
+          </a:prstGeom>
+          <a:solidFill>
+            <a:srgbClr val="FFFFFF"/>
+          </a:solidFill>
+          <a:ln w="12700">
+            <a:solidFill>
+              <a:srgbClr val="0D9488"/>
+            </a:solidFill>
+            <a:prstDash val="solid"/>
+          </a:ln>
+        </p:spPr>
+      </p:sp>
+      <p:sp>
+        <p:nvSpPr>
+          <p:cNvPr id="44" name="Text 42"/>
+          <p:cNvSpPr/>
+          <p:nvPr/>
+        </p:nvSpPr>
+        <p:spPr>
+          <a:xfrm>
+            <a:off x="7184136" y="3364992"/>
+            <a:ext cx="1225296" cy="475488"/>
+          </a:xfrm>
+          <a:prstGeom prst="rect">
+            <a:avLst/>
+          </a:prstGeom>
+          <a:noFill/>
+          <a:ln/>
+        </p:spPr>
+        <p:txBody>
+          <a:bodyPr wrap="square" lIns="0" tIns="0" rIns="0" bIns="0" rtlCol="0" anchor="ctr"/>
+          <a:lstStyle/>
+          <a:p>
+            <a:pPr algn="ctr" indent="0" marL="0">
+              <a:buNone/>
+            </a:pPr>
+            <a:r>
+              <a:rPr lang="en-US" sz="1400" b="1" dirty="0">
+                <a:solidFill>
+                  <a:srgbClr val="0D9488"/>
+                </a:solidFill>
+                <a:latin typeface="Trebuchet MS" pitchFamily="34" charset="0"/>
+                <a:ea typeface="Trebuchet MS" pitchFamily="34" charset="-122"/>
+                <a:cs typeface="Trebuchet MS" pitchFamily="34" charset="-120"/>
+              </a:rPr>
+              <a:t>ble</a:t>
+            </a:r>
+            <a:endParaRPr lang="en-US" sz="1400" dirty="0"/>
+          </a:p>
+        </p:txBody>
+      </p:sp>
+      <p:sp>
+        <p:nvSpPr>
+          <p:cNvPr id="45" name="Shape 43"/>
           <p:cNvSpPr/>
           <p:nvPr/>
         </p:nvSpPr>
@@ -22708,7 +24181,7 @@
       </p:sp>
       <p:sp>
         <p:nvSpPr>
-          <p:cNvPr id="37" name="Text 35"/>
+          <p:cNvPr id="46" name="Text 44"/>
           <p:cNvSpPr/>
           <p:nvPr/>
         </p:nvSpPr>
@@ -22747,7 +24220,7 @@
       </p:sp>
       <p:sp>
         <p:nvSpPr>
-          <p:cNvPr id="38" name="Shape 36"/>
+          <p:cNvPr id="47" name="Shape 45"/>
           <p:cNvSpPr/>
           <p:nvPr/>
         </p:nvSpPr>
@@ -22774,14 +24247,14 @@
       </p:sp>
       <p:sp>
         <p:nvSpPr>
-          <p:cNvPr id="39" name="Shape 37"/>
-          <p:cNvSpPr/>
-          <p:nvPr/>
-        </p:nvSpPr>
-        <p:spPr>
-          <a:xfrm>
-            <a:off x="1951330" y="4169664"/>
-            <a:ext cx="676656" cy="475488"/>
+          <p:cNvPr id="48" name="Shape 46"/>
+          <p:cNvSpPr/>
+          <p:nvPr/>
+        </p:nvSpPr>
+        <p:spPr>
+          <a:xfrm>
+            <a:off x="1952596" y="4169664"/>
+            <a:ext cx="493776" cy="475488"/>
           </a:xfrm>
           <a:prstGeom prst="rect">
             <a:avLst>
@@ -22801,14 +24274,14 @@
       </p:sp>
       <p:sp>
         <p:nvSpPr>
-          <p:cNvPr id="40" name="Text 38"/>
-          <p:cNvSpPr/>
-          <p:nvPr/>
-        </p:nvSpPr>
-        <p:spPr>
-          <a:xfrm>
-            <a:off x="1951330" y="4169664"/>
-            <a:ext cx="676656" cy="475488"/>
+          <p:cNvPr id="49" name="Text 47"/>
+          <p:cNvSpPr/>
+          <p:nvPr/>
+        </p:nvSpPr>
+        <p:spPr>
+          <a:xfrm>
+            <a:off x="1952596" y="4169664"/>
+            <a:ext cx="493776" cy="475488"/>
           </a:xfrm>
           <a:prstGeom prst="rect">
             <a:avLst/>
@@ -22832,7 +24305,7 @@
                 <a:ea typeface="Trebuchet MS" pitchFamily="34" charset="-122"/>
                 <a:cs typeface="Trebuchet MS" pitchFamily="34" charset="-120"/>
               </a:rPr>
-              <a:t>p</a:t>
+              <a:t>u</a:t>
             </a:r>
             <a:endParaRPr lang="en-US" sz="900" dirty="0"/>
           </a:p>
@@ -22840,14 +24313,14 @@
       </p:sp>
       <p:sp>
         <p:nvSpPr>
-          <p:cNvPr id="41" name="Shape 39"/>
-          <p:cNvSpPr/>
-          <p:nvPr/>
-        </p:nvSpPr>
-        <p:spPr>
-          <a:xfrm>
-            <a:off x="2677363" y="4169664"/>
-            <a:ext cx="676656" cy="475488"/>
+          <p:cNvPr id="50" name="Shape 48"/>
+          <p:cNvSpPr/>
+          <p:nvPr/>
+        </p:nvSpPr>
+        <p:spPr>
+          <a:xfrm>
+            <a:off x="2497015" y="4169664"/>
+            <a:ext cx="493776" cy="475488"/>
           </a:xfrm>
           <a:prstGeom prst="rect">
             <a:avLst>
@@ -22867,14 +24340,14 @@
       </p:sp>
       <p:sp>
         <p:nvSpPr>
-          <p:cNvPr id="42" name="Text 40"/>
-          <p:cNvSpPr/>
-          <p:nvPr/>
-        </p:nvSpPr>
-        <p:spPr>
-          <a:xfrm>
-            <a:off x="2677363" y="4169664"/>
-            <a:ext cx="676656" cy="475488"/>
+          <p:cNvPr id="51" name="Text 49"/>
+          <p:cNvSpPr/>
+          <p:nvPr/>
+        </p:nvSpPr>
+        <p:spPr>
+          <a:xfrm>
+            <a:off x="2497015" y="4169664"/>
+            <a:ext cx="493776" cy="475488"/>
           </a:xfrm>
           <a:prstGeom prst="rect">
             <a:avLst/>
@@ -22898,7 +24371,7 @@
                 <a:ea typeface="Trebuchet MS" pitchFamily="34" charset="-122"/>
                 <a:cs typeface="Trebuchet MS" pitchFamily="34" charset="-120"/>
               </a:rPr>
-              <a:t>r</a:t>
+              <a:t>n</a:t>
             </a:r>
             <a:endParaRPr lang="en-US" sz="900" dirty="0"/>
           </a:p>
@@ -22906,14 +24379,14 @@
       </p:sp>
       <p:sp>
         <p:nvSpPr>
-          <p:cNvPr id="43" name="Shape 41"/>
-          <p:cNvSpPr/>
-          <p:nvPr/>
-        </p:nvSpPr>
-        <p:spPr>
-          <a:xfrm>
-            <a:off x="3403397" y="4169664"/>
-            <a:ext cx="676656" cy="475488"/>
+          <p:cNvPr id="52" name="Shape 50"/>
+          <p:cNvSpPr/>
+          <p:nvPr/>
+        </p:nvSpPr>
+        <p:spPr>
+          <a:xfrm>
+            <a:off x="3041435" y="4169664"/>
+            <a:ext cx="493776" cy="475488"/>
           </a:xfrm>
           <a:prstGeom prst="rect">
             <a:avLst>
@@ -22933,14 +24406,14 @@
       </p:sp>
       <p:sp>
         <p:nvSpPr>
-          <p:cNvPr id="44" name="Text 42"/>
-          <p:cNvSpPr/>
-          <p:nvPr/>
-        </p:nvSpPr>
-        <p:spPr>
-          <a:xfrm>
-            <a:off x="3403397" y="4169664"/>
-            <a:ext cx="676656" cy="475488"/>
+          <p:cNvPr id="53" name="Text 51"/>
+          <p:cNvSpPr/>
+          <p:nvPr/>
+        </p:nvSpPr>
+        <p:spPr>
+          <a:xfrm>
+            <a:off x="3041435" y="4169664"/>
+            <a:ext cx="493776" cy="475488"/>
           </a:xfrm>
           <a:prstGeom prst="rect">
             <a:avLst/>
@@ -22964,7 +24437,7 @@
                 <a:ea typeface="Trebuchet MS" pitchFamily="34" charset="-122"/>
                 <a:cs typeface="Trebuchet MS" pitchFamily="34" charset="-120"/>
               </a:rPr>
-              <a:t>e</a:t>
+              <a:t>p</a:t>
             </a:r>
             <a:endParaRPr lang="en-US" sz="900" dirty="0"/>
           </a:p>
@@ -22972,14 +24445,14 @@
       </p:sp>
       <p:sp>
         <p:nvSpPr>
-          <p:cNvPr id="45" name="Shape 43"/>
-          <p:cNvSpPr/>
-          <p:nvPr/>
-        </p:nvSpPr>
-        <p:spPr>
-          <a:xfrm>
-            <a:off x="4129430" y="4169664"/>
-            <a:ext cx="676656" cy="475488"/>
+          <p:cNvPr id="54" name="Shape 52"/>
+          <p:cNvSpPr/>
+          <p:nvPr/>
+        </p:nvSpPr>
+        <p:spPr>
+          <a:xfrm>
+            <a:off x="3585855" y="4169664"/>
+            <a:ext cx="493776" cy="475488"/>
           </a:xfrm>
           <a:prstGeom prst="rect">
             <a:avLst>
@@ -22999,14 +24472,14 @@
       </p:sp>
       <p:sp>
         <p:nvSpPr>
-          <p:cNvPr id="46" name="Text 44"/>
-          <p:cNvSpPr/>
-          <p:nvPr/>
-        </p:nvSpPr>
-        <p:spPr>
-          <a:xfrm>
-            <a:off x="4129430" y="4169664"/>
-            <a:ext cx="676656" cy="475488"/>
+          <p:cNvPr id="55" name="Text 53"/>
+          <p:cNvSpPr/>
+          <p:nvPr/>
+        </p:nvSpPr>
+        <p:spPr>
+          <a:xfrm>
+            <a:off x="3585855" y="4169664"/>
+            <a:ext cx="493776" cy="475488"/>
           </a:xfrm>
           <a:prstGeom prst="rect">
             <a:avLst/>
@@ -23030,7 +24503,7 @@
                 <a:ea typeface="Trebuchet MS" pitchFamily="34" charset="-122"/>
                 <a:cs typeface="Trebuchet MS" pitchFamily="34" charset="-120"/>
               </a:rPr>
-              <a:t>v</a:t>
+              <a:t>r</a:t>
             </a:r>
             <a:endParaRPr lang="en-US" sz="900" dirty="0"/>
           </a:p>
@@ -23038,14 +24511,14 @@
       </p:sp>
       <p:sp>
         <p:nvSpPr>
-          <p:cNvPr id="47" name="Shape 45"/>
-          <p:cNvSpPr/>
-          <p:nvPr/>
-        </p:nvSpPr>
-        <p:spPr>
-          <a:xfrm>
-            <a:off x="4855464" y="4169664"/>
-            <a:ext cx="676656" cy="475488"/>
+          <p:cNvPr id="56" name="Shape 54"/>
+          <p:cNvSpPr/>
+          <p:nvPr/>
+        </p:nvSpPr>
+        <p:spPr>
+          <a:xfrm>
+            <a:off x="4130274" y="4169664"/>
+            <a:ext cx="493776" cy="475488"/>
           </a:xfrm>
           <a:prstGeom prst="rect">
             <a:avLst>
@@ -23065,14 +24538,14 @@
       </p:sp>
       <p:sp>
         <p:nvSpPr>
-          <p:cNvPr id="48" name="Text 46"/>
-          <p:cNvSpPr/>
-          <p:nvPr/>
-        </p:nvSpPr>
-        <p:spPr>
-          <a:xfrm>
-            <a:off x="4855464" y="4169664"/>
-            <a:ext cx="676656" cy="475488"/>
+          <p:cNvPr id="57" name="Text 55"/>
+          <p:cNvSpPr/>
+          <p:nvPr/>
+        </p:nvSpPr>
+        <p:spPr>
+          <a:xfrm>
+            <a:off x="4130274" y="4169664"/>
+            <a:ext cx="493776" cy="475488"/>
           </a:xfrm>
           <a:prstGeom prst="rect">
             <a:avLst/>
@@ -23104,14 +24577,14 @@
       </p:sp>
       <p:sp>
         <p:nvSpPr>
-          <p:cNvPr id="49" name="Shape 47"/>
-          <p:cNvSpPr/>
-          <p:nvPr/>
-        </p:nvSpPr>
-        <p:spPr>
-          <a:xfrm>
-            <a:off x="5581498" y="4169664"/>
-            <a:ext cx="676656" cy="475488"/>
+          <p:cNvPr id="58" name="Shape 56"/>
+          <p:cNvSpPr/>
+          <p:nvPr/>
+        </p:nvSpPr>
+        <p:spPr>
+          <a:xfrm>
+            <a:off x="4674694" y="4169664"/>
+            <a:ext cx="493776" cy="475488"/>
           </a:xfrm>
           <a:prstGeom prst="rect">
             <a:avLst>
@@ -23131,14 +24604,14 @@
       </p:sp>
       <p:sp>
         <p:nvSpPr>
-          <p:cNvPr id="50" name="Text 48"/>
-          <p:cNvSpPr/>
-          <p:nvPr/>
-        </p:nvSpPr>
-        <p:spPr>
-          <a:xfrm>
-            <a:off x="5581498" y="4169664"/>
-            <a:ext cx="676656" cy="475488"/>
+          <p:cNvPr id="59" name="Text 57"/>
+          <p:cNvSpPr/>
+          <p:nvPr/>
+        </p:nvSpPr>
+        <p:spPr>
+          <a:xfrm>
+            <a:off x="4674694" y="4169664"/>
+            <a:ext cx="493776" cy="475488"/>
           </a:xfrm>
           <a:prstGeom prst="rect">
             <a:avLst/>
@@ -23162,7 +24635,7 @@
                 <a:ea typeface="Trebuchet MS" pitchFamily="34" charset="-122"/>
                 <a:cs typeface="Trebuchet MS" pitchFamily="34" charset="-120"/>
               </a:rPr>
-              <a:t>n</a:t>
+              <a:t>v</a:t>
             </a:r>
             <a:endParaRPr lang="en-US" sz="900" dirty="0"/>
           </a:p>
@@ -23170,14 +24643,14 @@
       </p:sp>
       <p:sp>
         <p:nvSpPr>
-          <p:cNvPr id="51" name="Shape 49"/>
-          <p:cNvSpPr/>
-          <p:nvPr/>
-        </p:nvSpPr>
-        <p:spPr>
-          <a:xfrm>
-            <a:off x="6307531" y="4169664"/>
-            <a:ext cx="676656" cy="475488"/>
+          <p:cNvPr id="60" name="Shape 58"/>
+          <p:cNvSpPr/>
+          <p:nvPr/>
+        </p:nvSpPr>
+        <p:spPr>
+          <a:xfrm>
+            <a:off x="5219114" y="4169664"/>
+            <a:ext cx="493776" cy="475488"/>
           </a:xfrm>
           <a:prstGeom prst="rect">
             <a:avLst>
@@ -23197,14 +24670,14 @@
       </p:sp>
       <p:sp>
         <p:nvSpPr>
-          <p:cNvPr id="52" name="Text 50"/>
-          <p:cNvSpPr/>
-          <p:nvPr/>
-        </p:nvSpPr>
-        <p:spPr>
-          <a:xfrm>
-            <a:off x="6307531" y="4169664"/>
-            <a:ext cx="676656" cy="475488"/>
+          <p:cNvPr id="61" name="Text 59"/>
+          <p:cNvSpPr/>
+          <p:nvPr/>
+        </p:nvSpPr>
+        <p:spPr>
+          <a:xfrm>
+            <a:off x="5219114" y="4169664"/>
+            <a:ext cx="493776" cy="475488"/>
           </a:xfrm>
           <a:prstGeom prst="rect">
             <a:avLst/>
@@ -23228,7 +24701,7 @@
                 <a:ea typeface="Trebuchet MS" pitchFamily="34" charset="-122"/>
                 <a:cs typeface="Trebuchet MS" pitchFamily="34" charset="-120"/>
               </a:rPr>
-              <a:t>t</a:t>
+              <a:t>e</a:t>
             </a:r>
             <a:endParaRPr lang="en-US" sz="900" dirty="0"/>
           </a:p>
@@ -23236,14 +24709,14 @@
       </p:sp>
       <p:sp>
         <p:nvSpPr>
-          <p:cNvPr id="53" name="Shape 51"/>
-          <p:cNvSpPr/>
-          <p:nvPr/>
-        </p:nvSpPr>
-        <p:spPr>
-          <a:xfrm>
-            <a:off x="7033565" y="4169664"/>
-            <a:ext cx="676656" cy="475488"/>
+          <p:cNvPr id="62" name="Shape 60"/>
+          <p:cNvSpPr/>
+          <p:nvPr/>
+        </p:nvSpPr>
+        <p:spPr>
+          <a:xfrm>
+            <a:off x="5763534" y="4169664"/>
+            <a:ext cx="493776" cy="475488"/>
           </a:xfrm>
           <a:prstGeom prst="rect">
             <a:avLst>
@@ -23263,14 +24736,14 @@
       </p:sp>
       <p:sp>
         <p:nvSpPr>
-          <p:cNvPr id="54" name="Text 52"/>
-          <p:cNvSpPr/>
-          <p:nvPr/>
-        </p:nvSpPr>
-        <p:spPr>
-          <a:xfrm>
-            <a:off x="7033565" y="4169664"/>
-            <a:ext cx="676656" cy="475488"/>
+          <p:cNvPr id="63" name="Text 61"/>
+          <p:cNvSpPr/>
+          <p:nvPr/>
+        </p:nvSpPr>
+        <p:spPr>
+          <a:xfrm>
+            <a:off x="5763534" y="4169664"/>
+            <a:ext cx="493776" cy="475488"/>
           </a:xfrm>
           <a:prstGeom prst="rect">
             <a:avLst/>
@@ -23294,7 +24767,7 @@
                 <a:ea typeface="Trebuchet MS" pitchFamily="34" charset="-122"/>
                 <a:cs typeface="Trebuchet MS" pitchFamily="34" charset="-120"/>
               </a:rPr>
-              <a:t>i</a:t>
+              <a:t>n</a:t>
             </a:r>
             <a:endParaRPr lang="en-US" sz="900" dirty="0"/>
           </a:p>
@@ -23302,14 +24775,14 @@
       </p:sp>
       <p:sp>
         <p:nvSpPr>
-          <p:cNvPr id="55" name="Shape 53"/>
-          <p:cNvSpPr/>
-          <p:nvPr/>
-        </p:nvSpPr>
-        <p:spPr>
-          <a:xfrm>
-            <a:off x="7759598" y="4169664"/>
-            <a:ext cx="676656" cy="475488"/>
+          <p:cNvPr id="64" name="Shape 62"/>
+          <p:cNvSpPr/>
+          <p:nvPr/>
+        </p:nvSpPr>
+        <p:spPr>
+          <a:xfrm>
+            <a:off x="6307953" y="4169664"/>
+            <a:ext cx="493776" cy="475488"/>
           </a:xfrm>
           <a:prstGeom prst="rect">
             <a:avLst>
@@ -23329,14 +24802,14 @@
       </p:sp>
       <p:sp>
         <p:nvSpPr>
-          <p:cNvPr id="56" name="Text 54"/>
-          <p:cNvSpPr/>
-          <p:nvPr/>
-        </p:nvSpPr>
-        <p:spPr>
-          <a:xfrm>
-            <a:off x="7759598" y="4169664"/>
-            <a:ext cx="676656" cy="475488"/>
+          <p:cNvPr id="65" name="Text 63"/>
+          <p:cNvSpPr/>
+          <p:nvPr/>
+        </p:nvSpPr>
+        <p:spPr>
+          <a:xfrm>
+            <a:off x="6307953" y="4169664"/>
+            <a:ext cx="493776" cy="475488"/>
           </a:xfrm>
           <a:prstGeom prst="rect">
             <a:avLst/>
@@ -23360,7 +24833,205 @@
                 <a:ea typeface="Trebuchet MS" pitchFamily="34" charset="-122"/>
                 <a:cs typeface="Trebuchet MS" pitchFamily="34" charset="-120"/>
               </a:rPr>
-              <a:t>ve</a:t>
+              <a:t>t</a:t>
+            </a:r>
+            <a:endParaRPr lang="en-US" sz="900" dirty="0"/>
+          </a:p>
+        </p:txBody>
+      </p:sp>
+      <p:sp>
+        <p:nvSpPr>
+          <p:cNvPr id="66" name="Shape 64"/>
+          <p:cNvSpPr/>
+          <p:nvPr/>
+        </p:nvSpPr>
+        <p:spPr>
+          <a:xfrm>
+            <a:off x="6852373" y="4169664"/>
+            <a:ext cx="493776" cy="475488"/>
+          </a:xfrm>
+          <a:prstGeom prst="rect">
+            <a:avLst>
+              <a:gd name="adj" fmla="val 7692"/>
+            </a:avLst>
+          </a:prstGeom>
+          <a:solidFill>
+            <a:srgbClr val="FFFFFF"/>
+          </a:solidFill>
+          <a:ln w="12700">
+            <a:solidFill>
+              <a:srgbClr val="DB2777"/>
+            </a:solidFill>
+            <a:prstDash val="solid"/>
+          </a:ln>
+        </p:spPr>
+      </p:sp>
+      <p:sp>
+        <p:nvSpPr>
+          <p:cNvPr id="67" name="Text 65"/>
+          <p:cNvSpPr/>
+          <p:nvPr/>
+        </p:nvSpPr>
+        <p:spPr>
+          <a:xfrm>
+            <a:off x="6852373" y="4169664"/>
+            <a:ext cx="493776" cy="475488"/>
+          </a:xfrm>
+          <a:prstGeom prst="rect">
+            <a:avLst/>
+          </a:prstGeom>
+          <a:noFill/>
+          <a:ln/>
+        </p:spPr>
+        <p:txBody>
+          <a:bodyPr wrap="square" lIns="0" tIns="0" rIns="0" bIns="0" rtlCol="0" anchor="ctr"/>
+          <a:lstStyle/>
+          <a:p>
+            <a:pPr algn="ctr" indent="0" marL="0">
+              <a:buNone/>
+            </a:pPr>
+            <a:r>
+              <a:rPr lang="en-US" sz="900" b="1" dirty="0">
+                <a:solidFill>
+                  <a:srgbClr val="9D174D"/>
+                </a:solidFill>
+                <a:latin typeface="Trebuchet MS" pitchFamily="34" charset="0"/>
+                <a:ea typeface="Trebuchet MS" pitchFamily="34" charset="-122"/>
+                <a:cs typeface="Trebuchet MS" pitchFamily="34" charset="-120"/>
+              </a:rPr>
+              <a:t>a</a:t>
+            </a:r>
+            <a:endParaRPr lang="en-US" sz="900" dirty="0"/>
+          </a:p>
+        </p:txBody>
+      </p:sp>
+      <p:sp>
+        <p:nvSpPr>
+          <p:cNvPr id="68" name="Shape 66"/>
+          <p:cNvSpPr/>
+          <p:nvPr/>
+        </p:nvSpPr>
+        <p:spPr>
+          <a:xfrm>
+            <a:off x="7396793" y="4169664"/>
+            <a:ext cx="493776" cy="475488"/>
+          </a:xfrm>
+          <a:prstGeom prst="rect">
+            <a:avLst>
+              <a:gd name="adj" fmla="val 7692"/>
+            </a:avLst>
+          </a:prstGeom>
+          <a:solidFill>
+            <a:srgbClr val="FFFFFF"/>
+          </a:solidFill>
+          <a:ln w="12700">
+            <a:solidFill>
+              <a:srgbClr val="DB2777"/>
+            </a:solidFill>
+            <a:prstDash val="solid"/>
+          </a:ln>
+        </p:spPr>
+      </p:sp>
+      <p:sp>
+        <p:nvSpPr>
+          <p:cNvPr id="69" name="Text 67"/>
+          <p:cNvSpPr/>
+          <p:nvPr/>
+        </p:nvSpPr>
+        <p:spPr>
+          <a:xfrm>
+            <a:off x="7396793" y="4169664"/>
+            <a:ext cx="493776" cy="475488"/>
+          </a:xfrm>
+          <a:prstGeom prst="rect">
+            <a:avLst/>
+          </a:prstGeom>
+          <a:noFill/>
+          <a:ln/>
+        </p:spPr>
+        <p:txBody>
+          <a:bodyPr wrap="square" lIns="0" tIns="0" rIns="0" bIns="0" rtlCol="0" anchor="ctr"/>
+          <a:lstStyle/>
+          <a:p>
+            <a:pPr algn="ctr" indent="0" marL="0">
+              <a:buNone/>
+            </a:pPr>
+            <a:r>
+              <a:rPr lang="en-US" sz="900" b="1" dirty="0">
+                <a:solidFill>
+                  <a:srgbClr val="9D174D"/>
+                </a:solidFill>
+                <a:latin typeface="Trebuchet MS" pitchFamily="34" charset="0"/>
+                <a:ea typeface="Trebuchet MS" pitchFamily="34" charset="-122"/>
+                <a:cs typeface="Trebuchet MS" pitchFamily="34" charset="-120"/>
+              </a:rPr>
+              <a:t>b</a:t>
+            </a:r>
+            <a:endParaRPr lang="en-US" sz="900" dirty="0"/>
+          </a:p>
+        </p:txBody>
+      </p:sp>
+      <p:sp>
+        <p:nvSpPr>
+          <p:cNvPr id="70" name="Shape 68"/>
+          <p:cNvSpPr/>
+          <p:nvPr/>
+        </p:nvSpPr>
+        <p:spPr>
+          <a:xfrm>
+            <a:off x="7941212" y="4169664"/>
+            <a:ext cx="493776" cy="475488"/>
+          </a:xfrm>
+          <a:prstGeom prst="rect">
+            <a:avLst>
+              <a:gd name="adj" fmla="val 7692"/>
+            </a:avLst>
+          </a:prstGeom>
+          <a:solidFill>
+            <a:srgbClr val="FFFFFF"/>
+          </a:solidFill>
+          <a:ln w="12700">
+            <a:solidFill>
+              <a:srgbClr val="DB2777"/>
+            </a:solidFill>
+            <a:prstDash val="solid"/>
+          </a:ln>
+        </p:spPr>
+      </p:sp>
+      <p:sp>
+        <p:nvSpPr>
+          <p:cNvPr id="71" name="Text 69"/>
+          <p:cNvSpPr/>
+          <p:nvPr/>
+        </p:nvSpPr>
+        <p:spPr>
+          <a:xfrm>
+            <a:off x="7941212" y="4169664"/>
+            <a:ext cx="493776" cy="475488"/>
+          </a:xfrm>
+          <a:prstGeom prst="rect">
+            <a:avLst/>
+          </a:prstGeom>
+          <a:noFill/>
+          <a:ln/>
+        </p:spPr>
+        <p:txBody>
+          <a:bodyPr wrap="square" lIns="0" tIns="0" rIns="0" bIns="0" rtlCol="0" anchor="ctr"/>
+          <a:lstStyle/>
+          <a:p>
+            <a:pPr algn="ctr" indent="0" marL="0">
+              <a:buNone/>
+            </a:pPr>
+            <a:r>
+              <a:rPr lang="en-US" sz="900" b="1" dirty="0">
+                <a:solidFill>
+                  <a:srgbClr val="9D174D"/>
+                </a:solidFill>
+                <a:latin typeface="Trebuchet MS" pitchFamily="34" charset="0"/>
+                <a:ea typeface="Trebuchet MS" pitchFamily="34" charset="-122"/>
+                <a:cs typeface="Trebuchet MS" pitchFamily="34" charset="-120"/>
+              </a:rPr>
+              <a:t>le</a:t>
             </a:r>
             <a:endParaRPr lang="en-US" sz="900" dirty="0"/>
           </a:p>
@@ -23791,7 +25462,7 @@
                 <a:ea typeface="Trebuchet MS" pitchFamily="34" charset="-122"/>
                 <a:cs typeface="Trebuchet MS" pitchFamily="34" charset="-120"/>
               </a:rPr>
-              <a:t>prevention</a:t>
+              <a:t>preventable</a:t>
             </a:r>
             <a:endParaRPr lang="en-US" sz="2800" dirty="0"/>
           </a:p>
@@ -24618,7 +26289,7 @@
                 <a:ea typeface="Trebuchet MS" pitchFamily="34" charset="-122"/>
                 <a:cs typeface="Trebuchet MS" pitchFamily="34" charset="-120"/>
               </a:rPr>
-              <a:t>prevention</a:t>
+              <a:t>preventable</a:t>
             </a:r>
             <a:endParaRPr lang="en-US" sz="2800" dirty="0"/>
           </a:p>
@@ -24981,7 +26652,7 @@
                 <a:ea typeface="Trebuchet MS" pitchFamily="34" charset="-122"/>
                 <a:cs typeface="Trebuchet MS" pitchFamily="34" charset="-120"/>
               </a:rPr>
-              <a:t>ion</a:t>
+              <a:t>able</a:t>
             </a:r>
             <a:endParaRPr lang="en-US" sz="1300" dirty="0"/>
           </a:p>
@@ -25020,7 +26691,7 @@
                 <a:ea typeface="Calibri" pitchFamily="34" charset="-122"/>
                 <a:cs typeface="Calibri" pitchFamily="34" charset="-120"/>
               </a:rPr>
-              <a:t>action or process</a:t>
+              <a:t>able to be</a:t>
             </a:r>
             <a:endParaRPr lang="en-US" sz="850" dirty="0"/>
           </a:p>
@@ -26434,7 +28105,7 @@
                 <a:ea typeface="Trebuchet MS" pitchFamily="34" charset="-122"/>
                 <a:cs typeface="Trebuchet MS" pitchFamily="34" charset="-120"/>
               </a:rPr>
-              <a:t>prevention</a:t>
+              <a:t>preventable</a:t>
             </a:r>
             <a:endParaRPr lang="en-US" sz="2800" dirty="0"/>
           </a:p>
@@ -26797,7 +28468,7 @@
                 <a:ea typeface="Trebuchet MS" pitchFamily="34" charset="-122"/>
                 <a:cs typeface="Trebuchet MS" pitchFamily="34" charset="-120"/>
               </a:rPr>
-              <a:t>ion</a:t>
+              <a:t>able</a:t>
             </a:r>
             <a:endParaRPr lang="en-US" sz="1300" dirty="0"/>
           </a:p>
@@ -26836,7 +28507,7 @@
                 <a:ea typeface="Calibri" pitchFamily="34" charset="-122"/>
                 <a:cs typeface="Calibri" pitchFamily="34" charset="-120"/>
               </a:rPr>
-              <a:t>action or process</a:t>
+              <a:t>able to be</a:t>
             </a:r>
             <a:endParaRPr lang="en-US" sz="850" dirty="0"/>
           </a:p>
@@ -26943,8 +28614,8 @@
         </p:nvSpPr>
         <p:spPr>
           <a:xfrm>
-            <a:off x="2313432" y="3364992"/>
-            <a:ext cx="1645920" cy="475488"/>
+            <a:off x="1975104" y="3364992"/>
+            <a:ext cx="1554480" cy="475488"/>
           </a:xfrm>
           <a:prstGeom prst="rect">
             <a:avLst>
@@ -26970,8 +28641,8 @@
         </p:nvSpPr>
         <p:spPr>
           <a:xfrm>
-            <a:off x="2313432" y="3364992"/>
-            <a:ext cx="1645920" cy="475488"/>
+            <a:off x="1975104" y="3364992"/>
+            <a:ext cx="1554480" cy="475488"/>
           </a:xfrm>
           <a:prstGeom prst="rect">
             <a:avLst/>
@@ -27009,8 +28680,8 @@
         </p:nvSpPr>
         <p:spPr>
           <a:xfrm>
-            <a:off x="3959352" y="3364992"/>
-            <a:ext cx="411480" cy="475488"/>
+            <a:off x="3529584" y="3364992"/>
+            <a:ext cx="73152" cy="475488"/>
           </a:xfrm>
           <a:prstGeom prst="rect">
             <a:avLst/>
@@ -27048,8 +28719,8 @@
         </p:nvSpPr>
         <p:spPr>
           <a:xfrm>
-            <a:off x="4370832" y="3364992"/>
-            <a:ext cx="1645920" cy="475488"/>
+            <a:off x="3602736" y="3364992"/>
+            <a:ext cx="1554480" cy="475488"/>
           </a:xfrm>
           <a:prstGeom prst="rect">
             <a:avLst>
@@ -27075,8 +28746,8 @@
         </p:nvSpPr>
         <p:spPr>
           <a:xfrm>
-            <a:off x="4370832" y="3364992"/>
-            <a:ext cx="1645920" cy="475488"/>
+            <a:off x="3602736" y="3364992"/>
+            <a:ext cx="1554480" cy="475488"/>
           </a:xfrm>
           <a:prstGeom prst="rect">
             <a:avLst/>
@@ -27114,8 +28785,8 @@
         </p:nvSpPr>
         <p:spPr>
           <a:xfrm>
-            <a:off x="6016752" y="3364992"/>
-            <a:ext cx="411480" cy="475488"/>
+            <a:off x="5157216" y="3364992"/>
+            <a:ext cx="73152" cy="475488"/>
           </a:xfrm>
           <a:prstGeom prst="rect">
             <a:avLst/>
@@ -27153,8 +28824,8 @@
         </p:nvSpPr>
         <p:spPr>
           <a:xfrm>
-            <a:off x="6428232" y="3364992"/>
-            <a:ext cx="1645920" cy="475488"/>
+            <a:off x="5230368" y="3364992"/>
+            <a:ext cx="1554480" cy="475488"/>
           </a:xfrm>
           <a:prstGeom prst="rect">
             <a:avLst>
@@ -27180,8 +28851,8 @@
         </p:nvSpPr>
         <p:spPr>
           <a:xfrm>
-            <a:off x="6428232" y="3364992"/>
-            <a:ext cx="1645920" cy="475488"/>
+            <a:off x="5230368" y="3364992"/>
+            <a:ext cx="1554480" cy="475488"/>
           </a:xfrm>
           <a:prstGeom prst="rect">
             <a:avLst/>
@@ -27205,7 +28876,7 @@
                 <a:ea typeface="Trebuchet MS" pitchFamily="34" charset="-122"/>
                 <a:cs typeface="Trebuchet MS" pitchFamily="34" charset="-120"/>
               </a:rPr>
-              <a:t>tion</a:t>
+              <a:t>ta</a:t>
             </a:r>
             <a:endParaRPr lang="en-US" sz="1400" dirty="0"/>
           </a:p>
@@ -27213,7 +28884,112 @@
       </p:sp>
       <p:sp>
         <p:nvSpPr>
-          <p:cNvPr id="36" name="Shape 34"/>
+          <p:cNvPr id="36" name="Text 34"/>
+          <p:cNvSpPr/>
+          <p:nvPr/>
+        </p:nvSpPr>
+        <p:spPr>
+          <a:xfrm>
+            <a:off x="6784848" y="3364992"/>
+            <a:ext cx="73152" cy="475488"/>
+          </a:xfrm>
+          <a:prstGeom prst="rect">
+            <a:avLst/>
+          </a:prstGeom>
+          <a:noFill/>
+          <a:ln/>
+        </p:spPr>
+        <p:txBody>
+          <a:bodyPr wrap="square" lIns="0" tIns="0" rIns="0" bIns="0" rtlCol="0" anchor="ctr"/>
+          <a:lstStyle/>
+          <a:p>
+            <a:pPr algn="ctr" indent="0" marL="0">
+              <a:buNone/>
+            </a:pPr>
+            <a:r>
+              <a:rPr lang="en-US" sz="1600" b="1" dirty="0">
+                <a:solidFill>
+                  <a:srgbClr val="0D9488"/>
+                </a:solidFill>
+                <a:latin typeface="Trebuchet MS" pitchFamily="34" charset="0"/>
+                <a:ea typeface="Trebuchet MS" pitchFamily="34" charset="-122"/>
+                <a:cs typeface="Trebuchet MS" pitchFamily="34" charset="-120"/>
+              </a:rPr>
+              <a:t>·</a:t>
+            </a:r>
+            <a:endParaRPr lang="en-US" sz="1600" dirty="0"/>
+          </a:p>
+        </p:txBody>
+      </p:sp>
+      <p:sp>
+        <p:nvSpPr>
+          <p:cNvPr id="37" name="Shape 35"/>
+          <p:cNvSpPr/>
+          <p:nvPr/>
+        </p:nvSpPr>
+        <p:spPr>
+          <a:xfrm>
+            <a:off x="6858000" y="3364992"/>
+            <a:ext cx="1554480" cy="475488"/>
+          </a:xfrm>
+          <a:prstGeom prst="rect">
+            <a:avLst>
+              <a:gd name="adj" fmla="val 9615"/>
+            </a:avLst>
+          </a:prstGeom>
+          <a:solidFill>
+            <a:srgbClr val="FFFFFF"/>
+          </a:solidFill>
+          <a:ln w="12700">
+            <a:solidFill>
+              <a:srgbClr val="0D9488"/>
+            </a:solidFill>
+            <a:prstDash val="solid"/>
+          </a:ln>
+        </p:spPr>
+      </p:sp>
+      <p:sp>
+        <p:nvSpPr>
+          <p:cNvPr id="38" name="Text 36"/>
+          <p:cNvSpPr/>
+          <p:nvPr/>
+        </p:nvSpPr>
+        <p:spPr>
+          <a:xfrm>
+            <a:off x="6858000" y="3364992"/>
+            <a:ext cx="1554480" cy="475488"/>
+          </a:xfrm>
+          <a:prstGeom prst="rect">
+            <a:avLst/>
+          </a:prstGeom>
+          <a:noFill/>
+          <a:ln/>
+        </p:spPr>
+        <p:txBody>
+          <a:bodyPr wrap="square" lIns="0" tIns="0" rIns="0" bIns="0" rtlCol="0" anchor="ctr"/>
+          <a:lstStyle/>
+          <a:p>
+            <a:pPr algn="ctr" indent="0" marL="0">
+              <a:buNone/>
+            </a:pPr>
+            <a:r>
+              <a:rPr lang="en-US" sz="1400" b="1" dirty="0">
+                <a:solidFill>
+                  <a:srgbClr val="0D9488"/>
+                </a:solidFill>
+                <a:latin typeface="Trebuchet MS" pitchFamily="34" charset="0"/>
+                <a:ea typeface="Trebuchet MS" pitchFamily="34" charset="-122"/>
+                <a:cs typeface="Trebuchet MS" pitchFamily="34" charset="-120"/>
+              </a:rPr>
+              <a:t>ble</a:t>
+            </a:r>
+            <a:endParaRPr lang="en-US" sz="1400" dirty="0"/>
+          </a:p>
+        </p:txBody>
+      </p:sp>
+      <p:sp>
+        <p:nvSpPr>
+          <p:cNvPr id="39" name="Shape 37"/>
           <p:cNvSpPr/>
           <p:nvPr/>
         </p:nvSpPr>
@@ -27240,7 +29016,7 @@
       </p:sp>
       <p:sp>
         <p:nvSpPr>
-          <p:cNvPr id="37" name="Text 35"/>
+          <p:cNvPr id="40" name="Text 38"/>
           <p:cNvSpPr/>
           <p:nvPr/>
         </p:nvSpPr>
@@ -27279,7 +29055,7 @@
       </p:sp>
       <p:sp>
         <p:nvSpPr>
-          <p:cNvPr id="38" name="Shape 36"/>
+          <p:cNvPr id="41" name="Shape 39"/>
           <p:cNvSpPr/>
           <p:nvPr/>
         </p:nvSpPr>
@@ -27306,7 +29082,7 @@
       </p:sp>
       <p:sp>
         <p:nvSpPr>
-          <p:cNvPr id="39" name="Text 37"/>
+          <p:cNvPr id="42" name="Text 40"/>
           <p:cNvSpPr/>
           <p:nvPr/>
         </p:nvSpPr>
@@ -27768,7 +29544,7 @@
                 <a:ea typeface="Trebuchet MS" pitchFamily="34" charset="-122"/>
                 <a:cs typeface="Trebuchet MS" pitchFamily="34" charset="-120"/>
               </a:rPr>
-              <a:t>prevention</a:t>
+              <a:t>preventable</a:t>
             </a:r>
             <a:endParaRPr lang="en-US" sz="2800" dirty="0"/>
           </a:p>
@@ -28131,7 +29907,7 @@
                 <a:ea typeface="Trebuchet MS" pitchFamily="34" charset="-122"/>
                 <a:cs typeface="Trebuchet MS" pitchFamily="34" charset="-120"/>
               </a:rPr>
-              <a:t>ion</a:t>
+              <a:t>able</a:t>
             </a:r>
             <a:endParaRPr lang="en-US" sz="1300" dirty="0"/>
           </a:p>
@@ -28170,7 +29946,7 @@
                 <a:ea typeface="Calibri" pitchFamily="34" charset="-122"/>
                 <a:cs typeface="Calibri" pitchFamily="34" charset="-120"/>
               </a:rPr>
-              <a:t>action or process</a:t>
+              <a:t>able to be</a:t>
             </a:r>
             <a:endParaRPr lang="en-US" sz="850" dirty="0"/>
           </a:p>
@@ -28277,8 +30053,8 @@
         </p:nvSpPr>
         <p:spPr>
           <a:xfrm>
-            <a:off x="2313432" y="3364992"/>
-            <a:ext cx="1645920" cy="475488"/>
+            <a:off x="1975104" y="3364992"/>
+            <a:ext cx="1554480" cy="475488"/>
           </a:xfrm>
           <a:prstGeom prst="rect">
             <a:avLst>
@@ -28304,8 +30080,8 @@
         </p:nvSpPr>
         <p:spPr>
           <a:xfrm>
-            <a:off x="2313432" y="3364992"/>
-            <a:ext cx="1645920" cy="475488"/>
+            <a:off x="1975104" y="3364992"/>
+            <a:ext cx="1554480" cy="475488"/>
           </a:xfrm>
           <a:prstGeom prst="rect">
             <a:avLst/>
@@ -28343,8 +30119,8 @@
         </p:nvSpPr>
         <p:spPr>
           <a:xfrm>
-            <a:off x="3959352" y="3364992"/>
-            <a:ext cx="411480" cy="475488"/>
+            <a:off x="3529584" y="3364992"/>
+            <a:ext cx="73152" cy="475488"/>
           </a:xfrm>
           <a:prstGeom prst="rect">
             <a:avLst/>
@@ -28382,8 +30158,8 @@
         </p:nvSpPr>
         <p:spPr>
           <a:xfrm>
-            <a:off x="4370832" y="3364992"/>
-            <a:ext cx="1645920" cy="475488"/>
+            <a:off x="3602736" y="3364992"/>
+            <a:ext cx="1554480" cy="475488"/>
           </a:xfrm>
           <a:prstGeom prst="rect">
             <a:avLst>
@@ -28409,8 +30185,8 @@
         </p:nvSpPr>
         <p:spPr>
           <a:xfrm>
-            <a:off x="4370832" y="3364992"/>
-            <a:ext cx="1645920" cy="475488"/>
+            <a:off x="3602736" y="3364992"/>
+            <a:ext cx="1554480" cy="475488"/>
           </a:xfrm>
           <a:prstGeom prst="rect">
             <a:avLst/>
@@ -28448,8 +30224,8 @@
         </p:nvSpPr>
         <p:spPr>
           <a:xfrm>
-            <a:off x="6016752" y="3364992"/>
-            <a:ext cx="411480" cy="475488"/>
+            <a:off x="5157216" y="3364992"/>
+            <a:ext cx="73152" cy="475488"/>
           </a:xfrm>
           <a:prstGeom prst="rect">
             <a:avLst/>
@@ -28487,8 +30263,8 @@
         </p:nvSpPr>
         <p:spPr>
           <a:xfrm>
-            <a:off x="6428232" y="3364992"/>
-            <a:ext cx="1645920" cy="475488"/>
+            <a:off x="5230368" y="3364992"/>
+            <a:ext cx="1554480" cy="475488"/>
           </a:xfrm>
           <a:prstGeom prst="rect">
             <a:avLst>
@@ -28514,8 +30290,8 @@
         </p:nvSpPr>
         <p:spPr>
           <a:xfrm>
-            <a:off x="6428232" y="3364992"/>
-            <a:ext cx="1645920" cy="475488"/>
+            <a:off x="5230368" y="3364992"/>
+            <a:ext cx="1554480" cy="475488"/>
           </a:xfrm>
           <a:prstGeom prst="rect">
             <a:avLst/>
@@ -28539,7 +30315,7 @@
                 <a:ea typeface="Trebuchet MS" pitchFamily="34" charset="-122"/>
                 <a:cs typeface="Trebuchet MS" pitchFamily="34" charset="-120"/>
               </a:rPr>
-              <a:t>tion</a:t>
+              <a:t>ta</a:t>
             </a:r>
             <a:endParaRPr lang="en-US" sz="1400" dirty="0"/>
           </a:p>
@@ -28547,7 +30323,112 @@
       </p:sp>
       <p:sp>
         <p:nvSpPr>
-          <p:cNvPr id="36" name="Shape 34"/>
+          <p:cNvPr id="36" name="Text 34"/>
+          <p:cNvSpPr/>
+          <p:nvPr/>
+        </p:nvSpPr>
+        <p:spPr>
+          <a:xfrm>
+            <a:off x="6784848" y="3364992"/>
+            <a:ext cx="73152" cy="475488"/>
+          </a:xfrm>
+          <a:prstGeom prst="rect">
+            <a:avLst/>
+          </a:prstGeom>
+          <a:noFill/>
+          <a:ln/>
+        </p:spPr>
+        <p:txBody>
+          <a:bodyPr wrap="square" lIns="0" tIns="0" rIns="0" bIns="0" rtlCol="0" anchor="ctr"/>
+          <a:lstStyle/>
+          <a:p>
+            <a:pPr algn="ctr" indent="0" marL="0">
+              <a:buNone/>
+            </a:pPr>
+            <a:r>
+              <a:rPr lang="en-US" sz="1600" b="1" dirty="0">
+                <a:solidFill>
+                  <a:srgbClr val="0D9488"/>
+                </a:solidFill>
+                <a:latin typeface="Trebuchet MS" pitchFamily="34" charset="0"/>
+                <a:ea typeface="Trebuchet MS" pitchFamily="34" charset="-122"/>
+                <a:cs typeface="Trebuchet MS" pitchFamily="34" charset="-120"/>
+              </a:rPr>
+              <a:t>·</a:t>
+            </a:r>
+            <a:endParaRPr lang="en-US" sz="1600" dirty="0"/>
+          </a:p>
+        </p:txBody>
+      </p:sp>
+      <p:sp>
+        <p:nvSpPr>
+          <p:cNvPr id="37" name="Shape 35"/>
+          <p:cNvSpPr/>
+          <p:nvPr/>
+        </p:nvSpPr>
+        <p:spPr>
+          <a:xfrm>
+            <a:off x="6858000" y="3364992"/>
+            <a:ext cx="1554480" cy="475488"/>
+          </a:xfrm>
+          <a:prstGeom prst="rect">
+            <a:avLst>
+              <a:gd name="adj" fmla="val 9615"/>
+            </a:avLst>
+          </a:prstGeom>
+          <a:solidFill>
+            <a:srgbClr val="FFFFFF"/>
+          </a:solidFill>
+          <a:ln w="12700">
+            <a:solidFill>
+              <a:srgbClr val="0D9488"/>
+            </a:solidFill>
+            <a:prstDash val="solid"/>
+          </a:ln>
+        </p:spPr>
+      </p:sp>
+      <p:sp>
+        <p:nvSpPr>
+          <p:cNvPr id="38" name="Text 36"/>
+          <p:cNvSpPr/>
+          <p:nvPr/>
+        </p:nvSpPr>
+        <p:spPr>
+          <a:xfrm>
+            <a:off x="6858000" y="3364992"/>
+            <a:ext cx="1554480" cy="475488"/>
+          </a:xfrm>
+          <a:prstGeom prst="rect">
+            <a:avLst/>
+          </a:prstGeom>
+          <a:noFill/>
+          <a:ln/>
+        </p:spPr>
+        <p:txBody>
+          <a:bodyPr wrap="square" lIns="0" tIns="0" rIns="0" bIns="0" rtlCol="0" anchor="ctr"/>
+          <a:lstStyle/>
+          <a:p>
+            <a:pPr algn="ctr" indent="0" marL="0">
+              <a:buNone/>
+            </a:pPr>
+            <a:r>
+              <a:rPr lang="en-US" sz="1400" b="1" dirty="0">
+                <a:solidFill>
+                  <a:srgbClr val="0D9488"/>
+                </a:solidFill>
+                <a:latin typeface="Trebuchet MS" pitchFamily="34" charset="0"/>
+                <a:ea typeface="Trebuchet MS" pitchFamily="34" charset="-122"/>
+                <a:cs typeface="Trebuchet MS" pitchFamily="34" charset="-120"/>
+              </a:rPr>
+              <a:t>ble</a:t>
+            </a:r>
+            <a:endParaRPr lang="en-US" sz="1400" dirty="0"/>
+          </a:p>
+        </p:txBody>
+      </p:sp>
+      <p:sp>
+        <p:nvSpPr>
+          <p:cNvPr id="39" name="Shape 37"/>
           <p:cNvSpPr/>
           <p:nvPr/>
         </p:nvSpPr>
@@ -28574,7 +30455,7 @@
       </p:sp>
       <p:sp>
         <p:nvSpPr>
-          <p:cNvPr id="37" name="Text 35"/>
+          <p:cNvPr id="40" name="Text 38"/>
           <p:cNvSpPr/>
           <p:nvPr/>
         </p:nvSpPr>
@@ -28613,18 +30494,18 @@
       </p:sp>
       <p:sp>
         <p:nvSpPr>
-          <p:cNvPr id="38" name="Shape 36"/>
+          <p:cNvPr id="41" name="Shape 39"/>
           <p:cNvSpPr/>
           <p:nvPr/>
         </p:nvSpPr>
         <p:spPr>
           <a:xfrm>
             <a:off x="1874520" y="4096512"/>
-            <a:ext cx="6903720" cy="804672"/>
+            <a:ext cx="6903720" cy="658368"/>
           </a:xfrm>
           <a:prstGeom prst="rect">
             <a:avLst>
-              <a:gd name="adj" fmla="val 6818"/>
+              <a:gd name="adj" fmla="val 8333"/>
             </a:avLst>
           </a:prstGeom>
           <a:solidFill>
@@ -28640,18 +30521,18 @@
       </p:sp>
       <p:sp>
         <p:nvSpPr>
-          <p:cNvPr id="39" name="Shape 37"/>
-          <p:cNvSpPr/>
-          <p:nvPr/>
-        </p:nvSpPr>
-        <p:spPr>
-          <a:xfrm>
-            <a:off x="1951330" y="4169664"/>
-            <a:ext cx="676656" cy="384048"/>
+          <p:cNvPr id="42" name="Shape 40"/>
+          <p:cNvSpPr/>
+          <p:nvPr/>
+        </p:nvSpPr>
+        <p:spPr>
+          <a:xfrm>
+            <a:off x="1951828" y="4169664"/>
+            <a:ext cx="603504" cy="475488"/>
           </a:xfrm>
           <a:prstGeom prst="rect">
             <a:avLst>
-              <a:gd name="adj" fmla="val 9524"/>
+              <a:gd name="adj" fmla="val 7692"/>
             </a:avLst>
           </a:prstGeom>
           <a:solidFill>
@@ -28667,14 +30548,14 @@
       </p:sp>
       <p:sp>
         <p:nvSpPr>
-          <p:cNvPr id="40" name="Text 38"/>
-          <p:cNvSpPr/>
-          <p:nvPr/>
-        </p:nvSpPr>
-        <p:spPr>
-          <a:xfrm>
-            <a:off x="1951330" y="4169664"/>
-            <a:ext cx="676656" cy="384048"/>
+          <p:cNvPr id="43" name="Text 41"/>
+          <p:cNvSpPr/>
+          <p:nvPr/>
+        </p:nvSpPr>
+        <p:spPr>
+          <a:xfrm>
+            <a:off x="1951828" y="4169664"/>
+            <a:ext cx="603504" cy="475488"/>
           </a:xfrm>
           <a:prstGeom prst="rect">
             <a:avLst/>
@@ -28706,18 +30587,18 @@
       </p:sp>
       <p:sp>
         <p:nvSpPr>
-          <p:cNvPr id="41" name="Shape 39"/>
-          <p:cNvSpPr/>
-          <p:nvPr/>
-        </p:nvSpPr>
-        <p:spPr>
-          <a:xfrm>
-            <a:off x="2677363" y="4169664"/>
-            <a:ext cx="676656" cy="384048"/>
+          <p:cNvPr id="44" name="Shape 42"/>
+          <p:cNvSpPr/>
+          <p:nvPr/>
+        </p:nvSpPr>
+        <p:spPr>
+          <a:xfrm>
+            <a:off x="2605209" y="4169664"/>
+            <a:ext cx="603504" cy="475488"/>
           </a:xfrm>
           <a:prstGeom prst="rect">
             <a:avLst>
-              <a:gd name="adj" fmla="val 9524"/>
+              <a:gd name="adj" fmla="val 7692"/>
             </a:avLst>
           </a:prstGeom>
           <a:solidFill>
@@ -28733,14 +30614,14 @@
       </p:sp>
       <p:sp>
         <p:nvSpPr>
-          <p:cNvPr id="42" name="Text 40"/>
-          <p:cNvSpPr/>
-          <p:nvPr/>
-        </p:nvSpPr>
-        <p:spPr>
-          <a:xfrm>
-            <a:off x="2677363" y="4169664"/>
-            <a:ext cx="676656" cy="384048"/>
+          <p:cNvPr id="45" name="Text 43"/>
+          <p:cNvSpPr/>
+          <p:nvPr/>
+        </p:nvSpPr>
+        <p:spPr>
+          <a:xfrm>
+            <a:off x="2605209" y="4169664"/>
+            <a:ext cx="603504" cy="475488"/>
           </a:xfrm>
           <a:prstGeom prst="rect">
             <a:avLst/>
@@ -28772,18 +30653,18 @@
       </p:sp>
       <p:sp>
         <p:nvSpPr>
-          <p:cNvPr id="43" name="Shape 41"/>
-          <p:cNvSpPr/>
-          <p:nvPr/>
-        </p:nvSpPr>
-        <p:spPr>
-          <a:xfrm>
-            <a:off x="3403397" y="4169664"/>
-            <a:ext cx="676656" cy="384048"/>
+          <p:cNvPr id="46" name="Shape 44"/>
+          <p:cNvSpPr/>
+          <p:nvPr/>
+        </p:nvSpPr>
+        <p:spPr>
+          <a:xfrm>
+            <a:off x="3258589" y="4169664"/>
+            <a:ext cx="603504" cy="475488"/>
           </a:xfrm>
           <a:prstGeom prst="rect">
             <a:avLst>
-              <a:gd name="adj" fmla="val 9524"/>
+              <a:gd name="adj" fmla="val 7692"/>
             </a:avLst>
           </a:prstGeom>
           <a:solidFill>
@@ -28799,14 +30680,14 @@
       </p:sp>
       <p:sp>
         <p:nvSpPr>
-          <p:cNvPr id="44" name="Text 42"/>
-          <p:cNvSpPr/>
-          <p:nvPr/>
-        </p:nvSpPr>
-        <p:spPr>
-          <a:xfrm>
-            <a:off x="3403397" y="4169664"/>
-            <a:ext cx="676656" cy="384048"/>
+          <p:cNvPr id="47" name="Text 45"/>
+          <p:cNvSpPr/>
+          <p:nvPr/>
+        </p:nvSpPr>
+        <p:spPr>
+          <a:xfrm>
+            <a:off x="3258589" y="4169664"/>
+            <a:ext cx="603504" cy="475488"/>
           </a:xfrm>
           <a:prstGeom prst="rect">
             <a:avLst/>
@@ -28838,18 +30719,18 @@
       </p:sp>
       <p:sp>
         <p:nvSpPr>
-          <p:cNvPr id="45" name="Shape 43"/>
-          <p:cNvSpPr/>
-          <p:nvPr/>
-        </p:nvSpPr>
-        <p:spPr>
-          <a:xfrm>
-            <a:off x="4129430" y="4169664"/>
-            <a:ext cx="676656" cy="384048"/>
+          <p:cNvPr id="48" name="Shape 46"/>
+          <p:cNvSpPr/>
+          <p:nvPr/>
+        </p:nvSpPr>
+        <p:spPr>
+          <a:xfrm>
+            <a:off x="3911969" y="4169664"/>
+            <a:ext cx="603504" cy="475488"/>
           </a:xfrm>
           <a:prstGeom prst="rect">
             <a:avLst>
-              <a:gd name="adj" fmla="val 9524"/>
+              <a:gd name="adj" fmla="val 7692"/>
             </a:avLst>
           </a:prstGeom>
           <a:solidFill>
@@ -28865,14 +30746,14 @@
       </p:sp>
       <p:sp>
         <p:nvSpPr>
-          <p:cNvPr id="46" name="Text 44"/>
-          <p:cNvSpPr/>
-          <p:nvPr/>
-        </p:nvSpPr>
-        <p:spPr>
-          <a:xfrm>
-            <a:off x="4129430" y="4169664"/>
-            <a:ext cx="676656" cy="384048"/>
+          <p:cNvPr id="49" name="Text 47"/>
+          <p:cNvSpPr/>
+          <p:nvPr/>
+        </p:nvSpPr>
+        <p:spPr>
+          <a:xfrm>
+            <a:off x="3911969" y="4169664"/>
+            <a:ext cx="603504" cy="475488"/>
           </a:xfrm>
           <a:prstGeom prst="rect">
             <a:avLst/>
@@ -28904,18 +30785,18 @@
       </p:sp>
       <p:sp>
         <p:nvSpPr>
-          <p:cNvPr id="47" name="Shape 45"/>
-          <p:cNvSpPr/>
-          <p:nvPr/>
-        </p:nvSpPr>
-        <p:spPr>
-          <a:xfrm>
-            <a:off x="4855464" y="4169664"/>
-            <a:ext cx="676656" cy="384048"/>
+          <p:cNvPr id="50" name="Shape 48"/>
+          <p:cNvSpPr/>
+          <p:nvPr/>
+        </p:nvSpPr>
+        <p:spPr>
+          <a:xfrm>
+            <a:off x="4565350" y="4169664"/>
+            <a:ext cx="603504" cy="475488"/>
           </a:xfrm>
           <a:prstGeom prst="rect">
             <a:avLst>
-              <a:gd name="adj" fmla="val 9524"/>
+              <a:gd name="adj" fmla="val 7692"/>
             </a:avLst>
           </a:prstGeom>
           <a:solidFill>
@@ -28931,14 +30812,14 @@
       </p:sp>
       <p:sp>
         <p:nvSpPr>
-          <p:cNvPr id="48" name="Text 46"/>
-          <p:cNvSpPr/>
-          <p:nvPr/>
-        </p:nvSpPr>
-        <p:spPr>
-          <a:xfrm>
-            <a:off x="4855464" y="4169664"/>
-            <a:ext cx="676656" cy="384048"/>
+          <p:cNvPr id="51" name="Text 49"/>
+          <p:cNvSpPr/>
+          <p:nvPr/>
+        </p:nvSpPr>
+        <p:spPr>
+          <a:xfrm>
+            <a:off x="4565350" y="4169664"/>
+            <a:ext cx="603504" cy="475488"/>
           </a:xfrm>
           <a:prstGeom prst="rect">
             <a:avLst/>
@@ -28970,18 +30851,18 @@
       </p:sp>
       <p:sp>
         <p:nvSpPr>
-          <p:cNvPr id="49" name="Shape 47"/>
-          <p:cNvSpPr/>
-          <p:nvPr/>
-        </p:nvSpPr>
-        <p:spPr>
-          <a:xfrm>
-            <a:off x="5581498" y="4169664"/>
-            <a:ext cx="676656" cy="384048"/>
+          <p:cNvPr id="52" name="Shape 50"/>
+          <p:cNvSpPr/>
+          <p:nvPr/>
+        </p:nvSpPr>
+        <p:spPr>
+          <a:xfrm>
+            <a:off x="5218730" y="4169664"/>
+            <a:ext cx="603504" cy="475488"/>
           </a:xfrm>
           <a:prstGeom prst="rect">
             <a:avLst>
-              <a:gd name="adj" fmla="val 9524"/>
+              <a:gd name="adj" fmla="val 7692"/>
             </a:avLst>
           </a:prstGeom>
           <a:solidFill>
@@ -28997,14 +30878,14 @@
       </p:sp>
       <p:sp>
         <p:nvSpPr>
-          <p:cNvPr id="50" name="Text 48"/>
-          <p:cNvSpPr/>
-          <p:nvPr/>
-        </p:nvSpPr>
-        <p:spPr>
-          <a:xfrm>
-            <a:off x="5581498" y="4169664"/>
-            <a:ext cx="676656" cy="384048"/>
+          <p:cNvPr id="53" name="Text 51"/>
+          <p:cNvSpPr/>
+          <p:nvPr/>
+        </p:nvSpPr>
+        <p:spPr>
+          <a:xfrm>
+            <a:off x="5218730" y="4169664"/>
+            <a:ext cx="603504" cy="475488"/>
           </a:xfrm>
           <a:prstGeom prst="rect">
             <a:avLst/>
@@ -29036,18 +30917,18 @@
       </p:sp>
       <p:sp>
         <p:nvSpPr>
-          <p:cNvPr id="51" name="Shape 49"/>
-          <p:cNvSpPr/>
-          <p:nvPr/>
-        </p:nvSpPr>
-        <p:spPr>
-          <a:xfrm>
-            <a:off x="6307531" y="4169664"/>
-            <a:ext cx="676656" cy="384048"/>
+          <p:cNvPr id="54" name="Shape 52"/>
+          <p:cNvSpPr/>
+          <p:nvPr/>
+        </p:nvSpPr>
+        <p:spPr>
+          <a:xfrm>
+            <a:off x="5872111" y="4169664"/>
+            <a:ext cx="603504" cy="475488"/>
           </a:xfrm>
           <a:prstGeom prst="rect">
             <a:avLst>
-              <a:gd name="adj" fmla="val 9524"/>
+              <a:gd name="adj" fmla="val 7692"/>
             </a:avLst>
           </a:prstGeom>
           <a:solidFill>
@@ -29063,14 +30944,14 @@
       </p:sp>
       <p:sp>
         <p:nvSpPr>
-          <p:cNvPr id="52" name="Text 50"/>
-          <p:cNvSpPr/>
-          <p:nvPr/>
-        </p:nvSpPr>
-        <p:spPr>
-          <a:xfrm>
-            <a:off x="6307531" y="4169664"/>
-            <a:ext cx="676656" cy="384048"/>
+          <p:cNvPr id="55" name="Text 53"/>
+          <p:cNvSpPr/>
+          <p:nvPr/>
+        </p:nvSpPr>
+        <p:spPr>
+          <a:xfrm>
+            <a:off x="5872111" y="4169664"/>
+            <a:ext cx="603504" cy="475488"/>
           </a:xfrm>
           <a:prstGeom prst="rect">
             <a:avLst/>
@@ -29102,57 +30983,18 @@
       </p:sp>
       <p:sp>
         <p:nvSpPr>
-          <p:cNvPr id="53" name="Text 51"/>
-          <p:cNvSpPr/>
-          <p:nvPr/>
-        </p:nvSpPr>
-        <p:spPr>
-          <a:xfrm>
-            <a:off x="6307531" y="4572000"/>
-            <a:ext cx="676656" cy="219456"/>
-          </a:xfrm>
-          <a:prstGeom prst="rect">
-            <a:avLst/>
-          </a:prstGeom>
-          <a:noFill/>
-          <a:ln/>
-        </p:spPr>
-        <p:txBody>
-          <a:bodyPr wrap="square" lIns="0" tIns="0" rIns="0" bIns="0" rtlCol="0" anchor="t"/>
-          <a:lstStyle/>
-          <a:p>
-            <a:pPr algn="ctr" indent="0" marL="0">
-              <a:buNone/>
-            </a:pPr>
-            <a:r>
-              <a:rPr lang="en-US" sz="750" i="1" dirty="0">
-                <a:solidFill>
-                  <a:srgbClr val="94A3B8"/>
-                </a:solidFill>
-                <a:latin typeface="Calibri" pitchFamily="34" charset="0"/>
-                <a:ea typeface="Calibri" pitchFamily="34" charset="-122"/>
-                <a:cs typeface="Calibri" pitchFamily="34" charset="-120"/>
-              </a:rPr>
-              <a:t>/sh/</a:t>
-            </a:r>
-            <a:endParaRPr lang="en-US" sz="750" dirty="0"/>
-          </a:p>
-        </p:txBody>
-      </p:sp>
-      <p:sp>
-        <p:nvSpPr>
-          <p:cNvPr id="54" name="Shape 52"/>
-          <p:cNvSpPr/>
-          <p:nvPr/>
-        </p:nvSpPr>
-        <p:spPr>
-          <a:xfrm>
-            <a:off x="7033565" y="4169664"/>
-            <a:ext cx="676656" cy="384048"/>
+          <p:cNvPr id="56" name="Shape 54"/>
+          <p:cNvSpPr/>
+          <p:nvPr/>
+        </p:nvSpPr>
+        <p:spPr>
+          <a:xfrm>
+            <a:off x="6525491" y="4169664"/>
+            <a:ext cx="603504" cy="475488"/>
           </a:xfrm>
           <a:prstGeom prst="rect">
             <a:avLst>
-              <a:gd name="adj" fmla="val 9524"/>
+              <a:gd name="adj" fmla="val 7692"/>
             </a:avLst>
           </a:prstGeom>
           <a:solidFill>
@@ -29168,14 +31010,14 @@
       </p:sp>
       <p:sp>
         <p:nvSpPr>
-          <p:cNvPr id="55" name="Text 53"/>
-          <p:cNvSpPr/>
-          <p:nvPr/>
-        </p:nvSpPr>
-        <p:spPr>
-          <a:xfrm>
-            <a:off x="7033565" y="4169664"/>
-            <a:ext cx="676656" cy="384048"/>
+          <p:cNvPr id="57" name="Text 55"/>
+          <p:cNvSpPr/>
+          <p:nvPr/>
+        </p:nvSpPr>
+        <p:spPr>
+          <a:xfrm>
+            <a:off x="6525491" y="4169664"/>
+            <a:ext cx="603504" cy="475488"/>
           </a:xfrm>
           <a:prstGeom prst="rect">
             <a:avLst/>
@@ -29199,7 +31041,7 @@
                 <a:ea typeface="Trebuchet MS" pitchFamily="34" charset="-122"/>
                 <a:cs typeface="Trebuchet MS" pitchFamily="34" charset="-120"/>
               </a:rPr>
-              <a:t>io</a:t>
+              <a:t>a</a:t>
             </a:r>
             <a:endParaRPr lang="en-US" sz="900" dirty="0"/>
           </a:p>
@@ -29207,18 +31049,18 @@
       </p:sp>
       <p:sp>
         <p:nvSpPr>
-          <p:cNvPr id="56" name="Shape 54"/>
-          <p:cNvSpPr/>
-          <p:nvPr/>
-        </p:nvSpPr>
-        <p:spPr>
-          <a:xfrm>
-            <a:off x="7759598" y="4169664"/>
-            <a:ext cx="676656" cy="384048"/>
+          <p:cNvPr id="58" name="Shape 56"/>
+          <p:cNvSpPr/>
+          <p:nvPr/>
+        </p:nvSpPr>
+        <p:spPr>
+          <a:xfrm>
+            <a:off x="7178871" y="4169664"/>
+            <a:ext cx="603504" cy="475488"/>
           </a:xfrm>
           <a:prstGeom prst="rect">
             <a:avLst>
-              <a:gd name="adj" fmla="val 9524"/>
+              <a:gd name="adj" fmla="val 7692"/>
             </a:avLst>
           </a:prstGeom>
           <a:solidFill>
@@ -29234,14 +31076,14 @@
       </p:sp>
       <p:sp>
         <p:nvSpPr>
-          <p:cNvPr id="57" name="Text 55"/>
-          <p:cNvSpPr/>
-          <p:nvPr/>
-        </p:nvSpPr>
-        <p:spPr>
-          <a:xfrm>
-            <a:off x="7759598" y="4169664"/>
-            <a:ext cx="676656" cy="384048"/>
+          <p:cNvPr id="59" name="Text 57"/>
+          <p:cNvSpPr/>
+          <p:nvPr/>
+        </p:nvSpPr>
+        <p:spPr>
+          <a:xfrm>
+            <a:off x="7178871" y="4169664"/>
+            <a:ext cx="603504" cy="475488"/>
           </a:xfrm>
           <a:prstGeom prst="rect">
             <a:avLst/>
@@ -29265,7 +31107,73 @@
                 <a:ea typeface="Trebuchet MS" pitchFamily="34" charset="-122"/>
                 <a:cs typeface="Trebuchet MS" pitchFamily="34" charset="-120"/>
               </a:rPr>
-              <a:t>n</a:t>
+              <a:t>b</a:t>
+            </a:r>
+            <a:endParaRPr lang="en-US" sz="900" dirty="0"/>
+          </a:p>
+        </p:txBody>
+      </p:sp>
+      <p:sp>
+        <p:nvSpPr>
+          <p:cNvPr id="60" name="Shape 58"/>
+          <p:cNvSpPr/>
+          <p:nvPr/>
+        </p:nvSpPr>
+        <p:spPr>
+          <a:xfrm>
+            <a:off x="7832252" y="4169664"/>
+            <a:ext cx="603504" cy="475488"/>
+          </a:xfrm>
+          <a:prstGeom prst="rect">
+            <a:avLst>
+              <a:gd name="adj" fmla="val 7692"/>
+            </a:avLst>
+          </a:prstGeom>
+          <a:solidFill>
+            <a:srgbClr val="FFFFFF"/>
+          </a:solidFill>
+          <a:ln w="12700">
+            <a:solidFill>
+              <a:srgbClr val="DB2777"/>
+            </a:solidFill>
+            <a:prstDash val="solid"/>
+          </a:ln>
+        </p:spPr>
+      </p:sp>
+      <p:sp>
+        <p:nvSpPr>
+          <p:cNvPr id="61" name="Text 59"/>
+          <p:cNvSpPr/>
+          <p:nvPr/>
+        </p:nvSpPr>
+        <p:spPr>
+          <a:xfrm>
+            <a:off x="7832252" y="4169664"/>
+            <a:ext cx="603504" cy="475488"/>
+          </a:xfrm>
+          <a:prstGeom prst="rect">
+            <a:avLst/>
+          </a:prstGeom>
+          <a:noFill/>
+          <a:ln/>
+        </p:spPr>
+        <p:txBody>
+          <a:bodyPr wrap="square" lIns="0" tIns="0" rIns="0" bIns="0" rtlCol="0" anchor="ctr"/>
+          <a:lstStyle/>
+          <a:p>
+            <a:pPr algn="ctr" indent="0" marL="0">
+              <a:buNone/>
+            </a:pPr>
+            <a:r>
+              <a:rPr lang="en-US" sz="900" b="1" dirty="0">
+                <a:solidFill>
+                  <a:srgbClr val="9D174D"/>
+                </a:solidFill>
+                <a:latin typeface="Trebuchet MS" pitchFamily="34" charset="0"/>
+                <a:ea typeface="Trebuchet MS" pitchFamily="34" charset="-122"/>
+                <a:cs typeface="Trebuchet MS" pitchFamily="34" charset="-120"/>
+              </a:rPr>
+              <a:t>le</a:t>
             </a:r>
             <a:endParaRPr lang="en-US" sz="900" dirty="0"/>
           </a:p>
@@ -29696,7 +31604,7 @@
                 <a:ea typeface="Trebuchet MS" pitchFamily="34" charset="-122"/>
                 <a:cs typeface="Trebuchet MS" pitchFamily="34" charset="-120"/>
               </a:rPr>
-              <a:t>preventable</a:t>
+              <a:t>preventive</a:t>
             </a:r>
             <a:endParaRPr lang="en-US" sz="2800" dirty="0"/>
           </a:p>
@@ -30523,7 +32431,7 @@
                 <a:ea typeface="Trebuchet MS" pitchFamily="34" charset="-122"/>
                 <a:cs typeface="Trebuchet MS" pitchFamily="34" charset="-120"/>
               </a:rPr>
-              <a:t>preventable</a:t>
+              <a:t>preventive</a:t>
             </a:r>
             <a:endParaRPr lang="en-US" sz="2800" dirty="0"/>
           </a:p>
@@ -30886,7 +32794,7 @@
                 <a:ea typeface="Trebuchet MS" pitchFamily="34" charset="-122"/>
                 <a:cs typeface="Trebuchet MS" pitchFamily="34" charset="-120"/>
               </a:rPr>
-              <a:t>able</a:t>
+              <a:t>ive</a:t>
             </a:r>
             <a:endParaRPr lang="en-US" sz="1300" dirty="0"/>
           </a:p>
@@ -30925,7 +32833,7 @@
                 <a:ea typeface="Calibri" pitchFamily="34" charset="-122"/>
                 <a:cs typeface="Calibri" pitchFamily="34" charset="-120"/>
               </a:rPr>
-              <a:t>capable of being</a:t>
+              <a:t>having the quality of</a:t>
             </a:r>
             <a:endParaRPr lang="en-US" sz="850" dirty="0"/>
           </a:p>
@@ -31620,7 +33528,7 @@
                 <a:ea typeface="Trebuchet MS" pitchFamily="34" charset="-122"/>
                 <a:cs typeface="Trebuchet MS" pitchFamily="34" charset="-120"/>
               </a:rPr>
-              <a:t>preventable</a:t>
+              <a:t>preventive</a:t>
             </a:r>
             <a:endParaRPr lang="en-US" sz="2800" dirty="0"/>
           </a:p>
@@ -31983,7 +33891,7 @@
                 <a:ea typeface="Trebuchet MS" pitchFamily="34" charset="-122"/>
                 <a:cs typeface="Trebuchet MS" pitchFamily="34" charset="-120"/>
               </a:rPr>
-              <a:t>able</a:t>
+              <a:t>ive</a:t>
             </a:r>
             <a:endParaRPr lang="en-US" sz="1300" dirty="0"/>
           </a:p>
@@ -32022,7 +33930,7 @@
                 <a:ea typeface="Calibri" pitchFamily="34" charset="-122"/>
                 <a:cs typeface="Calibri" pitchFamily="34" charset="-120"/>
               </a:rPr>
-              <a:t>capable of being</a:t>
+              <a:t>having the quality of</a:t>
             </a:r>
             <a:endParaRPr lang="en-US" sz="850" dirty="0"/>
           </a:p>
@@ -32129,8 +34037,8 @@
         </p:nvSpPr>
         <p:spPr>
           <a:xfrm>
-            <a:off x="1975104" y="3364992"/>
-            <a:ext cx="1554480" cy="475488"/>
+            <a:off x="2313432" y="3364992"/>
+            <a:ext cx="1645920" cy="475488"/>
           </a:xfrm>
           <a:prstGeom prst="rect">
             <a:avLst>
@@ -32156,8 +34064,8 @@
         </p:nvSpPr>
         <p:spPr>
           <a:xfrm>
-            <a:off x="1975104" y="3364992"/>
-            <a:ext cx="1554480" cy="475488"/>
+            <a:off x="2313432" y="3364992"/>
+            <a:ext cx="1645920" cy="475488"/>
           </a:xfrm>
           <a:prstGeom prst="rect">
             <a:avLst/>
@@ -32195,8 +34103,8 @@
         </p:nvSpPr>
         <p:spPr>
           <a:xfrm>
-            <a:off x="3529584" y="3364992"/>
-            <a:ext cx="73152" cy="475488"/>
+            <a:off x="3959352" y="3364992"/>
+            <a:ext cx="411480" cy="475488"/>
           </a:xfrm>
           <a:prstGeom prst="rect">
             <a:avLst/>
@@ -32234,8 +34142,8 @@
         </p:nvSpPr>
         <p:spPr>
           <a:xfrm>
-            <a:off x="3602736" y="3364992"/>
-            <a:ext cx="1554480" cy="475488"/>
+            <a:off x="4370832" y="3364992"/>
+            <a:ext cx="1645920" cy="475488"/>
           </a:xfrm>
           <a:prstGeom prst="rect">
             <a:avLst>
@@ -32261,8 +34169,8 @@
         </p:nvSpPr>
         <p:spPr>
           <a:xfrm>
-            <a:off x="3602736" y="3364992"/>
-            <a:ext cx="1554480" cy="475488"/>
+            <a:off x="4370832" y="3364992"/>
+            <a:ext cx="1645920" cy="475488"/>
           </a:xfrm>
           <a:prstGeom prst="rect">
             <a:avLst/>
@@ -32300,8 +34208,8 @@
         </p:nvSpPr>
         <p:spPr>
           <a:xfrm>
-            <a:off x="5157216" y="3364992"/>
-            <a:ext cx="73152" cy="475488"/>
+            <a:off x="6016752" y="3364992"/>
+            <a:ext cx="411480" cy="475488"/>
           </a:xfrm>
           <a:prstGeom prst="rect">
             <a:avLst/>
@@ -32339,8 +34247,8 @@
         </p:nvSpPr>
         <p:spPr>
           <a:xfrm>
-            <a:off x="5230368" y="3364992"/>
-            <a:ext cx="1554480" cy="475488"/>
+            <a:off x="6428232" y="3364992"/>
+            <a:ext cx="1645920" cy="475488"/>
           </a:xfrm>
           <a:prstGeom prst="rect">
             <a:avLst>
@@ -32366,8 +34274,8 @@
         </p:nvSpPr>
         <p:spPr>
           <a:xfrm>
-            <a:off x="5230368" y="3364992"/>
-            <a:ext cx="1554480" cy="475488"/>
+            <a:off x="6428232" y="3364992"/>
+            <a:ext cx="1645920" cy="475488"/>
           </a:xfrm>
           <a:prstGeom prst="rect">
             <a:avLst/>
@@ -32391,7 +34299,7 @@
                 <a:ea typeface="Trebuchet MS" pitchFamily="34" charset="-122"/>
                 <a:cs typeface="Trebuchet MS" pitchFamily="34" charset="-120"/>
               </a:rPr>
-              <a:t>ta</a:t>
+              <a:t>tive</a:t>
             </a:r>
             <a:endParaRPr lang="en-US" sz="1400" dirty="0"/>
           </a:p>
@@ -32399,119 +34307,80 @@
       </p:sp>
       <p:sp>
         <p:nvSpPr>
-          <p:cNvPr id="36" name="Text 34"/>
-          <p:cNvSpPr/>
-          <p:nvPr/>
-        </p:nvSpPr>
-        <p:spPr>
-          <a:xfrm>
-            <a:off x="6784848" y="3364992"/>
-            <a:ext cx="73152" cy="475488"/>
-          </a:xfrm>
-          <a:prstGeom prst="rect">
-            <a:avLst/>
-          </a:prstGeom>
-          <a:noFill/>
-          <a:ln/>
-        </p:spPr>
-        <p:txBody>
-          <a:bodyPr wrap="square" lIns="0" tIns="0" rIns="0" bIns="0" rtlCol="0" anchor="ctr"/>
-          <a:lstStyle/>
-          <a:p>
-            <a:pPr algn="ctr" indent="0" marL="0">
-              <a:buNone/>
-            </a:pPr>
-            <a:r>
-              <a:rPr lang="en-US" sz="1600" b="1" dirty="0">
-                <a:solidFill>
-                  <a:srgbClr val="0D9488"/>
+          <p:cNvPr id="36" name="Shape 34"/>
+          <p:cNvSpPr/>
+          <p:nvPr/>
+        </p:nvSpPr>
+        <p:spPr>
+          <a:xfrm>
+            <a:off x="365760" y="4096512"/>
+            <a:ext cx="1371600" cy="804672"/>
+          </a:xfrm>
+          <a:prstGeom prst="rect">
+            <a:avLst>
+              <a:gd name="adj" fmla="val 6818"/>
+            </a:avLst>
+          </a:prstGeom>
+          <a:solidFill>
+            <a:srgbClr val="E2E8F0"/>
+          </a:solidFill>
+          <a:ln w="12700">
+            <a:solidFill>
+              <a:srgbClr val="E2E8F0"/>
+            </a:solidFill>
+            <a:prstDash val="solid"/>
+          </a:ln>
+        </p:spPr>
+      </p:sp>
+      <p:sp>
+        <p:nvSpPr>
+          <p:cNvPr id="37" name="Text 35"/>
+          <p:cNvSpPr/>
+          <p:nvPr/>
+        </p:nvSpPr>
+        <p:spPr>
+          <a:xfrm>
+            <a:off x="365760" y="4096512"/>
+            <a:ext cx="1371600" cy="804672"/>
+          </a:xfrm>
+          <a:prstGeom prst="rect">
+            <a:avLst/>
+          </a:prstGeom>
+          <a:noFill/>
+          <a:ln/>
+        </p:spPr>
+        <p:txBody>
+          <a:bodyPr wrap="square" lIns="0" tIns="0" rIns="0" bIns="0" rtlCol="0" anchor="ctr"/>
+          <a:lstStyle/>
+          <a:p>
+            <a:pPr algn="ctr" indent="0" marL="0">
+              <a:buNone/>
+            </a:pPr>
+            <a:r>
+              <a:rPr lang="en-US" sz="1100" b="1" dirty="0">
+                <a:solidFill>
+                  <a:srgbClr val="475569"/>
                 </a:solidFill>
                 <a:latin typeface="Trebuchet MS" pitchFamily="34" charset="0"/>
                 <a:ea typeface="Trebuchet MS" pitchFamily="34" charset="-122"/>
                 <a:cs typeface="Trebuchet MS" pitchFamily="34" charset="-120"/>
               </a:rPr>
-              <a:t>·</a:t>
-            </a:r>
-            <a:endParaRPr lang="en-US" sz="1600" dirty="0"/>
-          </a:p>
-        </p:txBody>
-      </p:sp>
-      <p:sp>
-        <p:nvSpPr>
-          <p:cNvPr id="37" name="Shape 35"/>
-          <p:cNvSpPr/>
-          <p:nvPr/>
-        </p:nvSpPr>
-        <p:spPr>
-          <a:xfrm>
-            <a:off x="6858000" y="3364992"/>
-            <a:ext cx="1554480" cy="475488"/>
-          </a:xfrm>
-          <a:prstGeom prst="rect">
-            <a:avLst>
-              <a:gd name="adj" fmla="val 9615"/>
-            </a:avLst>
-          </a:prstGeom>
-          <a:solidFill>
-            <a:srgbClr val="FFFFFF"/>
-          </a:solidFill>
-          <a:ln w="12700">
-            <a:solidFill>
-              <a:srgbClr val="0D9488"/>
-            </a:solidFill>
-            <a:prstDash val="solid"/>
-          </a:ln>
-        </p:spPr>
-      </p:sp>
-      <p:sp>
-        <p:nvSpPr>
-          <p:cNvPr id="38" name="Text 36"/>
-          <p:cNvSpPr/>
-          <p:nvPr/>
-        </p:nvSpPr>
-        <p:spPr>
-          <a:xfrm>
-            <a:off x="6858000" y="3364992"/>
-            <a:ext cx="1554480" cy="475488"/>
-          </a:xfrm>
-          <a:prstGeom prst="rect">
-            <a:avLst/>
-          </a:prstGeom>
-          <a:noFill/>
-          <a:ln/>
-        </p:spPr>
-        <p:txBody>
-          <a:bodyPr wrap="square" lIns="0" tIns="0" rIns="0" bIns="0" rtlCol="0" anchor="ctr"/>
-          <a:lstStyle/>
-          <a:p>
-            <a:pPr algn="ctr" indent="0" marL="0">
-              <a:buNone/>
-            </a:pPr>
-            <a:r>
-              <a:rPr lang="en-US" sz="1400" b="1" dirty="0">
-                <a:solidFill>
-                  <a:srgbClr val="0D9488"/>
-                </a:solidFill>
-                <a:latin typeface="Trebuchet MS" pitchFamily="34" charset="0"/>
-                <a:ea typeface="Trebuchet MS" pitchFamily="34" charset="-122"/>
-                <a:cs typeface="Trebuchet MS" pitchFamily="34" charset="-120"/>
-              </a:rPr>
-              <a:t>ble</a:t>
-            </a:r>
-            <a:endParaRPr lang="en-US" sz="1400" dirty="0"/>
-          </a:p>
-        </p:txBody>
-      </p:sp>
-      <p:sp>
-        <p:nvSpPr>
-          <p:cNvPr id="39" name="Shape 37"/>
-          <p:cNvSpPr/>
-          <p:nvPr/>
-        </p:nvSpPr>
-        <p:spPr>
-          <a:xfrm>
-            <a:off x="365760" y="4096512"/>
-            <a:ext cx="1371600" cy="804672"/>
+              <a:t>Phonemes</a:t>
+            </a:r>
+            <a:endParaRPr lang="en-US" sz="1100" dirty="0"/>
+          </a:p>
+        </p:txBody>
+      </p:sp>
+      <p:sp>
+        <p:nvSpPr>
+          <p:cNvPr id="38" name="Shape 36"/>
+          <p:cNvSpPr/>
+          <p:nvPr/>
+        </p:nvSpPr>
+        <p:spPr>
+          <a:xfrm>
+            <a:off x="1874520" y="4096512"/>
+            <a:ext cx="6903720" cy="804672"/>
           </a:xfrm>
           <a:prstGeom prst="rect">
             <a:avLst>
@@ -32519,85 +34388,19 @@
             </a:avLst>
           </a:prstGeom>
           <a:solidFill>
-            <a:srgbClr val="E2E8F0"/>
+            <a:srgbClr val="F8FAFC"/>
           </a:solidFill>
           <a:ln w="12700">
             <a:solidFill>
               <a:srgbClr val="E2E8F0"/>
             </a:solidFill>
-            <a:prstDash val="solid"/>
-          </a:ln>
-        </p:spPr>
-      </p:sp>
-      <p:sp>
-        <p:nvSpPr>
-          <p:cNvPr id="40" name="Text 38"/>
-          <p:cNvSpPr/>
-          <p:nvPr/>
-        </p:nvSpPr>
-        <p:spPr>
-          <a:xfrm>
-            <a:off x="365760" y="4096512"/>
-            <a:ext cx="1371600" cy="804672"/>
-          </a:xfrm>
-          <a:prstGeom prst="rect">
-            <a:avLst/>
-          </a:prstGeom>
-          <a:noFill/>
-          <a:ln/>
-        </p:spPr>
-        <p:txBody>
-          <a:bodyPr wrap="square" lIns="0" tIns="0" rIns="0" bIns="0" rtlCol="0" anchor="ctr"/>
-          <a:lstStyle/>
-          <a:p>
-            <a:pPr algn="ctr" indent="0" marL="0">
-              <a:buNone/>
-            </a:pPr>
-            <a:r>
-              <a:rPr lang="en-US" sz="1100" b="1" dirty="0">
-                <a:solidFill>
-                  <a:srgbClr val="475569"/>
-                </a:solidFill>
-                <a:latin typeface="Trebuchet MS" pitchFamily="34" charset="0"/>
-                <a:ea typeface="Trebuchet MS" pitchFamily="34" charset="-122"/>
-                <a:cs typeface="Trebuchet MS" pitchFamily="34" charset="-120"/>
-              </a:rPr>
-              <a:t>Phonemes</a:t>
-            </a:r>
-            <a:endParaRPr lang="en-US" sz="1100" dirty="0"/>
-          </a:p>
-        </p:txBody>
-      </p:sp>
-      <p:sp>
-        <p:nvSpPr>
-          <p:cNvPr id="41" name="Shape 39"/>
-          <p:cNvSpPr/>
-          <p:nvPr/>
-        </p:nvSpPr>
-        <p:spPr>
-          <a:xfrm>
-            <a:off x="1874520" y="4096512"/>
-            <a:ext cx="6903720" cy="804672"/>
-          </a:xfrm>
-          <a:prstGeom prst="rect">
-            <a:avLst>
-              <a:gd name="adj" fmla="val 6818"/>
-            </a:avLst>
-          </a:prstGeom>
-          <a:solidFill>
-            <a:srgbClr val="F8FAFC"/>
-          </a:solidFill>
-          <a:ln w="12700">
-            <a:solidFill>
-              <a:srgbClr val="E2E8F0"/>
-            </a:solidFill>
             <a:prstDash val="dash"/>
           </a:ln>
         </p:spPr>
       </p:sp>
       <p:sp>
         <p:nvSpPr>
-          <p:cNvPr id="42" name="Text 40"/>
+          <p:cNvPr id="39" name="Text 37"/>
           <p:cNvSpPr/>
           <p:nvPr/>
         </p:nvSpPr>
@@ -33059,7 +34862,7 @@
                 <a:ea typeface="Trebuchet MS" pitchFamily="34" charset="-122"/>
                 <a:cs typeface="Trebuchet MS" pitchFamily="34" charset="-120"/>
               </a:rPr>
-              <a:t>preventable</a:t>
+              <a:t>preventive</a:t>
             </a:r>
             <a:endParaRPr lang="en-US" sz="2800" dirty="0"/>
           </a:p>
@@ -33422,7 +35225,7 @@
                 <a:ea typeface="Trebuchet MS" pitchFamily="34" charset="-122"/>
                 <a:cs typeface="Trebuchet MS" pitchFamily="34" charset="-120"/>
               </a:rPr>
-              <a:t>able</a:t>
+              <a:t>ive</a:t>
             </a:r>
             <a:endParaRPr lang="en-US" sz="1300" dirty="0"/>
           </a:p>
@@ -33461,7 +35264,7 @@
                 <a:ea typeface="Calibri" pitchFamily="34" charset="-122"/>
                 <a:cs typeface="Calibri" pitchFamily="34" charset="-120"/>
               </a:rPr>
-              <a:t>capable of being</a:t>
+              <a:t>having the quality of</a:t>
             </a:r>
             <a:endParaRPr lang="en-US" sz="850" dirty="0"/>
           </a:p>
@@ -33568,8 +35371,8 @@
         </p:nvSpPr>
         <p:spPr>
           <a:xfrm>
-            <a:off x="1975104" y="3364992"/>
-            <a:ext cx="1554480" cy="475488"/>
+            <a:off x="2313432" y="3364992"/>
+            <a:ext cx="1645920" cy="475488"/>
           </a:xfrm>
           <a:prstGeom prst="rect">
             <a:avLst>
@@ -33595,8 +35398,8 @@
         </p:nvSpPr>
         <p:spPr>
           <a:xfrm>
-            <a:off x="1975104" y="3364992"/>
-            <a:ext cx="1554480" cy="475488"/>
+            <a:off x="2313432" y="3364992"/>
+            <a:ext cx="1645920" cy="475488"/>
           </a:xfrm>
           <a:prstGeom prst="rect">
             <a:avLst/>
@@ -33634,8 +35437,8 @@
         </p:nvSpPr>
         <p:spPr>
           <a:xfrm>
-            <a:off x="3529584" y="3364992"/>
-            <a:ext cx="73152" cy="475488"/>
+            <a:off x="3959352" y="3364992"/>
+            <a:ext cx="411480" cy="475488"/>
           </a:xfrm>
           <a:prstGeom prst="rect">
             <a:avLst/>
@@ -33673,8 +35476,8 @@
         </p:nvSpPr>
         <p:spPr>
           <a:xfrm>
-            <a:off x="3602736" y="3364992"/>
-            <a:ext cx="1554480" cy="475488"/>
+            <a:off x="4370832" y="3364992"/>
+            <a:ext cx="1645920" cy="475488"/>
           </a:xfrm>
           <a:prstGeom prst="rect">
             <a:avLst>
@@ -33700,8 +35503,8 @@
         </p:nvSpPr>
         <p:spPr>
           <a:xfrm>
-            <a:off x="3602736" y="3364992"/>
-            <a:ext cx="1554480" cy="475488"/>
+            <a:off x="4370832" y="3364992"/>
+            <a:ext cx="1645920" cy="475488"/>
           </a:xfrm>
           <a:prstGeom prst="rect">
             <a:avLst/>
@@ -33739,8 +35542,8 @@
         </p:nvSpPr>
         <p:spPr>
           <a:xfrm>
-            <a:off x="5157216" y="3364992"/>
-            <a:ext cx="73152" cy="475488"/>
+            <a:off x="6016752" y="3364992"/>
+            <a:ext cx="411480" cy="475488"/>
           </a:xfrm>
           <a:prstGeom prst="rect">
             <a:avLst/>
@@ -33778,8 +35581,8 @@
         </p:nvSpPr>
         <p:spPr>
           <a:xfrm>
-            <a:off x="5230368" y="3364992"/>
-            <a:ext cx="1554480" cy="475488"/>
+            <a:off x="6428232" y="3364992"/>
+            <a:ext cx="1645920" cy="475488"/>
           </a:xfrm>
           <a:prstGeom prst="rect">
             <a:avLst>
@@ -33805,8 +35608,8 @@
         </p:nvSpPr>
         <p:spPr>
           <a:xfrm>
-            <a:off x="5230368" y="3364992"/>
-            <a:ext cx="1554480" cy="475488"/>
+            <a:off x="6428232" y="3364992"/>
+            <a:ext cx="1645920" cy="475488"/>
           </a:xfrm>
           <a:prstGeom prst="rect">
             <a:avLst/>
@@ -33830,7 +35633,7 @@
                 <a:ea typeface="Trebuchet MS" pitchFamily="34" charset="-122"/>
                 <a:cs typeface="Trebuchet MS" pitchFamily="34" charset="-120"/>
               </a:rPr>
-              <a:t>ta</a:t>
+              <a:t>tive</a:t>
             </a:r>
             <a:endParaRPr lang="en-US" sz="1400" dirty="0"/>
           </a:p>
@@ -33838,193 +35641,247 @@
       </p:sp>
       <p:sp>
         <p:nvSpPr>
-          <p:cNvPr id="36" name="Text 34"/>
-          <p:cNvSpPr/>
-          <p:nvPr/>
-        </p:nvSpPr>
-        <p:spPr>
-          <a:xfrm>
-            <a:off x="6784848" y="3364992"/>
-            <a:ext cx="73152" cy="475488"/>
-          </a:xfrm>
-          <a:prstGeom prst="rect">
-            <a:avLst/>
-          </a:prstGeom>
-          <a:noFill/>
-          <a:ln/>
-        </p:spPr>
-        <p:txBody>
-          <a:bodyPr wrap="square" lIns="0" tIns="0" rIns="0" bIns="0" rtlCol="0" anchor="ctr"/>
-          <a:lstStyle/>
-          <a:p>
-            <a:pPr algn="ctr" indent="0" marL="0">
-              <a:buNone/>
-            </a:pPr>
-            <a:r>
-              <a:rPr lang="en-US" sz="1600" b="1" dirty="0">
-                <a:solidFill>
-                  <a:srgbClr val="0D9488"/>
+          <p:cNvPr id="36" name="Shape 34"/>
+          <p:cNvSpPr/>
+          <p:nvPr/>
+        </p:nvSpPr>
+        <p:spPr>
+          <a:xfrm>
+            <a:off x="365760" y="4096512"/>
+            <a:ext cx="1371600" cy="804672"/>
+          </a:xfrm>
+          <a:prstGeom prst="rect">
+            <a:avLst>
+              <a:gd name="adj" fmla="val 6818"/>
+            </a:avLst>
+          </a:prstGeom>
+          <a:solidFill>
+            <a:srgbClr val="E2E8F0"/>
+          </a:solidFill>
+          <a:ln w="12700">
+            <a:solidFill>
+              <a:srgbClr val="E2E8F0"/>
+            </a:solidFill>
+            <a:prstDash val="solid"/>
+          </a:ln>
+        </p:spPr>
+      </p:sp>
+      <p:sp>
+        <p:nvSpPr>
+          <p:cNvPr id="37" name="Text 35"/>
+          <p:cNvSpPr/>
+          <p:nvPr/>
+        </p:nvSpPr>
+        <p:spPr>
+          <a:xfrm>
+            <a:off x="365760" y="4096512"/>
+            <a:ext cx="1371600" cy="804672"/>
+          </a:xfrm>
+          <a:prstGeom prst="rect">
+            <a:avLst/>
+          </a:prstGeom>
+          <a:noFill/>
+          <a:ln/>
+        </p:spPr>
+        <p:txBody>
+          <a:bodyPr wrap="square" lIns="0" tIns="0" rIns="0" bIns="0" rtlCol="0" anchor="ctr"/>
+          <a:lstStyle/>
+          <a:p>
+            <a:pPr algn="ctr" indent="0" marL="0">
+              <a:buNone/>
+            </a:pPr>
+            <a:r>
+              <a:rPr lang="en-US" sz="1100" b="1" dirty="0">
+                <a:solidFill>
+                  <a:srgbClr val="475569"/>
                 </a:solidFill>
                 <a:latin typeface="Trebuchet MS" pitchFamily="34" charset="0"/>
                 <a:ea typeface="Trebuchet MS" pitchFamily="34" charset="-122"/>
                 <a:cs typeface="Trebuchet MS" pitchFamily="34" charset="-120"/>
               </a:rPr>
-              <a:t>·</a:t>
-            </a:r>
-            <a:endParaRPr lang="en-US" sz="1600" dirty="0"/>
-          </a:p>
-        </p:txBody>
-      </p:sp>
-      <p:sp>
-        <p:nvSpPr>
-          <p:cNvPr id="37" name="Shape 35"/>
-          <p:cNvSpPr/>
-          <p:nvPr/>
-        </p:nvSpPr>
-        <p:spPr>
-          <a:xfrm>
-            <a:off x="6858000" y="3364992"/>
-            <a:ext cx="1554480" cy="475488"/>
+              <a:t>Phonemes</a:t>
+            </a:r>
+            <a:endParaRPr lang="en-US" sz="1100" dirty="0"/>
+          </a:p>
+        </p:txBody>
+      </p:sp>
+      <p:sp>
+        <p:nvSpPr>
+          <p:cNvPr id="38" name="Shape 36"/>
+          <p:cNvSpPr/>
+          <p:nvPr/>
+        </p:nvSpPr>
+        <p:spPr>
+          <a:xfrm>
+            <a:off x="1874520" y="4096512"/>
+            <a:ext cx="6903720" cy="804672"/>
           </a:xfrm>
           <a:prstGeom prst="rect">
             <a:avLst>
-              <a:gd name="adj" fmla="val 9615"/>
+              <a:gd name="adj" fmla="val 6818"/>
             </a:avLst>
           </a:prstGeom>
           <a:solidFill>
+            <a:srgbClr val="FCE7F3"/>
+          </a:solidFill>
+          <a:ln w="12700">
+            <a:solidFill>
+              <a:srgbClr val="DB2777"/>
+            </a:solidFill>
+            <a:prstDash val="solid"/>
+          </a:ln>
+        </p:spPr>
+      </p:sp>
+      <p:sp>
+        <p:nvSpPr>
+          <p:cNvPr id="39" name="Shape 37"/>
+          <p:cNvSpPr/>
+          <p:nvPr/>
+        </p:nvSpPr>
+        <p:spPr>
+          <a:xfrm>
+            <a:off x="1951330" y="4169664"/>
+            <a:ext cx="676656" cy="384048"/>
+          </a:xfrm>
+          <a:prstGeom prst="rect">
+            <a:avLst>
+              <a:gd name="adj" fmla="val 9524"/>
+            </a:avLst>
+          </a:prstGeom>
+          <a:solidFill>
             <a:srgbClr val="FFFFFF"/>
           </a:solidFill>
           <a:ln w="12700">
             <a:solidFill>
-              <a:srgbClr val="0D9488"/>
-            </a:solidFill>
-            <a:prstDash val="solid"/>
-          </a:ln>
-        </p:spPr>
-      </p:sp>
-      <p:sp>
-        <p:nvSpPr>
-          <p:cNvPr id="38" name="Text 36"/>
-          <p:cNvSpPr/>
-          <p:nvPr/>
-        </p:nvSpPr>
-        <p:spPr>
-          <a:xfrm>
-            <a:off x="6858000" y="3364992"/>
-            <a:ext cx="1554480" cy="475488"/>
-          </a:xfrm>
-          <a:prstGeom prst="rect">
-            <a:avLst/>
-          </a:prstGeom>
-          <a:noFill/>
-          <a:ln/>
-        </p:spPr>
-        <p:txBody>
-          <a:bodyPr wrap="square" lIns="0" tIns="0" rIns="0" bIns="0" rtlCol="0" anchor="ctr"/>
-          <a:lstStyle/>
-          <a:p>
-            <a:pPr algn="ctr" indent="0" marL="0">
-              <a:buNone/>
-            </a:pPr>
-            <a:r>
-              <a:rPr lang="en-US" sz="1400" b="1" dirty="0">
-                <a:solidFill>
-                  <a:srgbClr val="0D9488"/>
+              <a:srgbClr val="DB2777"/>
+            </a:solidFill>
+            <a:prstDash val="solid"/>
+          </a:ln>
+        </p:spPr>
+      </p:sp>
+      <p:sp>
+        <p:nvSpPr>
+          <p:cNvPr id="40" name="Text 38"/>
+          <p:cNvSpPr/>
+          <p:nvPr/>
+        </p:nvSpPr>
+        <p:spPr>
+          <a:xfrm>
+            <a:off x="1951330" y="4169664"/>
+            <a:ext cx="676656" cy="384048"/>
+          </a:xfrm>
+          <a:prstGeom prst="rect">
+            <a:avLst/>
+          </a:prstGeom>
+          <a:noFill/>
+          <a:ln/>
+        </p:spPr>
+        <p:txBody>
+          <a:bodyPr wrap="square" lIns="0" tIns="0" rIns="0" bIns="0" rtlCol="0" anchor="ctr"/>
+          <a:lstStyle/>
+          <a:p>
+            <a:pPr algn="ctr" indent="0" marL="0">
+              <a:buNone/>
+            </a:pPr>
+            <a:r>
+              <a:rPr lang="en-US" sz="900" b="1" dirty="0">
+                <a:solidFill>
+                  <a:srgbClr val="9D174D"/>
                 </a:solidFill>
                 <a:latin typeface="Trebuchet MS" pitchFamily="34" charset="0"/>
                 <a:ea typeface="Trebuchet MS" pitchFamily="34" charset="-122"/>
                 <a:cs typeface="Trebuchet MS" pitchFamily="34" charset="-120"/>
               </a:rPr>
-              <a:t>ble</a:t>
-            </a:r>
-            <a:endParaRPr lang="en-US" sz="1400" dirty="0"/>
-          </a:p>
-        </p:txBody>
-      </p:sp>
-      <p:sp>
-        <p:nvSpPr>
-          <p:cNvPr id="39" name="Shape 37"/>
-          <p:cNvSpPr/>
-          <p:nvPr/>
-        </p:nvSpPr>
-        <p:spPr>
-          <a:xfrm>
-            <a:off x="365760" y="4096512"/>
-            <a:ext cx="1371600" cy="804672"/>
+              <a:t>p</a:t>
+            </a:r>
+            <a:endParaRPr lang="en-US" sz="900" dirty="0"/>
+          </a:p>
+        </p:txBody>
+      </p:sp>
+      <p:sp>
+        <p:nvSpPr>
+          <p:cNvPr id="41" name="Shape 39"/>
+          <p:cNvSpPr/>
+          <p:nvPr/>
+        </p:nvSpPr>
+        <p:spPr>
+          <a:xfrm>
+            <a:off x="2677363" y="4169664"/>
+            <a:ext cx="676656" cy="384048"/>
           </a:xfrm>
           <a:prstGeom prst="rect">
             <a:avLst>
-              <a:gd name="adj" fmla="val 6818"/>
+              <a:gd name="adj" fmla="val 9524"/>
             </a:avLst>
           </a:prstGeom>
           <a:solidFill>
-            <a:srgbClr val="E2E8F0"/>
-          </a:solidFill>
-          <a:ln w="12700">
-            <a:solidFill>
-              <a:srgbClr val="E2E8F0"/>
-            </a:solidFill>
-            <a:prstDash val="solid"/>
-          </a:ln>
-        </p:spPr>
-      </p:sp>
-      <p:sp>
-        <p:nvSpPr>
-          <p:cNvPr id="40" name="Text 38"/>
-          <p:cNvSpPr/>
-          <p:nvPr/>
-        </p:nvSpPr>
-        <p:spPr>
-          <a:xfrm>
-            <a:off x="365760" y="4096512"/>
-            <a:ext cx="1371600" cy="804672"/>
-          </a:xfrm>
-          <a:prstGeom prst="rect">
-            <a:avLst/>
-          </a:prstGeom>
-          <a:noFill/>
-          <a:ln/>
-        </p:spPr>
-        <p:txBody>
-          <a:bodyPr wrap="square" lIns="0" tIns="0" rIns="0" bIns="0" rtlCol="0" anchor="ctr"/>
-          <a:lstStyle/>
-          <a:p>
-            <a:pPr algn="ctr" indent="0" marL="0">
-              <a:buNone/>
-            </a:pPr>
-            <a:r>
-              <a:rPr lang="en-US" sz="1100" b="1" dirty="0">
-                <a:solidFill>
-                  <a:srgbClr val="475569"/>
+            <a:srgbClr val="FFFFFF"/>
+          </a:solidFill>
+          <a:ln w="12700">
+            <a:solidFill>
+              <a:srgbClr val="DB2777"/>
+            </a:solidFill>
+            <a:prstDash val="solid"/>
+          </a:ln>
+        </p:spPr>
+      </p:sp>
+      <p:sp>
+        <p:nvSpPr>
+          <p:cNvPr id="42" name="Text 40"/>
+          <p:cNvSpPr/>
+          <p:nvPr/>
+        </p:nvSpPr>
+        <p:spPr>
+          <a:xfrm>
+            <a:off x="2677363" y="4169664"/>
+            <a:ext cx="676656" cy="384048"/>
+          </a:xfrm>
+          <a:prstGeom prst="rect">
+            <a:avLst/>
+          </a:prstGeom>
+          <a:noFill/>
+          <a:ln/>
+        </p:spPr>
+        <p:txBody>
+          <a:bodyPr wrap="square" lIns="0" tIns="0" rIns="0" bIns="0" rtlCol="0" anchor="ctr"/>
+          <a:lstStyle/>
+          <a:p>
+            <a:pPr algn="ctr" indent="0" marL="0">
+              <a:buNone/>
+            </a:pPr>
+            <a:r>
+              <a:rPr lang="en-US" sz="900" b="1" dirty="0">
+                <a:solidFill>
+                  <a:srgbClr val="9D174D"/>
                 </a:solidFill>
                 <a:latin typeface="Trebuchet MS" pitchFamily="34" charset="0"/>
                 <a:ea typeface="Trebuchet MS" pitchFamily="34" charset="-122"/>
                 <a:cs typeface="Trebuchet MS" pitchFamily="34" charset="-120"/>
               </a:rPr>
-              <a:t>Phonemes</a:t>
-            </a:r>
-            <a:endParaRPr lang="en-US" sz="1100" dirty="0"/>
-          </a:p>
-        </p:txBody>
-      </p:sp>
-      <p:sp>
-        <p:nvSpPr>
-          <p:cNvPr id="41" name="Shape 39"/>
-          <p:cNvSpPr/>
-          <p:nvPr/>
-        </p:nvSpPr>
-        <p:spPr>
-          <a:xfrm>
-            <a:off x="1874520" y="4096512"/>
-            <a:ext cx="6903720" cy="658368"/>
+              <a:t>r</a:t>
+            </a:r>
+            <a:endParaRPr lang="en-US" sz="900" dirty="0"/>
+          </a:p>
+        </p:txBody>
+      </p:sp>
+      <p:sp>
+        <p:nvSpPr>
+          <p:cNvPr id="43" name="Shape 41"/>
+          <p:cNvSpPr/>
+          <p:nvPr/>
+        </p:nvSpPr>
+        <p:spPr>
+          <a:xfrm>
+            <a:off x="3403397" y="4169664"/>
+            <a:ext cx="676656" cy="384048"/>
           </a:xfrm>
           <a:prstGeom prst="rect">
             <a:avLst>
-              <a:gd name="adj" fmla="val 8333"/>
+              <a:gd name="adj" fmla="val 9524"/>
             </a:avLst>
           </a:prstGeom>
           <a:solidFill>
-            <a:srgbClr val="FCE7F3"/>
+            <a:srgbClr val="FFFFFF"/>
           </a:solidFill>
           <a:ln w="12700">
             <a:solidFill>
@@ -34036,41 +35893,14 @@
       </p:sp>
       <p:sp>
         <p:nvSpPr>
-          <p:cNvPr id="42" name="Shape 40"/>
-          <p:cNvSpPr/>
-          <p:nvPr/>
-        </p:nvSpPr>
-        <p:spPr>
-          <a:xfrm>
-            <a:off x="1951828" y="4169664"/>
-            <a:ext cx="603504" cy="475488"/>
-          </a:xfrm>
-          <a:prstGeom prst="rect">
-            <a:avLst>
-              <a:gd name="adj" fmla="val 7692"/>
-            </a:avLst>
-          </a:prstGeom>
-          <a:solidFill>
-            <a:srgbClr val="FFFFFF"/>
-          </a:solidFill>
-          <a:ln w="12700">
-            <a:solidFill>
-              <a:srgbClr val="DB2777"/>
-            </a:solidFill>
-            <a:prstDash val="solid"/>
-          </a:ln>
-        </p:spPr>
-      </p:sp>
-      <p:sp>
-        <p:nvSpPr>
-          <p:cNvPr id="43" name="Text 41"/>
-          <p:cNvSpPr/>
-          <p:nvPr/>
-        </p:nvSpPr>
-        <p:spPr>
-          <a:xfrm>
-            <a:off x="1951828" y="4169664"/>
-            <a:ext cx="603504" cy="475488"/>
+          <p:cNvPr id="44" name="Text 42"/>
+          <p:cNvSpPr/>
+          <p:nvPr/>
+        </p:nvSpPr>
+        <p:spPr>
+          <a:xfrm>
+            <a:off x="3403397" y="4169664"/>
+            <a:ext cx="676656" cy="384048"/>
           </a:xfrm>
           <a:prstGeom prst="rect">
             <a:avLst/>
@@ -34094,7 +35924,7 @@
                 <a:ea typeface="Trebuchet MS" pitchFamily="34" charset="-122"/>
                 <a:cs typeface="Trebuchet MS" pitchFamily="34" charset="-120"/>
               </a:rPr>
-              <a:t>p</a:t>
+              <a:t>e</a:t>
             </a:r>
             <a:endParaRPr lang="en-US" sz="900" dirty="0"/>
           </a:p>
@@ -34102,18 +35932,18 @@
       </p:sp>
       <p:sp>
         <p:nvSpPr>
-          <p:cNvPr id="44" name="Shape 42"/>
-          <p:cNvSpPr/>
-          <p:nvPr/>
-        </p:nvSpPr>
-        <p:spPr>
-          <a:xfrm>
-            <a:off x="2605209" y="4169664"/>
-            <a:ext cx="603504" cy="475488"/>
+          <p:cNvPr id="45" name="Shape 43"/>
+          <p:cNvSpPr/>
+          <p:nvPr/>
+        </p:nvSpPr>
+        <p:spPr>
+          <a:xfrm>
+            <a:off x="4129430" y="4169664"/>
+            <a:ext cx="676656" cy="384048"/>
           </a:xfrm>
           <a:prstGeom prst="rect">
             <a:avLst>
-              <a:gd name="adj" fmla="val 7692"/>
+              <a:gd name="adj" fmla="val 9524"/>
             </a:avLst>
           </a:prstGeom>
           <a:solidFill>
@@ -34129,14 +35959,14 @@
       </p:sp>
       <p:sp>
         <p:nvSpPr>
-          <p:cNvPr id="45" name="Text 43"/>
-          <p:cNvSpPr/>
-          <p:nvPr/>
-        </p:nvSpPr>
-        <p:spPr>
-          <a:xfrm>
-            <a:off x="2605209" y="4169664"/>
-            <a:ext cx="603504" cy="475488"/>
+          <p:cNvPr id="46" name="Text 44"/>
+          <p:cNvSpPr/>
+          <p:nvPr/>
+        </p:nvSpPr>
+        <p:spPr>
+          <a:xfrm>
+            <a:off x="4129430" y="4169664"/>
+            <a:ext cx="676656" cy="384048"/>
           </a:xfrm>
           <a:prstGeom prst="rect">
             <a:avLst/>
@@ -34160,7 +35990,7 @@
                 <a:ea typeface="Trebuchet MS" pitchFamily="34" charset="-122"/>
                 <a:cs typeface="Trebuchet MS" pitchFamily="34" charset="-120"/>
               </a:rPr>
-              <a:t>r</a:t>
+              <a:t>v</a:t>
             </a:r>
             <a:endParaRPr lang="en-US" sz="900" dirty="0"/>
           </a:p>
@@ -34168,18 +35998,18 @@
       </p:sp>
       <p:sp>
         <p:nvSpPr>
-          <p:cNvPr id="46" name="Shape 44"/>
-          <p:cNvSpPr/>
-          <p:nvPr/>
-        </p:nvSpPr>
-        <p:spPr>
-          <a:xfrm>
-            <a:off x="3258589" y="4169664"/>
-            <a:ext cx="603504" cy="475488"/>
+          <p:cNvPr id="47" name="Shape 45"/>
+          <p:cNvSpPr/>
+          <p:nvPr/>
+        </p:nvSpPr>
+        <p:spPr>
+          <a:xfrm>
+            <a:off x="4855464" y="4169664"/>
+            <a:ext cx="676656" cy="384048"/>
           </a:xfrm>
           <a:prstGeom prst="rect">
             <a:avLst>
-              <a:gd name="adj" fmla="val 7692"/>
+              <a:gd name="adj" fmla="val 9524"/>
             </a:avLst>
           </a:prstGeom>
           <a:solidFill>
@@ -34195,14 +36025,14 @@
       </p:sp>
       <p:sp>
         <p:nvSpPr>
-          <p:cNvPr id="47" name="Text 45"/>
-          <p:cNvSpPr/>
-          <p:nvPr/>
-        </p:nvSpPr>
-        <p:spPr>
-          <a:xfrm>
-            <a:off x="3258589" y="4169664"/>
-            <a:ext cx="603504" cy="475488"/>
+          <p:cNvPr id="48" name="Text 46"/>
+          <p:cNvSpPr/>
+          <p:nvPr/>
+        </p:nvSpPr>
+        <p:spPr>
+          <a:xfrm>
+            <a:off x="4855464" y="4169664"/>
+            <a:ext cx="676656" cy="384048"/>
           </a:xfrm>
           <a:prstGeom prst="rect">
             <a:avLst/>
@@ -34234,18 +36064,18 @@
       </p:sp>
       <p:sp>
         <p:nvSpPr>
-          <p:cNvPr id="48" name="Shape 46"/>
-          <p:cNvSpPr/>
-          <p:nvPr/>
-        </p:nvSpPr>
-        <p:spPr>
-          <a:xfrm>
-            <a:off x="3911969" y="4169664"/>
-            <a:ext cx="603504" cy="475488"/>
+          <p:cNvPr id="49" name="Shape 47"/>
+          <p:cNvSpPr/>
+          <p:nvPr/>
+        </p:nvSpPr>
+        <p:spPr>
+          <a:xfrm>
+            <a:off x="5581498" y="4169664"/>
+            <a:ext cx="676656" cy="384048"/>
           </a:xfrm>
           <a:prstGeom prst="rect">
             <a:avLst>
-              <a:gd name="adj" fmla="val 7692"/>
+              <a:gd name="adj" fmla="val 9524"/>
             </a:avLst>
           </a:prstGeom>
           <a:solidFill>
@@ -34261,14 +36091,14 @@
       </p:sp>
       <p:sp>
         <p:nvSpPr>
-          <p:cNvPr id="49" name="Text 47"/>
-          <p:cNvSpPr/>
-          <p:nvPr/>
-        </p:nvSpPr>
-        <p:spPr>
-          <a:xfrm>
-            <a:off x="3911969" y="4169664"/>
-            <a:ext cx="603504" cy="475488"/>
+          <p:cNvPr id="50" name="Text 48"/>
+          <p:cNvSpPr/>
+          <p:nvPr/>
+        </p:nvSpPr>
+        <p:spPr>
+          <a:xfrm>
+            <a:off x="5581498" y="4169664"/>
+            <a:ext cx="676656" cy="384048"/>
           </a:xfrm>
           <a:prstGeom prst="rect">
             <a:avLst/>
@@ -34292,7 +36122,7 @@
                 <a:ea typeface="Trebuchet MS" pitchFamily="34" charset="-122"/>
                 <a:cs typeface="Trebuchet MS" pitchFamily="34" charset="-120"/>
               </a:rPr>
-              <a:t>v</a:t>
+              <a:t>n</a:t>
             </a:r>
             <a:endParaRPr lang="en-US" sz="900" dirty="0"/>
           </a:p>
@@ -34300,18 +36130,18 @@
       </p:sp>
       <p:sp>
         <p:nvSpPr>
-          <p:cNvPr id="50" name="Shape 48"/>
-          <p:cNvSpPr/>
-          <p:nvPr/>
-        </p:nvSpPr>
-        <p:spPr>
-          <a:xfrm>
-            <a:off x="4565350" y="4169664"/>
-            <a:ext cx="603504" cy="475488"/>
+          <p:cNvPr id="51" name="Shape 49"/>
+          <p:cNvSpPr/>
+          <p:nvPr/>
+        </p:nvSpPr>
+        <p:spPr>
+          <a:xfrm>
+            <a:off x="6307531" y="4169664"/>
+            <a:ext cx="676656" cy="384048"/>
           </a:xfrm>
           <a:prstGeom prst="rect">
             <a:avLst>
-              <a:gd name="adj" fmla="val 7692"/>
+              <a:gd name="adj" fmla="val 9524"/>
             </a:avLst>
           </a:prstGeom>
           <a:solidFill>
@@ -34327,14 +36157,14 @@
       </p:sp>
       <p:sp>
         <p:nvSpPr>
-          <p:cNvPr id="51" name="Text 49"/>
-          <p:cNvSpPr/>
-          <p:nvPr/>
-        </p:nvSpPr>
-        <p:spPr>
-          <a:xfrm>
-            <a:off x="4565350" y="4169664"/>
-            <a:ext cx="603504" cy="475488"/>
+          <p:cNvPr id="52" name="Text 50"/>
+          <p:cNvSpPr/>
+          <p:nvPr/>
+        </p:nvSpPr>
+        <p:spPr>
+          <a:xfrm>
+            <a:off x="6307531" y="4169664"/>
+            <a:ext cx="676656" cy="384048"/>
           </a:xfrm>
           <a:prstGeom prst="rect">
             <a:avLst/>
@@ -34358,7 +36188,7 @@
                 <a:ea typeface="Trebuchet MS" pitchFamily="34" charset="-122"/>
                 <a:cs typeface="Trebuchet MS" pitchFamily="34" charset="-120"/>
               </a:rPr>
-              <a:t>e</a:t>
+              <a:t>t</a:t>
             </a:r>
             <a:endParaRPr lang="en-US" sz="900" dirty="0"/>
           </a:p>
@@ -34366,18 +36196,18 @@
       </p:sp>
       <p:sp>
         <p:nvSpPr>
-          <p:cNvPr id="52" name="Shape 50"/>
-          <p:cNvSpPr/>
-          <p:nvPr/>
-        </p:nvSpPr>
-        <p:spPr>
-          <a:xfrm>
-            <a:off x="5218730" y="4169664"/>
-            <a:ext cx="603504" cy="475488"/>
+          <p:cNvPr id="53" name="Shape 51"/>
+          <p:cNvSpPr/>
+          <p:nvPr/>
+        </p:nvSpPr>
+        <p:spPr>
+          <a:xfrm>
+            <a:off x="7033565" y="4169664"/>
+            <a:ext cx="676656" cy="384048"/>
           </a:xfrm>
           <a:prstGeom prst="rect">
             <a:avLst>
-              <a:gd name="adj" fmla="val 7692"/>
+              <a:gd name="adj" fmla="val 9524"/>
             </a:avLst>
           </a:prstGeom>
           <a:solidFill>
@@ -34393,14 +36223,14 @@
       </p:sp>
       <p:sp>
         <p:nvSpPr>
-          <p:cNvPr id="53" name="Text 51"/>
-          <p:cNvSpPr/>
-          <p:nvPr/>
-        </p:nvSpPr>
-        <p:spPr>
-          <a:xfrm>
-            <a:off x="5218730" y="4169664"/>
-            <a:ext cx="603504" cy="475488"/>
+          <p:cNvPr id="54" name="Text 52"/>
+          <p:cNvSpPr/>
+          <p:nvPr/>
+        </p:nvSpPr>
+        <p:spPr>
+          <a:xfrm>
+            <a:off x="7033565" y="4169664"/>
+            <a:ext cx="676656" cy="384048"/>
           </a:xfrm>
           <a:prstGeom prst="rect">
             <a:avLst/>
@@ -34424,7 +36254,7 @@
                 <a:ea typeface="Trebuchet MS" pitchFamily="34" charset="-122"/>
                 <a:cs typeface="Trebuchet MS" pitchFamily="34" charset="-120"/>
               </a:rPr>
-              <a:t>n</a:t>
+              <a:t>i</a:t>
             </a:r>
             <a:endParaRPr lang="en-US" sz="900" dirty="0"/>
           </a:p>
@@ -34432,18 +36262,18 @@
       </p:sp>
       <p:sp>
         <p:nvSpPr>
-          <p:cNvPr id="54" name="Shape 52"/>
-          <p:cNvSpPr/>
-          <p:nvPr/>
-        </p:nvSpPr>
-        <p:spPr>
-          <a:xfrm>
-            <a:off x="5872111" y="4169664"/>
-            <a:ext cx="603504" cy="475488"/>
+          <p:cNvPr id="55" name="Shape 53"/>
+          <p:cNvSpPr/>
+          <p:nvPr/>
+        </p:nvSpPr>
+        <p:spPr>
+          <a:xfrm>
+            <a:off x="7759598" y="4169664"/>
+            <a:ext cx="676656" cy="384048"/>
           </a:xfrm>
           <a:prstGeom prst="rect">
             <a:avLst>
-              <a:gd name="adj" fmla="val 7692"/>
+              <a:gd name="adj" fmla="val 9524"/>
             </a:avLst>
           </a:prstGeom>
           <a:solidFill>
@@ -34459,14 +36289,14 @@
       </p:sp>
       <p:sp>
         <p:nvSpPr>
-          <p:cNvPr id="55" name="Text 53"/>
-          <p:cNvSpPr/>
-          <p:nvPr/>
-        </p:nvSpPr>
-        <p:spPr>
-          <a:xfrm>
-            <a:off x="5872111" y="4169664"/>
-            <a:ext cx="603504" cy="475488"/>
+          <p:cNvPr id="56" name="Text 54"/>
+          <p:cNvSpPr/>
+          <p:nvPr/>
+        </p:nvSpPr>
+        <p:spPr>
+          <a:xfrm>
+            <a:off x="7759598" y="4169664"/>
+            <a:ext cx="676656" cy="384048"/>
           </a:xfrm>
           <a:prstGeom prst="rect">
             <a:avLst/>
@@ -34490,7 +36320,7 @@
                 <a:ea typeface="Trebuchet MS" pitchFamily="34" charset="-122"/>
                 <a:cs typeface="Trebuchet MS" pitchFamily="34" charset="-120"/>
               </a:rPr>
-              <a:t>t</a:t>
+              <a:t>ve</a:t>
             </a:r>
             <a:endParaRPr lang="en-US" sz="900" dirty="0"/>
           </a:p>
@@ -34498,199 +36328,40 @@
       </p:sp>
       <p:sp>
         <p:nvSpPr>
-          <p:cNvPr id="56" name="Shape 54"/>
-          <p:cNvSpPr/>
-          <p:nvPr/>
-        </p:nvSpPr>
-        <p:spPr>
-          <a:xfrm>
-            <a:off x="6525491" y="4169664"/>
-            <a:ext cx="603504" cy="475488"/>
-          </a:xfrm>
-          <a:prstGeom prst="rect">
-            <a:avLst>
-              <a:gd name="adj" fmla="val 7692"/>
-            </a:avLst>
-          </a:prstGeom>
-          <a:solidFill>
-            <a:srgbClr val="FFFFFF"/>
-          </a:solidFill>
-          <a:ln w="12700">
-            <a:solidFill>
-              <a:srgbClr val="DB2777"/>
-            </a:solidFill>
-            <a:prstDash val="solid"/>
-          </a:ln>
-        </p:spPr>
-      </p:sp>
-      <p:sp>
-        <p:nvSpPr>
           <p:cNvPr id="57" name="Text 55"/>
           <p:cNvSpPr/>
           <p:nvPr/>
         </p:nvSpPr>
         <p:spPr>
           <a:xfrm>
-            <a:off x="6525491" y="4169664"/>
-            <a:ext cx="603504" cy="475488"/>
-          </a:xfrm>
-          <a:prstGeom prst="rect">
-            <a:avLst/>
-          </a:prstGeom>
-          <a:noFill/>
-          <a:ln/>
-        </p:spPr>
-        <p:txBody>
-          <a:bodyPr wrap="square" lIns="0" tIns="0" rIns="0" bIns="0" rtlCol="0" anchor="ctr"/>
-          <a:lstStyle/>
-          <a:p>
-            <a:pPr algn="ctr" indent="0" marL="0">
-              <a:buNone/>
-            </a:pPr>
-            <a:r>
-              <a:rPr lang="en-US" sz="900" b="1" dirty="0">
-                <a:solidFill>
-                  <a:srgbClr val="9D174D"/>
-                </a:solidFill>
-                <a:latin typeface="Trebuchet MS" pitchFamily="34" charset="0"/>
-                <a:ea typeface="Trebuchet MS" pitchFamily="34" charset="-122"/>
-                <a:cs typeface="Trebuchet MS" pitchFamily="34" charset="-120"/>
-              </a:rPr>
-              <a:t>a</a:t>
-            </a:r>
-            <a:endParaRPr lang="en-US" sz="900" dirty="0"/>
-          </a:p>
-        </p:txBody>
-      </p:sp>
-      <p:sp>
-        <p:nvSpPr>
-          <p:cNvPr id="58" name="Shape 56"/>
-          <p:cNvSpPr/>
-          <p:nvPr/>
-        </p:nvSpPr>
-        <p:spPr>
-          <a:xfrm>
-            <a:off x="7178871" y="4169664"/>
-            <a:ext cx="603504" cy="475488"/>
-          </a:xfrm>
-          <a:prstGeom prst="rect">
-            <a:avLst>
-              <a:gd name="adj" fmla="val 7692"/>
-            </a:avLst>
-          </a:prstGeom>
-          <a:solidFill>
-            <a:srgbClr val="FFFFFF"/>
-          </a:solidFill>
-          <a:ln w="12700">
-            <a:solidFill>
-              <a:srgbClr val="DB2777"/>
-            </a:solidFill>
-            <a:prstDash val="solid"/>
-          </a:ln>
-        </p:spPr>
-      </p:sp>
-      <p:sp>
-        <p:nvSpPr>
-          <p:cNvPr id="59" name="Text 57"/>
-          <p:cNvSpPr/>
-          <p:nvPr/>
-        </p:nvSpPr>
-        <p:spPr>
-          <a:xfrm>
-            <a:off x="7178871" y="4169664"/>
-            <a:ext cx="603504" cy="475488"/>
-          </a:xfrm>
-          <a:prstGeom prst="rect">
-            <a:avLst/>
-          </a:prstGeom>
-          <a:noFill/>
-          <a:ln/>
-        </p:spPr>
-        <p:txBody>
-          <a:bodyPr wrap="square" lIns="0" tIns="0" rIns="0" bIns="0" rtlCol="0" anchor="ctr"/>
-          <a:lstStyle/>
-          <a:p>
-            <a:pPr algn="ctr" indent="0" marL="0">
-              <a:buNone/>
-            </a:pPr>
-            <a:r>
-              <a:rPr lang="en-US" sz="900" b="1" dirty="0">
-                <a:solidFill>
-                  <a:srgbClr val="9D174D"/>
-                </a:solidFill>
-                <a:latin typeface="Trebuchet MS" pitchFamily="34" charset="0"/>
-                <a:ea typeface="Trebuchet MS" pitchFamily="34" charset="-122"/>
-                <a:cs typeface="Trebuchet MS" pitchFamily="34" charset="-120"/>
-              </a:rPr>
-              <a:t>b</a:t>
-            </a:r>
-            <a:endParaRPr lang="en-US" sz="900" dirty="0"/>
-          </a:p>
-        </p:txBody>
-      </p:sp>
-      <p:sp>
-        <p:nvSpPr>
-          <p:cNvPr id="60" name="Shape 58"/>
-          <p:cNvSpPr/>
-          <p:nvPr/>
-        </p:nvSpPr>
-        <p:spPr>
-          <a:xfrm>
-            <a:off x="7832252" y="4169664"/>
-            <a:ext cx="603504" cy="475488"/>
-          </a:xfrm>
-          <a:prstGeom prst="rect">
-            <a:avLst>
-              <a:gd name="adj" fmla="val 7692"/>
-            </a:avLst>
-          </a:prstGeom>
-          <a:solidFill>
-            <a:srgbClr val="FFFFFF"/>
-          </a:solidFill>
-          <a:ln w="12700">
-            <a:solidFill>
-              <a:srgbClr val="DB2777"/>
-            </a:solidFill>
-            <a:prstDash val="solid"/>
-          </a:ln>
-        </p:spPr>
-      </p:sp>
-      <p:sp>
-        <p:nvSpPr>
-          <p:cNvPr id="61" name="Text 59"/>
-          <p:cNvSpPr/>
-          <p:nvPr/>
-        </p:nvSpPr>
-        <p:spPr>
-          <a:xfrm>
-            <a:off x="7832252" y="4169664"/>
-            <a:ext cx="603504" cy="475488"/>
-          </a:xfrm>
-          <a:prstGeom prst="rect">
-            <a:avLst/>
-          </a:prstGeom>
-          <a:noFill/>
-          <a:ln/>
-        </p:spPr>
-        <p:txBody>
-          <a:bodyPr wrap="square" lIns="0" tIns="0" rIns="0" bIns="0" rtlCol="0" anchor="ctr"/>
-          <a:lstStyle/>
-          <a:p>
-            <a:pPr algn="ctr" indent="0" marL="0">
-              <a:buNone/>
-            </a:pPr>
-            <a:r>
-              <a:rPr lang="en-US" sz="900" b="1" dirty="0">
-                <a:solidFill>
-                  <a:srgbClr val="9D174D"/>
-                </a:solidFill>
-                <a:latin typeface="Trebuchet MS" pitchFamily="34" charset="0"/>
-                <a:ea typeface="Trebuchet MS" pitchFamily="34" charset="-122"/>
-                <a:cs typeface="Trebuchet MS" pitchFamily="34" charset="-120"/>
-              </a:rPr>
-              <a:t>le</a:t>
-            </a:r>
-            <a:endParaRPr lang="en-US" sz="900" dirty="0"/>
+            <a:off x="7759598" y="4572000"/>
+            <a:ext cx="676656" cy="219456"/>
+          </a:xfrm>
+          <a:prstGeom prst="rect">
+            <a:avLst/>
+          </a:prstGeom>
+          <a:noFill/>
+          <a:ln/>
+        </p:spPr>
+        <p:txBody>
+          <a:bodyPr wrap="square" lIns="0" tIns="0" rIns="0" bIns="0" rtlCol="0" anchor="t"/>
+          <a:lstStyle/>
+          <a:p>
+            <a:pPr algn="ctr" indent="0" marL="0">
+              <a:buNone/>
+            </a:pPr>
+            <a:r>
+              <a:rPr lang="en-US" sz="750" i="1" dirty="0">
+                <a:solidFill>
+                  <a:srgbClr val="94A3B8"/>
+                </a:solidFill>
+                <a:latin typeface="Calibri" pitchFamily="34" charset="0"/>
+                <a:ea typeface="Calibri" pitchFamily="34" charset="-122"/>
+                <a:cs typeface="Calibri" pitchFamily="34" charset="-120"/>
+              </a:rPr>
+              <a:t>/v/</a:t>
+            </a:r>
+            <a:endParaRPr lang="en-US" sz="750" dirty="0"/>
           </a:p>
         </p:txBody>
       </p:sp>
@@ -36578,7 +38249,7 @@
                 <a:ea typeface="Trebuchet MS" pitchFamily="34" charset="-122"/>
                 <a:cs typeface="Trebuchet MS" pitchFamily="34" charset="-120"/>
               </a:rPr>
-              <a:t>--ion</a:t>
+              <a:t>-ion</a:t>
             </a:r>
             <a:endParaRPr lang="en-US" sz="1300" dirty="0"/>
           </a:p>
@@ -36731,7 +38402,7 @@
                 <a:ea typeface="Trebuchet MS" pitchFamily="34" charset="-122"/>
                 <a:cs typeface="Trebuchet MS" pitchFamily="34" charset="-120"/>
               </a:rPr>
-              <a:t>--ive</a:t>
+              <a:t>-able</a:t>
             </a:r>
             <a:endParaRPr lang="en-US" sz="1300" dirty="0"/>
           </a:p>
@@ -36795,7 +38466,7 @@
                 <a:ea typeface="Trebuchet MS" pitchFamily="34" charset="-122"/>
                 <a:cs typeface="Trebuchet MS" pitchFamily="34" charset="-120"/>
               </a:rPr>
-              <a:t>mis-</a:t>
+              <a:t>re-</a:t>
             </a:r>
             <a:endParaRPr lang="en-US" sz="1300" dirty="0"/>
           </a:p>
@@ -36884,7 +38555,7 @@
                 <a:ea typeface="Trebuchet MS" pitchFamily="34" charset="-122"/>
                 <a:cs typeface="Trebuchet MS" pitchFamily="34" charset="-120"/>
               </a:rPr>
-              <a:t>--able</a:t>
+              <a:t>-ive</a:t>
             </a:r>
             <a:endParaRPr lang="en-US" sz="1300" dirty="0"/>
           </a:p>
@@ -36948,7 +38619,7 @@
                 <a:ea typeface="Trebuchet MS" pitchFamily="34" charset="-122"/>
                 <a:cs typeface="Trebuchet MS" pitchFamily="34" charset="-120"/>
               </a:rPr>
-              <a:t>re-</a:t>
+              <a:t>non-</a:t>
             </a:r>
             <a:endParaRPr lang="en-US" sz="1300" dirty="0"/>
           </a:p>
@@ -37037,7 +38708,7 @@
                 <a:ea typeface="Trebuchet MS" pitchFamily="34" charset="-122"/>
                 <a:cs typeface="Trebuchet MS" pitchFamily="34" charset="-120"/>
               </a:rPr>
-              <a:t>--er</a:t>
+              <a:t>-ed</a:t>
             </a:r>
             <a:endParaRPr lang="en-US" sz="1300" dirty="0"/>
           </a:p>
@@ -37190,7 +38861,7 @@
                 <a:ea typeface="Trebuchet MS" pitchFamily="34" charset="-122"/>
                 <a:cs typeface="Trebuchet MS" pitchFamily="34" charset="-120"/>
               </a:rPr>
-              <a:t>--ing</a:t>
+              <a:t>-ing</a:t>
             </a:r>
             <a:endParaRPr lang="en-US" sz="1300" dirty="0"/>
           </a:p>
@@ -37427,7 +39098,7 @@
                 <a:ea typeface="Trebuchet MS" pitchFamily="34" charset="-122"/>
                 <a:cs typeface="Trebuchet MS" pitchFamily="34" charset="-120"/>
               </a:rPr>
-              <a:t>preventive</a:t>
+              <a:t>preventable</a:t>
             </a:r>
             <a:endParaRPr lang="en-US" sz="1200" dirty="0"/>
           </a:p>
@@ -37493,7 +39164,7 @@
                 <a:ea typeface="Trebuchet MS" pitchFamily="34" charset="-122"/>
                 <a:cs typeface="Trebuchet MS" pitchFamily="34" charset="-120"/>
               </a:rPr>
-              <a:t>preventable</a:t>
+              <a:t>preventive</a:t>
             </a:r>
             <a:endParaRPr lang="en-US" sz="1200" dirty="0"/>
           </a:p>
@@ -37559,7 +39230,7 @@
                 <a:ea typeface="Trebuchet MS" pitchFamily="34" charset="-122"/>
                 <a:cs typeface="Trebuchet MS" pitchFamily="34" charset="-120"/>
               </a:rPr>
-              <a:t>preventably</a:t>
+              <a:t>prevented</a:t>
             </a:r>
             <a:endParaRPr lang="en-US" sz="1200" dirty="0"/>
           </a:p>
@@ -37625,7 +39296,7 @@
                 <a:ea typeface="Trebuchet MS" pitchFamily="34" charset="-122"/>
                 <a:cs typeface="Trebuchet MS" pitchFamily="34" charset="-120"/>
               </a:rPr>
-              <a:t>unpreventable</a:t>
+              <a:t>preventing</a:t>
             </a:r>
             <a:endParaRPr lang="en-US" sz="1200" dirty="0"/>
           </a:p>
@@ -37691,7 +39362,7 @@
                 <a:ea typeface="Trebuchet MS" pitchFamily="34" charset="-122"/>
                 <a:cs typeface="Trebuchet MS" pitchFamily="34" charset="-120"/>
               </a:rPr>
-              <a:t>preventer</a:t>
+              <a:t>preventable</a:t>
             </a:r>
             <a:endParaRPr lang="en-US" sz="1200" dirty="0"/>
           </a:p>
@@ -37757,7 +39428,7 @@
                 <a:ea typeface="Trebuchet MS" pitchFamily="34" charset="-122"/>
                 <a:cs typeface="Trebuchet MS" pitchFamily="34" charset="-120"/>
               </a:rPr>
-              <a:t>preventing</a:t>
+              <a:t>unpreventable</a:t>
             </a:r>
             <a:endParaRPr lang="en-US" sz="1200" dirty="0"/>
           </a:p>
@@ -38945,7 +40616,7 @@
                 <a:ea typeface="Calibri" pitchFamily="34" charset="-122"/>
                 <a:cs typeface="Calibri" pitchFamily="34" charset="-120"/>
               </a:rPr>
-              <a:t>1.  The root 'prevent' comes from Latin.</a:t>
+              <a:t>1.  The root 'prevent' comes from Latin and means to stop something before it happens.</a:t>
             </a:r>
             <a:endParaRPr lang="en-US" sz="1300" dirty="0"/>
           </a:p>
@@ -39084,7 +40755,7 @@
                 <a:ea typeface="Calibri" pitchFamily="34" charset="-122"/>
                 <a:cs typeface="Calibri" pitchFamily="34" charset="-120"/>
               </a:rPr>
-              <a:t>2.  The word 'preventable' means something that cannot be stopped.</a:t>
+              <a:t>2.  Adding the suffix '-able' to 'prevent' makes the word 'preventable'.</a:t>
             </a:r>
             <a:endParaRPr lang="en-US" sz="1300" dirty="0"/>
           </a:p>
@@ -39107,11 +40778,11 @@
             </a:avLst>
           </a:prstGeom>
           <a:solidFill>
-            <a:srgbClr val="FEE2E2"/>
-          </a:solidFill>
-          <a:ln w="12700">
-            <a:solidFill>
-              <a:srgbClr val="DC2626"/>
+            <a:srgbClr val="DCFCE7"/>
+          </a:solidFill>
+          <a:ln w="12700">
+            <a:solidFill>
+              <a:srgbClr val="16A34A"/>
             </a:solidFill>
             <a:prstDash val="solid"/>
           </a:ln>
@@ -39144,13 +40815,13 @@
             <a:r>
               <a:rPr lang="en-US" sz="1100" b="1" dirty="0">
                 <a:solidFill>
-                  <a:srgbClr val="DC2626"/>
+                  <a:srgbClr val="16A34A"/>
                 </a:solidFill>
                 <a:latin typeface="Trebuchet MS" pitchFamily="34" charset="0"/>
                 <a:ea typeface="Trebuchet MS" pitchFamily="34" charset="-122"/>
                 <a:cs typeface="Trebuchet MS" pitchFamily="34" charset="-120"/>
               </a:rPr>
-              <a:t>FALSE</a:t>
+              <a:t>TRUE</a:t>
             </a:r>
             <a:endParaRPr lang="en-US" sz="1100" dirty="0"/>
           </a:p>
@@ -39223,7 +40894,7 @@
                 <a:ea typeface="Calibri" pitchFamily="34" charset="-122"/>
                 <a:cs typeface="Calibri" pitchFamily="34" charset="-120"/>
               </a:rPr>
-              <a:t>3.  Adding the prefix 'un-' to 'preventable' creates a word meaning not able to be stopped.</a:t>
+              <a:t>3.  The root 'prevent' means to encourage something to happen.</a:t>
             </a:r>
             <a:endParaRPr lang="en-US" sz="1300" dirty="0"/>
           </a:p>
@@ -39246,11 +40917,11 @@
             </a:avLst>
           </a:prstGeom>
           <a:solidFill>
-            <a:srgbClr val="DCFCE7"/>
-          </a:solidFill>
-          <a:ln w="12700">
-            <a:solidFill>
-              <a:srgbClr val="16A34A"/>
+            <a:srgbClr val="FEE2E2"/>
+          </a:solidFill>
+          <a:ln w="12700">
+            <a:solidFill>
+              <a:srgbClr val="DC2626"/>
             </a:solidFill>
             <a:prstDash val="solid"/>
           </a:ln>
@@ -39283,13 +40954,13 @@
             <a:r>
               <a:rPr lang="en-US" sz="1100" b="1" dirty="0">
                 <a:solidFill>
-                  <a:srgbClr val="16A34A"/>
+                  <a:srgbClr val="DC2626"/>
                 </a:solidFill>
                 <a:latin typeface="Trebuchet MS" pitchFamily="34" charset="0"/>
                 <a:ea typeface="Trebuchet MS" pitchFamily="34" charset="-122"/>
                 <a:cs typeface="Trebuchet MS" pitchFamily="34" charset="-120"/>
               </a:rPr>
-              <a:t>TRUE</a:t>
+              <a:t>FALSE</a:t>
             </a:r>
             <a:endParaRPr lang="en-US" sz="1100" dirty="0"/>
           </a:p>
@@ -39362,7 +41033,7 @@
                 <a:ea typeface="Calibri" pitchFamily="34" charset="-122"/>
                 <a:cs typeface="Calibri" pitchFamily="34" charset="-120"/>
               </a:rPr>
-              <a:t>4.  Prevention is a noun formed by adding the suffix '-ion' to 'prevent'.</a:t>
+              <a:t>4.  The prefix 'un-' can be added to 'preventable' to mean 'not able to be prevented'.</a:t>
             </a:r>
             <a:endParaRPr lang="en-US" sz="1300" dirty="0"/>
           </a:p>
@@ -39501,7 +41172,7 @@
                 <a:ea typeface="Calibri" pitchFamily="34" charset="-122"/>
                 <a:cs typeface="Calibri" pitchFamily="34" charset="-120"/>
               </a:rPr>
-              <a:t>5.  The root 'prevent' means to cause something to happen.</a:t>
+              <a:t>5.  The word 'prevention' has no suffix attached to the root 'prevent'.</a:t>
             </a:r>
             <a:endParaRPr lang="en-US" sz="1300" dirty="0"/>
           </a:p>
@@ -40272,7 +41943,7 @@
                 <a:ea typeface="Trebuchet MS" pitchFamily="34" charset="-122"/>
                 <a:cs typeface="Trebuchet MS" pitchFamily="34" charset="-120"/>
               </a:rPr>
-              <a:t>preventive</a:t>
+              <a:t>preventable</a:t>
             </a:r>
             <a:endParaRPr lang="en-US" sz="1300" dirty="0"/>
           </a:p>
@@ -40338,7 +42009,7 @@
                 <a:ea typeface="Trebuchet MS" pitchFamily="34" charset="-122"/>
                 <a:cs typeface="Trebuchet MS" pitchFamily="34" charset="-120"/>
               </a:rPr>
-              <a:t>preventable</a:t>
+              <a:t>preventive</a:t>
             </a:r>
             <a:endParaRPr lang="en-US" sz="1300" dirty="0"/>
           </a:p>
@@ -40404,7 +42075,7 @@
                 <a:ea typeface="Trebuchet MS" pitchFamily="34" charset="-122"/>
                 <a:cs typeface="Trebuchet MS" pitchFamily="34" charset="-120"/>
               </a:rPr>
-              <a:t>preventably</a:t>
+              <a:t>prevented</a:t>
             </a:r>
             <a:endParaRPr lang="en-US" sz="1300" dirty="0"/>
           </a:p>
@@ -40470,7 +42141,7 @@
                 <a:ea typeface="Trebuchet MS" pitchFamily="34" charset="-122"/>
                 <a:cs typeface="Trebuchet MS" pitchFamily="34" charset="-120"/>
               </a:rPr>
-              <a:t>unpreventable</a:t>
+              <a:t>preventing</a:t>
             </a:r>
             <a:endParaRPr lang="en-US" sz="1300" dirty="0"/>
           </a:p>
@@ -40536,7 +42207,7 @@
                 <a:ea typeface="Trebuchet MS" pitchFamily="34" charset="-122"/>
                 <a:cs typeface="Trebuchet MS" pitchFamily="34" charset="-120"/>
               </a:rPr>
-              <a:t>preventer</a:t>
+              <a:t>preventable</a:t>
             </a:r>
             <a:endParaRPr lang="en-US" sz="1300" dirty="0"/>
           </a:p>
@@ -41257,7 +42928,7 @@
                 <a:ea typeface="Trebuchet MS" pitchFamily="34" charset="-122"/>
                 <a:cs typeface="Trebuchet MS" pitchFamily="34" charset="-120"/>
               </a:rPr>
-              <a:t>--ion</a:t>
+              <a:t>-ion</a:t>
             </a:r>
             <a:endParaRPr lang="en-US" sz="1300" dirty="0"/>
           </a:p>
@@ -41410,7 +43081,7 @@
                 <a:ea typeface="Trebuchet MS" pitchFamily="34" charset="-122"/>
                 <a:cs typeface="Trebuchet MS" pitchFamily="34" charset="-120"/>
               </a:rPr>
-              <a:t>--ive</a:t>
+              <a:t>-able</a:t>
             </a:r>
             <a:endParaRPr lang="en-US" sz="1300" dirty="0"/>
           </a:p>
@@ -41474,7 +43145,7 @@
                 <a:ea typeface="Trebuchet MS" pitchFamily="34" charset="-122"/>
                 <a:cs typeface="Trebuchet MS" pitchFamily="34" charset="-120"/>
               </a:rPr>
-              <a:t>mis-</a:t>
+              <a:t>re-</a:t>
             </a:r>
             <a:endParaRPr lang="en-US" sz="1300" dirty="0"/>
           </a:p>
@@ -41563,7 +43234,7 @@
                 <a:ea typeface="Trebuchet MS" pitchFamily="34" charset="-122"/>
                 <a:cs typeface="Trebuchet MS" pitchFamily="34" charset="-120"/>
               </a:rPr>
-              <a:t>--able</a:t>
+              <a:t>-ive</a:t>
             </a:r>
             <a:endParaRPr lang="en-US" sz="1300" dirty="0"/>
           </a:p>
@@ -41627,7 +43298,7 @@
                 <a:ea typeface="Trebuchet MS" pitchFamily="34" charset="-122"/>
                 <a:cs typeface="Trebuchet MS" pitchFamily="34" charset="-120"/>
               </a:rPr>
-              <a:t>re-</a:t>
+              <a:t>non-</a:t>
             </a:r>
             <a:endParaRPr lang="en-US" sz="1300" dirty="0"/>
           </a:p>
@@ -41716,7 +43387,7 @@
                 <a:ea typeface="Trebuchet MS" pitchFamily="34" charset="-122"/>
                 <a:cs typeface="Trebuchet MS" pitchFamily="34" charset="-120"/>
               </a:rPr>
-              <a:t>--er</a:t>
+              <a:t>-ed</a:t>
             </a:r>
             <a:endParaRPr lang="en-US" sz="1300" dirty="0"/>
           </a:p>
@@ -41869,7 +43540,7 @@
                 <a:ea typeface="Trebuchet MS" pitchFamily="34" charset="-122"/>
                 <a:cs typeface="Trebuchet MS" pitchFamily="34" charset="-120"/>
               </a:rPr>
-              <a:t>--ing</a:t>
+              <a:t>-ing</a:t>
             </a:r>
             <a:endParaRPr lang="en-US" sz="1300" dirty="0"/>
           </a:p>
@@ -42147,7 +43818,7 @@
         <p:spPr>
           <a:xfrm>
             <a:off x="4892040" y="4178808"/>
-            <a:ext cx="1097280" cy="420624"/>
+            <a:ext cx="950976" cy="420624"/>
           </a:xfrm>
           <a:prstGeom prst="rect">
             <a:avLst>
@@ -42181,7 +43852,7 @@
         <p:spPr>
           <a:xfrm>
             <a:off x="4892040" y="4178808"/>
-            <a:ext cx="1097280" cy="420624"/>
+            <a:ext cx="950976" cy="420624"/>
           </a:xfrm>
           <a:prstGeom prst="rect">
             <a:avLst/>
@@ -42205,7 +43876,7 @@
                 <a:ea typeface="Trebuchet MS" pitchFamily="34" charset="-122"/>
                 <a:cs typeface="Trebuchet MS" pitchFamily="34" charset="-120"/>
               </a:rPr>
-              <a:t>--ion</a:t>
+              <a:t>-ion</a:t>
             </a:r>
             <a:endParaRPr lang="en-US" sz="1300" dirty="0"/>
           </a:p>
@@ -42219,7 +43890,7 @@
         </p:nvSpPr>
         <p:spPr>
           <a:xfrm>
-            <a:off x="6062472" y="4178808"/>
+            <a:off x="5916168" y="4178808"/>
             <a:ext cx="365760" cy="420624"/>
           </a:xfrm>
           <a:prstGeom prst="rect">
@@ -42258,7 +43929,7 @@
         </p:nvSpPr>
         <p:spPr>
           <a:xfrm>
-            <a:off x="6473952" y="4178808"/>
+            <a:off x="6327648" y="4178808"/>
             <a:ext cx="2194560" cy="420624"/>
           </a:xfrm>
           <a:prstGeom prst="rect">
@@ -42285,7 +43956,7 @@
         </p:nvSpPr>
         <p:spPr>
           <a:xfrm>
-            <a:off x="6473952" y="4178808"/>
+            <a:off x="6327648" y="4178808"/>
             <a:ext cx="2194560" cy="420624"/>
           </a:xfrm>
           <a:prstGeom prst="rect">
@@ -42780,7 +44451,7 @@
                 <a:ea typeface="Calibri" pitchFamily="34" charset="-122"/>
                 <a:cs typeface="Calibri" pitchFamily="34" charset="-120"/>
               </a:rPr>
-              <a:t>Something that helps stop a problem before it occurs.</a:t>
+              <a:t>Able to be stopped before it happens.</a:t>
             </a:r>
             <a:endParaRPr lang="en-US" sz="1200" dirty="0"/>
           </a:p>
@@ -42919,7 +44590,7 @@
                 <a:ea typeface="Calibri" pitchFamily="34" charset="-122"/>
                 <a:cs typeface="Calibri" pitchFamily="34" charset="-120"/>
               </a:rPr>
-              <a:t>In a way that could have been stopped from happening.</a:t>
+              <a:t>Was stopped from happening in the past.</a:t>
             </a:r>
             <a:endParaRPr lang="en-US" sz="1200" dirty="0"/>
           </a:p>
@@ -42992,7 +44663,7 @@
                 <a:ea typeface="Trebuchet MS" pitchFamily="34" charset="-122"/>
                 <a:cs typeface="Trebuchet MS" pitchFamily="34" charset="-120"/>
               </a:rPr>
-              <a:t>preventive</a:t>
+              <a:t>preventable</a:t>
             </a:r>
             <a:endParaRPr lang="en-US" sz="1200" dirty="0"/>
           </a:p>
@@ -43131,7 +44802,7 @@
                 <a:ea typeface="Trebuchet MS" pitchFamily="34" charset="-122"/>
                 <a:cs typeface="Trebuchet MS" pitchFamily="34" charset="-120"/>
               </a:rPr>
-              <a:t>preventable</a:t>
+              <a:t>preventive</a:t>
             </a:r>
             <a:endParaRPr lang="en-US" sz="1200" dirty="0"/>
           </a:p>
@@ -43197,7 +44868,7 @@
                 <a:ea typeface="Calibri" pitchFamily="34" charset="-122"/>
                 <a:cs typeface="Calibri" pitchFamily="34" charset="-120"/>
               </a:rPr>
-              <a:t>Something that cannot be stopped from happening.</a:t>
+              <a:t>Currently stopping something from happening.</a:t>
             </a:r>
             <a:endParaRPr lang="en-US" sz="1200" dirty="0"/>
           </a:p>
@@ -43270,7 +44941,7 @@
                 <a:ea typeface="Trebuchet MS" pitchFamily="34" charset="-122"/>
                 <a:cs typeface="Trebuchet MS" pitchFamily="34" charset="-120"/>
               </a:rPr>
-              <a:t>preventably</a:t>
+              <a:t>prevented</a:t>
             </a:r>
             <a:endParaRPr lang="en-US" sz="1200" dirty="0"/>
           </a:p>
@@ -43336,7 +45007,7 @@
                 <a:ea typeface="Calibri" pitchFamily="34" charset="-122"/>
                 <a:cs typeface="Calibri" pitchFamily="34" charset="-120"/>
               </a:rPr>
-              <a:t>A person or thing that stops something from happening.</a:t>
+              <a:t>Something that can be avoided or stopped from occurring.</a:t>
             </a:r>
             <a:endParaRPr lang="en-US" sz="1200" dirty="0"/>
           </a:p>
@@ -43409,7 +45080,7 @@
                 <a:ea typeface="Trebuchet MS" pitchFamily="34" charset="-122"/>
                 <a:cs typeface="Trebuchet MS" pitchFamily="34" charset="-120"/>
               </a:rPr>
-              <a:t>unpreventable</a:t>
+              <a:t>preventing</a:t>
             </a:r>
             <a:endParaRPr lang="en-US" sz="1200" dirty="0"/>
           </a:p>
@@ -43475,7 +45146,7 @@
                 <a:ea typeface="Calibri" pitchFamily="34" charset="-122"/>
                 <a:cs typeface="Calibri" pitchFamily="34" charset="-120"/>
               </a:rPr>
-              <a:t>Able to be stopped before it happens.</a:t>
+              <a:t>Something designed to stop a problem before it occurs.</a:t>
             </a:r>
             <a:endParaRPr lang="en-US" sz="1200" dirty="0"/>
           </a:p>
@@ -43548,7 +45219,7 @@
                 <a:ea typeface="Trebuchet MS" pitchFamily="34" charset="-122"/>
                 <a:cs typeface="Trebuchet MS" pitchFamily="34" charset="-120"/>
               </a:rPr>
-              <a:t>preventer</a:t>
+              <a:t>preventable</a:t>
             </a:r>
             <a:endParaRPr lang="en-US" sz="1200" dirty="0"/>
           </a:p>
@@ -44109,7 +45780,7 @@
                 <a:ea typeface="Calibri" pitchFamily="34" charset="-122"/>
                 <a:cs typeface="Calibri" pitchFamily="34" charset="-120"/>
               </a:rPr>
-              <a:t>Washing your hands regularly is one of the best ways to prevent the spread of illness.</a:t>
+              <a:t>Wearing a helmet can prevent serious head injuries when you ride your bike.</a:t>
             </a:r>
             <a:endParaRPr lang="en-US" sz="1500" dirty="0"/>
           </a:p>
@@ -44273,7 +45944,7 @@
                 <a:ea typeface="Calibri" pitchFamily="34" charset="-122"/>
                 <a:cs typeface="Calibri" pitchFamily="34" charset="-120"/>
               </a:rPr>
-              <a:t>The doctor explained that prevention is better than cure, so we should eat well and exercise.</a:t>
+              <a:t>The doctor said that prevention is better than cure, so we should wash our hands regularly.</a:t>
             </a:r>
             <a:endParaRPr lang="en-US" sz="1500" dirty="0"/>
           </a:p>
@@ -44437,7 +46108,7 @@
                 <a:ea typeface="Calibri" pitchFamily="34" charset="-122"/>
                 <a:cs typeface="Calibri" pitchFamily="34" charset="-120"/>
               </a:rPr>
-              <a:t>Wearing a helmet when riding your bike is a preventable way to keep yourself safe from injury.</a:t>
+              <a:t>The firefighters took preventive action by clearing dry leaves away from the houses.</a:t>
             </a:r>
             <a:endParaRPr lang="en-US" sz="1500" dirty="0"/>
           </a:p>
